--- a/shared_sadre/Presentation/Project_Presentation.pptx
+++ b/shared_sadre/Presentation/Project_Presentation.pptx
@@ -4,29 +4,26 @@
   <p:sldMasterIdLst>
     <p:sldMasterId id="2147483648" r:id="rId1"/>
   </p:sldMasterIdLst>
-  <p:notesMasterIdLst>
-    <p:notesMasterId r:id="rId19"/>
-  </p:notesMasterIdLst>
   <p:sldIdLst>
-    <p:sldId id="256" r:id="rId2"/>
-    <p:sldId id="257" r:id="rId3"/>
-    <p:sldId id="258" r:id="rId4"/>
-    <p:sldId id="259" r:id="rId5"/>
-    <p:sldId id="260" r:id="rId6"/>
-    <p:sldId id="261" r:id="rId7"/>
-    <p:sldId id="262" r:id="rId8"/>
-    <p:sldId id="263" r:id="rId9"/>
-    <p:sldId id="264" r:id="rId10"/>
-    <p:sldId id="265" r:id="rId11"/>
-    <p:sldId id="266" r:id="rId12"/>
-    <p:sldId id="267" r:id="rId13"/>
-    <p:sldId id="268" r:id="rId14"/>
-    <p:sldId id="269" r:id="rId15"/>
-    <p:sldId id="270" r:id="rId16"/>
-    <p:sldId id="271" r:id="rId17"/>
-    <p:sldId id="272" r:id="rId18"/>
+    <p:sldId id="256" r:id="rId7"/>
+    <p:sldId id="257" r:id="rId9"/>
+    <p:sldId id="258" r:id="rId10"/>
+    <p:sldId id="259" r:id="rId11"/>
+    <p:sldId id="260" r:id="rId12"/>
+    <p:sldId id="261" r:id="rId13"/>
+    <p:sldId id="262" r:id="rId14"/>
+    <p:sldId id="263" r:id="rId15"/>
+    <p:sldId id="264" r:id="rId16"/>
+    <p:sldId id="265" r:id="rId17"/>
+    <p:sldId id="266" r:id="rId18"/>
+    <p:sldId id="267" r:id="rId19"/>
+    <p:sldId id="268" r:id="rId20"/>
+    <p:sldId id="269" r:id="rId21"/>
+    <p:sldId id="270" r:id="rId22"/>
+    <p:sldId id="271" r:id="rId23"/>
+    <p:sldId id="272" r:id="rId24"/>
   </p:sldIdLst>
-  <p:sldSz cx="12192000" cy="6858000"/>
+  <p:sldSz cx="12191695" cy="6858000" type="screen4x3"/>
   <p:notesSz cx="6858000" cy="9144000"/>
   <p:defaultTextStyle>
     <a:defPPr>
@@ -123,95 +120,11 @@
       </a:defRPr>
     </a:lvl9pPr>
   </p:defaultTextStyle>
-  <p:extLst>
-    <p:ext uri="{EFAFB233-063F-42B5-8137-9DF3F51BA10A}">
-      <p15:sldGuideLst xmlns:p15="http://schemas.microsoft.com/office/powerpoint/2012/main">
-        <p15:guide id="1" orient="horz" pos="2160">
-          <p15:clr>
-            <a:srgbClr val="A4A3A4"/>
-          </p15:clr>
-        </p15:guide>
-        <p15:guide id="2" pos="2880">
-          <p15:clr>
-            <a:srgbClr val="A4A3A4"/>
-          </p15:clr>
-        </p15:guide>
-      </p15:sldGuideLst>
-    </p:ext>
-  </p:extLst>
 </p:presentation>
 </file>
 
-<file path=ppt/changesInfos/changesInfo1.xml><?xml version="1.0" encoding="utf-8"?>
-<pc:chgInfo xmlns:a="http://schemas.openxmlformats.org/drawingml/2006/main" xmlns:r="http://schemas.openxmlformats.org/officeDocument/2006/relationships" xmlns:ac="http://schemas.microsoft.com/office/drawing/2013/main/command" xmlns:pc="http://schemas.microsoft.com/office/powerpoint/2013/main/command">
-  <pc:docChgLst>
-    <pc:chgData name="karthik pamulapati" userId="9bc0e4d158937d22" providerId="LiveId" clId="{2B5C7D74-72C7-4437-BDA8-626CEA43770A}"/>
-    <pc:docChg chg="custSel modSld">
-      <pc:chgData name="karthik pamulapati" userId="9bc0e4d158937d22" providerId="LiveId" clId="{2B5C7D74-72C7-4437-BDA8-626CEA43770A}" dt="2026-07-31T11:50:58.660" v="187" actId="1076"/>
-      <pc:docMkLst>
-        <pc:docMk/>
-      </pc:docMkLst>
-      <pc:sldChg chg="modSp mod">
-        <pc:chgData name="karthik pamulapati" userId="9bc0e4d158937d22" providerId="LiveId" clId="{2B5C7D74-72C7-4437-BDA8-626CEA43770A}" dt="2026-07-31T11:50:23.531" v="181" actId="1036"/>
-        <pc:sldMkLst>
-          <pc:docMk/>
-          <pc:sldMk cId="0" sldId="256"/>
-        </pc:sldMkLst>
-        <pc:spChg chg="mod">
-          <ac:chgData name="karthik pamulapati" userId="9bc0e4d158937d22" providerId="LiveId" clId="{2B5C7D74-72C7-4437-BDA8-626CEA43770A}" dt="2026-07-31T11:50:23.531" v="181" actId="1036"/>
-          <ac:spMkLst>
-            <pc:docMk/>
-            <pc:sldMk cId="0" sldId="256"/>
-            <ac:spMk id="2" creationId="{00000000-0000-0000-0000-000000000000}"/>
-          </ac:spMkLst>
-        </pc:spChg>
-        <pc:spChg chg="mod">
-          <ac:chgData name="karthik pamulapati" userId="9bc0e4d158937d22" providerId="LiveId" clId="{2B5C7D74-72C7-4437-BDA8-626CEA43770A}" dt="2026-07-31T11:50:18.239" v="180" actId="20577"/>
-          <ac:spMkLst>
-            <pc:docMk/>
-            <pc:sldMk cId="0" sldId="256"/>
-            <ac:spMk id="4" creationId="{00000000-0000-0000-0000-000000000000}"/>
-          </ac:spMkLst>
-        </pc:spChg>
-      </pc:sldChg>
-      <pc:sldChg chg="delSp modSp mod">
-        <pc:chgData name="karthik pamulapati" userId="9bc0e4d158937d22" providerId="LiveId" clId="{2B5C7D74-72C7-4437-BDA8-626CEA43770A}" dt="2026-07-31T11:50:58.660" v="187" actId="1076"/>
-        <pc:sldMkLst>
-          <pc:docMk/>
-          <pc:sldMk cId="0" sldId="272"/>
-        </pc:sldMkLst>
-        <pc:spChg chg="mod">
-          <ac:chgData name="karthik pamulapati" userId="9bc0e4d158937d22" providerId="LiveId" clId="{2B5C7D74-72C7-4437-BDA8-626CEA43770A}" dt="2026-07-31T11:50:58.660" v="187" actId="1076"/>
-          <ac:spMkLst>
-            <pc:docMk/>
-            <pc:sldMk cId="0" sldId="272"/>
-            <ac:spMk id="2" creationId="{00000000-0000-0000-0000-000000000000}"/>
-          </ac:spMkLst>
-        </pc:spChg>
-        <pc:spChg chg="del">
-          <ac:chgData name="karthik pamulapati" userId="9bc0e4d158937d22" providerId="LiveId" clId="{2B5C7D74-72C7-4437-BDA8-626CEA43770A}" dt="2026-07-31T11:50:47.738" v="185" actId="478"/>
-          <ac:spMkLst>
-            <pc:docMk/>
-            <pc:sldMk cId="0" sldId="272"/>
-            <ac:spMk id="3" creationId="{00000000-0000-0000-0000-000000000000}"/>
-          </ac:spMkLst>
-        </pc:spChg>
-        <pc:spChg chg="del mod">
-          <ac:chgData name="karthik pamulapati" userId="9bc0e4d158937d22" providerId="LiveId" clId="{2B5C7D74-72C7-4437-BDA8-626CEA43770A}" dt="2026-07-31T11:50:52.873" v="186" actId="478"/>
-          <ac:spMkLst>
-            <pc:docMk/>
-            <pc:sldMk cId="0" sldId="272"/>
-            <ac:spMk id="4" creationId="{00000000-0000-0000-0000-000000000000}"/>
-          </ac:spMkLst>
-        </pc:spChg>
-      </pc:sldChg>
-    </pc:docChg>
-  </pc:docChgLst>
-</pc:chgInfo>
-</file>
-
 <file path=ppt/notesMasters/notesMaster1.xml><?xml version="1.0" encoding="utf-8"?>
-<p:notesMaster xmlns:a="http://schemas.openxmlformats.org/drawingml/2006/main" xmlns:r="http://schemas.openxmlformats.org/officeDocument/2006/relationships" xmlns:p="http://schemas.openxmlformats.org/presentationml/2006/main">
+<p:notesMaster xmlns:a="http://schemas.openxmlformats.org/drawingml/2006/main" xmlns:p="http://schemas.openxmlformats.org/presentationml/2006/main" xmlns:r="http://schemas.openxmlformats.org/officeDocument/2006/relationships">
   <p:cSld>
     <p:bg>
       <p:bgRef idx="1001">
@@ -232,16 +145,241 @@
           <a:chExt cx="0" cy="0"/>
         </a:xfrm>
       </p:grpSpPr>
+      <p:sp>
+        <p:nvSpPr>
+          <p:cNvPr id="2" name="Header Placeholder 1"/>
+          <p:cNvSpPr>
+            <a:spLocks noGrp="1"/>
+          </p:cNvSpPr>
+          <p:nvPr>
+            <p:ph type="hdr" sz="quarter"/>
+          </p:nvPr>
+        </p:nvSpPr>
+        <p:spPr>
+          <a:xfrm>
+            <a:off x="0" y="0"/>
+            <a:ext cx="2971800" cy="457200"/>
+          </a:xfrm>
+          <a:prstGeom prst="rect">
+            <a:avLst/>
+          </a:prstGeom>
+        </p:spPr>
+        <p:txBody>
+          <a:bodyPr vert="horz" lIns="91440" tIns="45720" rIns="91440" bIns="45720" rtlCol="0"/>
+          <a:lstStyle>
+            <a:lvl1pPr algn="l">
+              <a:defRPr sz="1200"/>
+            </a:lvl1pPr>
+          </a:lstStyle>
+          <a:p>
+            <a:endParaRPr lang="en-US"/>
+          </a:p>
+        </p:txBody>
+      </p:sp>
+      <p:sp>
+        <p:nvSpPr>
+          <p:cNvPr id="3" name="Date Placeholder 2"/>
+          <p:cNvSpPr>
+            <a:spLocks noGrp="1"/>
+          </p:cNvSpPr>
+          <p:nvPr>
+            <p:ph type="dt" idx="1"/>
+          </p:nvPr>
+        </p:nvSpPr>
+        <p:spPr>
+          <a:xfrm>
+            <a:off x="3884613" y="0"/>
+            <a:ext cx="2971800" cy="457200"/>
+          </a:xfrm>
+          <a:prstGeom prst="rect">
+            <a:avLst/>
+          </a:prstGeom>
+        </p:spPr>
+        <p:txBody>
+          <a:bodyPr vert="horz" lIns="91440" tIns="45720" rIns="91440" bIns="45720" rtlCol="0"/>
+          <a:lstStyle>
+            <a:lvl1pPr algn="r">
+              <a:defRPr sz="1200"/>
+            </a:lvl1pPr>
+          </a:lstStyle>
+          <a:p>
+            <a:fld id="{0F89C1C7-3DCD-1040-A9CF-14679D8B5DDD}" type="datetimeFigureOut">
+              <a:rPr lang="en-US" smtClean="0"/>
+              <a:t>10/17/16</a:t>
+            </a:fld>
+            <a:endParaRPr lang="en-US"/>
+          </a:p>
+        </p:txBody>
+      </p:sp>
+      <p:sp>
+        <p:nvSpPr>
+          <p:cNvPr id="4" name="Slide Image Placeholder 3"/>
+          <p:cNvSpPr>
+            <a:spLocks noGrp="1" noRot="1" noChangeAspect="1"/>
+          </p:cNvSpPr>
+          <p:nvPr>
+            <p:ph type="sldImg" idx="2"/>
+          </p:nvPr>
+        </p:nvSpPr>
+        <p:spPr>
+          <a:xfrm>
+            <a:off x="1143000" y="685800"/>
+            <a:ext cx="4572000" cy="3429000"/>
+          </a:xfrm>
+          <a:prstGeom prst="rect">
+            <a:avLst/>
+          </a:prstGeom>
+          <a:noFill/>
+          <a:ln w="12700">
+            <a:solidFill>
+              <a:prstClr val="black"/>
+            </a:solidFill>
+          </a:ln>
+        </p:spPr>
+        <p:txBody>
+          <a:bodyPr vert="horz" lIns="91440" tIns="45720" rIns="91440" bIns="45720" rtlCol="0" anchor="ctr"/>
+          <a:lstStyle/>
+          <a:p>
+            <a:endParaRPr lang="en-US"/>
+          </a:p>
+        </p:txBody>
+      </p:sp>
+      <p:sp>
+        <p:nvSpPr>
+          <p:cNvPr id="5" name="Notes Placeholder 4"/>
+          <p:cNvSpPr>
+            <a:spLocks noGrp="1"/>
+          </p:cNvSpPr>
+          <p:nvPr>
+            <p:ph type="body" sz="quarter" idx="3"/>
+          </p:nvPr>
+        </p:nvSpPr>
+        <p:spPr>
+          <a:xfrm>
+            <a:off x="685800" y="4343400"/>
+            <a:ext cx="5486400" cy="4114800"/>
+          </a:xfrm>
+          <a:prstGeom prst="rect">
+            <a:avLst/>
+          </a:prstGeom>
+        </p:spPr>
+        <p:txBody>
+          <a:bodyPr vert="horz" lIns="91440" tIns="45720" rIns="91440" bIns="45720" rtlCol="0"/>
+          <a:lstStyle/>
+          <a:p>
+            <a:pPr lvl="0"/>
+            <a:r>
+              <a:rPr lang="en-US" smtClean="0"/>
+              <a:t>Click to edit Master text styles</a:t>
+            </a:r>
+          </a:p>
+          <a:p>
+            <a:pPr lvl="1"/>
+            <a:r>
+              <a:rPr lang="en-US" smtClean="0"/>
+              <a:t>Second level</a:t>
+            </a:r>
+          </a:p>
+          <a:p>
+            <a:pPr lvl="2"/>
+            <a:r>
+              <a:rPr lang="en-US" smtClean="0"/>
+              <a:t>Third level</a:t>
+            </a:r>
+          </a:p>
+          <a:p>
+            <a:pPr lvl="3"/>
+            <a:r>
+              <a:rPr lang="en-US" smtClean="0"/>
+              <a:t>Fourth level</a:t>
+            </a:r>
+          </a:p>
+          <a:p>
+            <a:pPr lvl="4"/>
+            <a:r>
+              <a:rPr lang="en-US" smtClean="0"/>
+              <a:t>Fifth level</a:t>
+            </a:r>
+            <a:endParaRPr lang="en-US"/>
+          </a:p>
+        </p:txBody>
+      </p:sp>
+      <p:sp>
+        <p:nvSpPr>
+          <p:cNvPr id="6" name="Footer Placeholder 5"/>
+          <p:cNvSpPr>
+            <a:spLocks noGrp="1"/>
+          </p:cNvSpPr>
+          <p:nvPr>
+            <p:ph type="ftr" sz="quarter" idx="4"/>
+          </p:nvPr>
+        </p:nvSpPr>
+        <p:spPr>
+          <a:xfrm>
+            <a:off x="0" y="8685213"/>
+            <a:ext cx="2971800" cy="457200"/>
+          </a:xfrm>
+          <a:prstGeom prst="rect">
+            <a:avLst/>
+          </a:prstGeom>
+        </p:spPr>
+        <p:txBody>
+          <a:bodyPr vert="horz" lIns="91440" tIns="45720" rIns="91440" bIns="45720" rtlCol="0" anchor="b"/>
+          <a:lstStyle>
+            <a:lvl1pPr algn="l">
+              <a:defRPr sz="1200"/>
+            </a:lvl1pPr>
+          </a:lstStyle>
+          <a:p>
+            <a:endParaRPr lang="en-US"/>
+          </a:p>
+        </p:txBody>
+      </p:sp>
+      <p:sp>
+        <p:nvSpPr>
+          <p:cNvPr id="7" name="Slide Number Placeholder 6"/>
+          <p:cNvSpPr>
+            <a:spLocks noGrp="1"/>
+          </p:cNvSpPr>
+          <p:nvPr>
+            <p:ph type="sldNum" sz="quarter" idx="5"/>
+          </p:nvPr>
+        </p:nvSpPr>
+        <p:spPr>
+          <a:xfrm>
+            <a:off x="3884613" y="8685213"/>
+            <a:ext cx="2971800" cy="457200"/>
+          </a:xfrm>
+          <a:prstGeom prst="rect">
+            <a:avLst/>
+          </a:prstGeom>
+        </p:spPr>
+        <p:txBody>
+          <a:bodyPr vert="horz" lIns="91440" tIns="45720" rIns="91440" bIns="45720" rtlCol="0" anchor="b"/>
+          <a:lstStyle>
+            <a:lvl1pPr algn="r">
+              <a:defRPr sz="1200"/>
+            </a:lvl1pPr>
+          </a:lstStyle>
+          <a:p>
+            <a:fld id="{BB5E49A5-4136-284D-997B-48E1D791AD67}" type="slidenum">
+              <a:rPr lang="en-US" smtClean="0"/>
+              <a:t>‹#›</a:t>
+            </a:fld>
+            <a:endParaRPr lang="en-US"/>
+          </a:p>
+        </p:txBody>
+      </p:sp>
     </p:spTree>
     <p:extLst>
       <p:ext uri="{BB962C8B-B14F-4D97-AF65-F5344CB8AC3E}">
-        <p14:creationId xmlns:p14="http://schemas.microsoft.com/office/powerpoint/2010/main" val="1170837071"/>
+        <p14:creationId xmlns:p14="http://schemas.microsoft.com/office/powerpoint/2010/main" val="2623252185"/>
       </p:ext>
     </p:extLst>
   </p:cSld>
   <p:clrMap bg1="lt1" tx1="dk1" bg2="lt2" tx2="dk2" accent1="accent1" accent2="accent2" accent3="accent3" accent4="accent4" accent5="accent5" accent6="accent6" hlink="hlink" folHlink="folHlink"/>
   <p:notesStyle>
-    <a:lvl1pPr marL="0" algn="l" defTabSz="914400" rtl="0" eaLnBrk="1" latinLnBrk="0" hangingPunct="1">
+    <a:lvl1pPr marL="0" algn="l" defTabSz="457200" rtl="0" eaLnBrk="1" latinLnBrk="0" hangingPunct="1">
       <a:defRPr sz="1200" kern="1200">
         <a:solidFill>
           <a:schemeClr val="tx1"/>
@@ -251,7 +389,7 @@
         <a:cs typeface="+mn-cs"/>
       </a:defRPr>
     </a:lvl1pPr>
-    <a:lvl2pPr marL="457200" algn="l" defTabSz="914400" rtl="0" eaLnBrk="1" latinLnBrk="0" hangingPunct="1">
+    <a:lvl2pPr marL="457200" algn="l" defTabSz="457200" rtl="0" eaLnBrk="1" latinLnBrk="0" hangingPunct="1">
       <a:defRPr sz="1200" kern="1200">
         <a:solidFill>
           <a:schemeClr val="tx1"/>
@@ -261,7 +399,7 @@
         <a:cs typeface="+mn-cs"/>
       </a:defRPr>
     </a:lvl2pPr>
-    <a:lvl3pPr marL="914400" algn="l" defTabSz="914400" rtl="0" eaLnBrk="1" latinLnBrk="0" hangingPunct="1">
+    <a:lvl3pPr marL="914400" algn="l" defTabSz="457200" rtl="0" eaLnBrk="1" latinLnBrk="0" hangingPunct="1">
       <a:defRPr sz="1200" kern="1200">
         <a:solidFill>
           <a:schemeClr val="tx1"/>
@@ -271,7 +409,7 @@
         <a:cs typeface="+mn-cs"/>
       </a:defRPr>
     </a:lvl3pPr>
-    <a:lvl4pPr marL="1371600" algn="l" defTabSz="914400" rtl="0" eaLnBrk="1" latinLnBrk="0" hangingPunct="1">
+    <a:lvl4pPr marL="1371600" algn="l" defTabSz="457200" rtl="0" eaLnBrk="1" latinLnBrk="0" hangingPunct="1">
       <a:defRPr sz="1200" kern="1200">
         <a:solidFill>
           <a:schemeClr val="tx1"/>
@@ -281,7 +419,7 @@
         <a:cs typeface="+mn-cs"/>
       </a:defRPr>
     </a:lvl4pPr>
-    <a:lvl5pPr marL="1828800" algn="l" defTabSz="914400" rtl="0" eaLnBrk="1" latinLnBrk="0" hangingPunct="1">
+    <a:lvl5pPr marL="1828800" algn="l" defTabSz="457200" rtl="0" eaLnBrk="1" latinLnBrk="0" hangingPunct="1">
       <a:defRPr sz="1200" kern="1200">
         <a:solidFill>
           <a:schemeClr val="tx1"/>
@@ -291,7 +429,7 @@
         <a:cs typeface="+mn-cs"/>
       </a:defRPr>
     </a:lvl5pPr>
-    <a:lvl6pPr marL="2286000" algn="l" defTabSz="914400" rtl="0" eaLnBrk="1" latinLnBrk="0" hangingPunct="1">
+    <a:lvl6pPr marL="2286000" algn="l" defTabSz="457200" rtl="0" eaLnBrk="1" latinLnBrk="0" hangingPunct="1">
       <a:defRPr sz="1200" kern="1200">
         <a:solidFill>
           <a:schemeClr val="tx1"/>
@@ -301,7 +439,7 @@
         <a:cs typeface="+mn-cs"/>
       </a:defRPr>
     </a:lvl6pPr>
-    <a:lvl7pPr marL="2743200" algn="l" defTabSz="914400" rtl="0" eaLnBrk="1" latinLnBrk="0" hangingPunct="1">
+    <a:lvl7pPr marL="2743200" algn="l" defTabSz="457200" rtl="0" eaLnBrk="1" latinLnBrk="0" hangingPunct="1">
       <a:defRPr sz="1200" kern="1200">
         <a:solidFill>
           <a:schemeClr val="tx1"/>
@@ -311,7 +449,7 @@
         <a:cs typeface="+mn-cs"/>
       </a:defRPr>
     </a:lvl7pPr>
-    <a:lvl8pPr marL="3200400" algn="l" defTabSz="914400" rtl="0" eaLnBrk="1" latinLnBrk="0" hangingPunct="1">
+    <a:lvl8pPr marL="3200400" algn="l" defTabSz="457200" rtl="0" eaLnBrk="1" latinLnBrk="0" hangingPunct="1">
       <a:defRPr sz="1200" kern="1200">
         <a:solidFill>
           <a:schemeClr val="tx1"/>
@@ -321,7 +459,7 @@
         <a:cs typeface="+mn-cs"/>
       </a:defRPr>
     </a:lvl8pPr>
-    <a:lvl9pPr marL="3657600" algn="l" defTabSz="914400" rtl="0" eaLnBrk="1" latinLnBrk="0" hangingPunct="1">
+    <a:lvl9pPr marL="3657600" algn="l" defTabSz="457200" rtl="0" eaLnBrk="1" latinLnBrk="0" hangingPunct="1">
       <a:defRPr sz="1200" kern="1200">
         <a:solidFill>
           <a:schemeClr val="tx1"/>
@@ -336,7 +474,7 @@
 </file>
 
 <file path=ppt/notesSlides/notesSlide1.xml><?xml version="1.0" encoding="utf-8"?>
-<p:notes xmlns:a="http://schemas.openxmlformats.org/drawingml/2006/main" xmlns:r="http://schemas.openxmlformats.org/officeDocument/2006/relationships" xmlns:p="http://schemas.openxmlformats.org/presentationml/2006/main">
+<p:notes xmlns:a="http://schemas.openxmlformats.org/drawingml/2006/main" xmlns:p="http://schemas.openxmlformats.org/presentationml/2006/main" xmlns:r="http://schemas.openxmlformats.org/officeDocument/2006/relationships">
   <p:cSld>
     <p:spTree>
       <p:nvGrpSpPr>
@@ -356,7 +494,7 @@
         <p:nvSpPr>
           <p:cNvPr id="2" name="Slide Image Placeholder 1"/>
           <p:cNvSpPr>
-            <a:spLocks noGrp="1" noRot="1" noChangeAspect="1"/>
+            <a:spLocks noGrp="1"/>
           </p:cNvSpPr>
           <p:nvPr>
             <p:ph type="sldImg" idx="2"/>
@@ -371,7 +509,7 @@
             <a:spLocks noGrp="1"/>
           </p:cNvSpPr>
           <p:nvPr>
-            <p:ph type="body" sz="quarter" idx="3"/>
+            <p:ph type="body" idx="3" sz="quarter"/>
           </p:nvPr>
         </p:nvSpPr>
         <p:spPr/>
@@ -380,7 +518,7 @@
           <a:lstStyle/>
           <a:p>
             <a:r>
-              <a:t>Good morning/afternoon respected guide, panel members, and peers. I am Pamulapati Karthik from the Department of Computer Science &amp; Engineering. Today, I am excited to present my project titled 'AI-Powered Customer Support and Ticket Management System'. This project addresses the key challenges in modern customer service by combining instant AI chatbot assistance with automated ticket management.</a:t>
+              <a:t>Good morning respected guide, panel members, and peers. I am Pamulapati Karthik from the CSE Department. Today, I am presenting my project titled 'AI-Powered Customer Support and Ticket Management System'.</a:t>
             </a:r>
           </a:p>
         </p:txBody>
@@ -392,7 +530,7 @@
             <a:spLocks noGrp="1"/>
           </p:cNvSpPr>
           <p:nvPr>
-            <p:ph type="sldNum" sz="quarter" idx="5"/>
+            <p:ph type="sldNum" idx="5" sz="quarter"/>
           </p:nvPr>
         </p:nvSpPr>
         <p:spPr/>
@@ -406,7 +544,7 @@
 </file>
 
 <file path=ppt/notesSlides/notesSlide10.xml><?xml version="1.0" encoding="utf-8"?>
-<p:notes xmlns:a="http://schemas.openxmlformats.org/drawingml/2006/main" xmlns:r="http://schemas.openxmlformats.org/officeDocument/2006/relationships" xmlns:p="http://schemas.openxmlformats.org/presentationml/2006/main">
+<p:notes xmlns:a="http://schemas.openxmlformats.org/drawingml/2006/main" xmlns:p="http://schemas.openxmlformats.org/presentationml/2006/main" xmlns:r="http://schemas.openxmlformats.org/officeDocument/2006/relationships">
   <p:cSld>
     <p:spTree>
       <p:nvGrpSpPr>
@@ -426,7 +564,7 @@
         <p:nvSpPr>
           <p:cNvPr id="2" name="Slide Image Placeholder 1"/>
           <p:cNvSpPr>
-            <a:spLocks noGrp="1" noRot="1" noChangeAspect="1"/>
+            <a:spLocks noGrp="1"/>
           </p:cNvSpPr>
           <p:nvPr>
             <p:ph type="sldImg" idx="2"/>
@@ -441,7 +579,7 @@
             <a:spLocks noGrp="1"/>
           </p:cNvSpPr>
           <p:nvPr>
-            <p:ph type="body" sz="quarter" idx="3"/>
+            <p:ph type="body" idx="3" sz="quarter"/>
           </p:nvPr>
         </p:nvSpPr>
         <p:spPr/>
@@ -450,7 +588,7 @@
           <a:lstStyle/>
           <a:p>
             <a:r>
-              <a:t>This slide outlines the 5-step operational workflow. 1) The visitor asks a question; 2) The RAG module checks Knowledge Base FAQs; 3) If unmatched, the LLM processes the query with session context; 4) If AI confidence is low, a ticket modal opens automatically; 5) The administrator manages and resolves the ticket in the admin console.</a:t>
+              <a:t>The 5-step workflow connects customer submission, AI processing, AI response, automated ticket generation when necessary, and administrator resolution.</a:t>
             </a:r>
           </a:p>
         </p:txBody>
@@ -462,7 +600,7 @@
             <a:spLocks noGrp="1"/>
           </p:cNvSpPr>
           <p:nvPr>
-            <p:ph type="sldNum" sz="quarter" idx="5"/>
+            <p:ph type="sldNum" idx="5" sz="quarter"/>
           </p:nvPr>
         </p:nvSpPr>
         <p:spPr/>
@@ -476,7 +614,7 @@
 </file>
 
 <file path=ppt/notesSlides/notesSlide11.xml><?xml version="1.0" encoding="utf-8"?>
-<p:notes xmlns:a="http://schemas.openxmlformats.org/drawingml/2006/main" xmlns:r="http://schemas.openxmlformats.org/officeDocument/2006/relationships" xmlns:p="http://schemas.openxmlformats.org/presentationml/2006/main">
+<p:notes xmlns:a="http://schemas.openxmlformats.org/drawingml/2006/main" xmlns:p="http://schemas.openxmlformats.org/presentationml/2006/main" xmlns:r="http://schemas.openxmlformats.org/officeDocument/2006/relationships">
   <p:cSld>
     <p:spTree>
       <p:nvGrpSpPr>
@@ -496,7 +634,7 @@
         <p:nvSpPr>
           <p:cNvPr id="2" name="Slide Image Placeholder 1"/>
           <p:cNvSpPr>
-            <a:spLocks noGrp="1" noRot="1" noChangeAspect="1"/>
+            <a:spLocks noGrp="1"/>
           </p:cNvSpPr>
           <p:nvPr>
             <p:ph type="sldImg" idx="2"/>
@@ -511,7 +649,7 @@
             <a:spLocks noGrp="1"/>
           </p:cNvSpPr>
           <p:nvPr>
-            <p:ph type="body" sz="quarter" idx="3"/>
+            <p:ph type="body" idx="3" sz="quarter"/>
           </p:nvPr>
         </p:nvSpPr>
         <p:spPr/>
@@ -520,7 +658,7 @@
           <a:lstStyle/>
           <a:p>
             <a:r>
-              <a:t>The Customer Module is designed for zero friction: public visitors immediately interact with an intuitive ChatGPT-style chatbot on page load. When an issue requires human attention, a simple ticket form modal captures contact details and issues a unique Ticket ID without asking the user to create an account.</a:t>
+              <a:t>Core features include real-time chat interface, automated ticket creation, administrative search and dashboard, Chart.js analytics, and CSV report export.</a:t>
             </a:r>
           </a:p>
         </p:txBody>
@@ -532,7 +670,7 @@
             <a:spLocks noGrp="1"/>
           </p:cNvSpPr>
           <p:nvPr>
-            <p:ph type="sldNum" sz="quarter" idx="5"/>
+            <p:ph type="sldNum" idx="5" sz="quarter"/>
           </p:nvPr>
         </p:nvSpPr>
         <p:spPr/>
@@ -546,7 +684,7 @@
 </file>
 
 <file path=ppt/notesSlides/notesSlide12.xml><?xml version="1.0" encoding="utf-8"?>
-<p:notes xmlns:a="http://schemas.openxmlformats.org/drawingml/2006/main" xmlns:r="http://schemas.openxmlformats.org/officeDocument/2006/relationships" xmlns:p="http://schemas.openxmlformats.org/presentationml/2006/main">
+<p:notes xmlns:a="http://schemas.openxmlformats.org/drawingml/2006/main" xmlns:p="http://schemas.openxmlformats.org/presentationml/2006/main" xmlns:r="http://schemas.openxmlformats.org/officeDocument/2006/relationships">
   <p:cSld>
     <p:spTree>
       <p:nvGrpSpPr>
@@ -566,7 +704,7 @@
         <p:nvSpPr>
           <p:cNvPr id="2" name="Slide Image Placeholder 1"/>
           <p:cNvSpPr>
-            <a:spLocks noGrp="1" noRot="1" noChangeAspect="1"/>
+            <a:spLocks noGrp="1"/>
           </p:cNvSpPr>
           <p:nvPr>
             <p:ph type="sldImg" idx="2"/>
@@ -581,7 +719,7 @@
             <a:spLocks noGrp="1"/>
           </p:cNvSpPr>
           <p:nvPr>
-            <p:ph type="body" sz="quarter" idx="3"/>
+            <p:ph type="body" idx="3" sz="quarter"/>
           </p:nvPr>
         </p:nvSpPr>
         <p:spPr/>
@@ -590,7 +728,7 @@
           <a:lstStyle/>
           <a:p>
             <a:r>
-              <a:t>The Admin Module provides complete operational control: secure Flask-Login authentication, a comprehensive dashboard displaying real-time metrics, ticket threading and status updates, Knowledge Base FAQ publishing, Chart.js analytics graphs, and one-click CSV report exports.</a:t>
+              <a:t>The tech stack relies on Python 3.12, Flask, SQLAlchemy, SQLite/PostgreSQL, Bootstrap 5, Jinja2, GitHub, Render, and OpenAI-compatible APIs.</a:t>
             </a:r>
           </a:p>
         </p:txBody>
@@ -602,7 +740,7 @@
             <a:spLocks noGrp="1"/>
           </p:cNvSpPr>
           <p:nvPr>
-            <p:ph type="sldNum" sz="quarter" idx="5"/>
+            <p:ph type="sldNum" idx="5" sz="quarter"/>
           </p:nvPr>
         </p:nvSpPr>
         <p:spPr/>
@@ -616,7 +754,7 @@
 </file>
 
 <file path=ppt/notesSlides/notesSlide13.xml><?xml version="1.0" encoding="utf-8"?>
-<p:notes xmlns:a="http://schemas.openxmlformats.org/drawingml/2006/main" xmlns:r="http://schemas.openxmlformats.org/officeDocument/2006/relationships" xmlns:p="http://schemas.openxmlformats.org/presentationml/2006/main">
+<p:notes xmlns:a="http://schemas.openxmlformats.org/drawingml/2006/main" xmlns:p="http://schemas.openxmlformats.org/presentationml/2006/main" xmlns:r="http://schemas.openxmlformats.org/officeDocument/2006/relationships">
   <p:cSld>
     <p:spTree>
       <p:nvGrpSpPr>
@@ -636,7 +774,7 @@
         <p:nvSpPr>
           <p:cNvPr id="2" name="Slide Image Placeholder 1"/>
           <p:cNvSpPr>
-            <a:spLocks noGrp="1" noRot="1" noChangeAspect="1"/>
+            <a:spLocks noGrp="1"/>
           </p:cNvSpPr>
           <p:nvPr>
             <p:ph type="sldImg" idx="2"/>
@@ -651,7 +789,7 @@
             <a:spLocks noGrp="1"/>
           </p:cNvSpPr>
           <p:nvPr>
-            <p:ph type="body" sz="quarter" idx="3"/>
+            <p:ph type="body" idx="3" sz="quarter"/>
           </p:nvPr>
         </p:nvSpPr>
         <p:spPr/>
@@ -660,7 +798,7 @@
           <a:lstStyle/>
           <a:p>
             <a:r>
-              <a:t>Key features include real-time AI responses with markdown formatting and conversation memory, automated ticket creation with unique tracking IDs, modern glassmorphic dark mode styling, and built-in CSV report exporting alongside Chart.js analytics.</a:t>
+              <a:t>Challenges included resolving Gunicorn AppImportErrors on Render, removing database migration conflicts, building local LLM fallback clients, and optimizing UI performance.</a:t>
             </a:r>
           </a:p>
         </p:txBody>
@@ -672,7 +810,7 @@
             <a:spLocks noGrp="1"/>
           </p:cNvSpPr>
           <p:nvPr>
-            <p:ph type="sldNum" sz="quarter" idx="5"/>
+            <p:ph type="sldNum" idx="5" sz="quarter"/>
           </p:nvPr>
         </p:nvSpPr>
         <p:spPr/>
@@ -686,7 +824,7 @@
 </file>
 
 <file path=ppt/notesSlides/notesSlide14.xml><?xml version="1.0" encoding="utf-8"?>
-<p:notes xmlns:a="http://schemas.openxmlformats.org/drawingml/2006/main" xmlns:r="http://schemas.openxmlformats.org/officeDocument/2006/relationships" xmlns:p="http://schemas.openxmlformats.org/presentationml/2006/main">
+<p:notes xmlns:a="http://schemas.openxmlformats.org/drawingml/2006/main" xmlns:p="http://schemas.openxmlformats.org/presentationml/2006/main" xmlns:r="http://schemas.openxmlformats.org/officeDocument/2006/relationships">
   <p:cSld>
     <p:spTree>
       <p:nvGrpSpPr>
@@ -706,7 +844,7 @@
         <p:nvSpPr>
           <p:cNvPr id="2" name="Slide Image Placeholder 1"/>
           <p:cNvSpPr>
-            <a:spLocks noGrp="1" noRot="1" noChangeAspect="1"/>
+            <a:spLocks noGrp="1"/>
           </p:cNvSpPr>
           <p:nvPr>
             <p:ph type="sldImg" idx="2"/>
@@ -721,7 +859,7 @@
             <a:spLocks noGrp="1"/>
           </p:cNvSpPr>
           <p:nvPr>
-            <p:ph type="body" sz="quarter" idx="3"/>
+            <p:ph type="body" idx="3" sz="quarter"/>
           </p:nvPr>
         </p:nvSpPr>
         <p:spPr/>
@@ -730,7 +868,7 @@
           <a:lstStyle/>
           <a:p>
             <a:r>
-              <a:t>The advantages of this architecture are clear: zero login friction keeps visitors engaged; automated AI and RAG FAQ search cut support costs by resolving up to 80% of repetitive tickets; and zero-migration schema auto-creation eliminates database deployment headaches.</a:t>
+              <a:t>Key outcomes include reducing response time to under 2 seconds, automating routine queries, improving customer experience, and simplifying helpdesk management.</a:t>
             </a:r>
           </a:p>
         </p:txBody>
@@ -742,7 +880,7 @@
             <a:spLocks noGrp="1"/>
           </p:cNvSpPr>
           <p:nvPr>
-            <p:ph type="sldNum" sz="quarter" idx="5"/>
+            <p:ph type="sldNum" idx="5" sz="quarter"/>
           </p:nvPr>
         </p:nvSpPr>
         <p:spPr/>
@@ -756,7 +894,7 @@
 </file>
 
 <file path=ppt/notesSlides/notesSlide15.xml><?xml version="1.0" encoding="utf-8"?>
-<p:notes xmlns:a="http://schemas.openxmlformats.org/drawingml/2006/main" xmlns:r="http://schemas.openxmlformats.org/officeDocument/2006/relationships" xmlns:p="http://schemas.openxmlformats.org/presentationml/2006/main">
+<p:notes xmlns:a="http://schemas.openxmlformats.org/drawingml/2006/main" xmlns:p="http://schemas.openxmlformats.org/presentationml/2006/main" xmlns:r="http://schemas.openxmlformats.org/officeDocument/2006/relationships">
   <p:cSld>
     <p:spTree>
       <p:nvGrpSpPr>
@@ -776,7 +914,7 @@
         <p:nvSpPr>
           <p:cNvPr id="2" name="Slide Image Placeholder 1"/>
           <p:cNvSpPr>
-            <a:spLocks noGrp="1" noRot="1" noChangeAspect="1"/>
+            <a:spLocks noGrp="1"/>
           </p:cNvSpPr>
           <p:nvPr>
             <p:ph type="sldImg" idx="2"/>
@@ -791,7 +929,7 @@
             <a:spLocks noGrp="1"/>
           </p:cNvSpPr>
           <p:nvPr>
-            <p:ph type="body" sz="quarter" idx="3"/>
+            <p:ph type="body" idx="3" sz="quarter"/>
           </p:nvPr>
         </p:nvSpPr>
         <p:spPr/>
@@ -800,7 +938,7 @@
           <a:lstStyle/>
           <a:p>
             <a:r>
-              <a:t>Future enhancements include integrating voice-based interaction, multi-language localization, dedicated native mobile applications, and predictive machine learning models to forecast ticket volume and prevent SLA breaches.</a:t>
+              <a:t>Future enhancements include adding voice interaction, multi-language support, native mobile apps, and advanced predictive analytics.</a:t>
             </a:r>
           </a:p>
         </p:txBody>
@@ -812,7 +950,7 @@
             <a:spLocks noGrp="1"/>
           </p:cNvSpPr>
           <p:nvPr>
-            <p:ph type="sldNum" sz="quarter" idx="5"/>
+            <p:ph type="sldNum" idx="5" sz="quarter"/>
           </p:nvPr>
         </p:nvSpPr>
         <p:spPr/>
@@ -826,7 +964,7 @@
 </file>
 
 <file path=ppt/notesSlides/notesSlide16.xml><?xml version="1.0" encoding="utf-8"?>
-<p:notes xmlns:a="http://schemas.openxmlformats.org/drawingml/2006/main" xmlns:r="http://schemas.openxmlformats.org/officeDocument/2006/relationships" xmlns:p="http://schemas.openxmlformats.org/presentationml/2006/main">
+<p:notes xmlns:a="http://schemas.openxmlformats.org/drawingml/2006/main" xmlns:p="http://schemas.openxmlformats.org/presentationml/2006/main" xmlns:r="http://schemas.openxmlformats.org/officeDocument/2006/relationships">
   <p:cSld>
     <p:spTree>
       <p:nvGrpSpPr>
@@ -846,7 +984,7 @@
         <p:nvSpPr>
           <p:cNvPr id="2" name="Slide Image Placeholder 1"/>
           <p:cNvSpPr>
-            <a:spLocks noGrp="1" noRot="1" noChangeAspect="1"/>
+            <a:spLocks noGrp="1"/>
           </p:cNvSpPr>
           <p:nvPr>
             <p:ph type="sldImg" idx="2"/>
@@ -861,7 +999,7 @@
             <a:spLocks noGrp="1"/>
           </p:cNvSpPr>
           <p:nvPr>
-            <p:ph type="body" sz="quarter" idx="3"/>
+            <p:ph type="body" idx="3" sz="quarter"/>
           </p:nvPr>
         </p:nvSpPr>
         <p:spPr/>
@@ -870,7 +1008,7 @@
           <a:lstStyle/>
           <a:p>
             <a:r>
-              <a:t>In conclusion, this project demonstrates how combining Large Language Models, Knowledge Base RAG retrieval, and clean web engineering can transform customer support operations. We achieved an intuitive, zero-friction customer experience, automated escalation, and robust admin management, all built on a zero-migration, production-ready architecture.</a:t>
+              <a:t>In conclusion, this project demonstrates how combining Large Language Models, Knowledge Base RAG retrieval, and clean web engineering can transform customer support operations.</a:t>
             </a:r>
           </a:p>
         </p:txBody>
@@ -882,7 +1020,7 @@
             <a:spLocks noGrp="1"/>
           </p:cNvSpPr>
           <p:nvPr>
-            <p:ph type="sldNum" sz="quarter" idx="5"/>
+            <p:ph type="sldNum" idx="5" sz="quarter"/>
           </p:nvPr>
         </p:nvSpPr>
         <p:spPr/>
@@ -896,7 +1034,7 @@
 </file>
 
 <file path=ppt/notesSlides/notesSlide17.xml><?xml version="1.0" encoding="utf-8"?>
-<p:notes xmlns:a="http://schemas.openxmlformats.org/drawingml/2006/main" xmlns:r="http://schemas.openxmlformats.org/officeDocument/2006/relationships" xmlns:p="http://schemas.openxmlformats.org/presentationml/2006/main">
+<p:notes xmlns:a="http://schemas.openxmlformats.org/drawingml/2006/main" xmlns:p="http://schemas.openxmlformats.org/presentationml/2006/main" xmlns:r="http://schemas.openxmlformats.org/officeDocument/2006/relationships">
   <p:cSld>
     <p:spTree>
       <p:nvGrpSpPr>
@@ -916,7 +1054,7 @@
         <p:nvSpPr>
           <p:cNvPr id="2" name="Slide Image Placeholder 1"/>
           <p:cNvSpPr>
-            <a:spLocks noGrp="1" noRot="1" noChangeAspect="1"/>
+            <a:spLocks noGrp="1"/>
           </p:cNvSpPr>
           <p:nvPr>
             <p:ph type="sldImg" idx="2"/>
@@ -931,7 +1069,7 @@
             <a:spLocks noGrp="1"/>
           </p:cNvSpPr>
           <p:nvPr>
-            <p:ph type="body" sz="quarter" idx="3"/>
+            <p:ph type="body" idx="3" sz="quarter"/>
           </p:nvPr>
         </p:nvSpPr>
         <p:spPr/>
@@ -940,7 +1078,7 @@
           <a:lstStyle/>
           <a:p>
             <a:r>
-              <a:t>Thank you very much for your time, guidance, and attention throughout this presentation. I am now open to your questions, feedback, and project review.</a:t>
+              <a:t>Thank you very much for your time, guidance, and attention throughout this presentation. I am now open to your questions and project review.</a:t>
             </a:r>
           </a:p>
         </p:txBody>
@@ -952,7 +1090,7 @@
             <a:spLocks noGrp="1"/>
           </p:cNvSpPr>
           <p:nvPr>
-            <p:ph type="sldNum" sz="quarter" idx="5"/>
+            <p:ph type="sldNum" idx="5" sz="quarter"/>
           </p:nvPr>
         </p:nvSpPr>
         <p:spPr/>
@@ -966,7 +1104,7 @@
 </file>
 
 <file path=ppt/notesSlides/notesSlide2.xml><?xml version="1.0" encoding="utf-8"?>
-<p:notes xmlns:a="http://schemas.openxmlformats.org/drawingml/2006/main" xmlns:r="http://schemas.openxmlformats.org/officeDocument/2006/relationships" xmlns:p="http://schemas.openxmlformats.org/presentationml/2006/main">
+<p:notes xmlns:a="http://schemas.openxmlformats.org/drawingml/2006/main" xmlns:p="http://schemas.openxmlformats.org/presentationml/2006/main" xmlns:r="http://schemas.openxmlformats.org/officeDocument/2006/relationships">
   <p:cSld>
     <p:spTree>
       <p:nvGrpSpPr>
@@ -986,7 +1124,7 @@
         <p:nvSpPr>
           <p:cNvPr id="2" name="Slide Image Placeholder 1"/>
           <p:cNvSpPr>
-            <a:spLocks noGrp="1" noRot="1" noChangeAspect="1"/>
+            <a:spLocks noGrp="1"/>
           </p:cNvSpPr>
           <p:nvPr>
             <p:ph type="sldImg" idx="2"/>
@@ -1001,7 +1139,7 @@
             <a:spLocks noGrp="1"/>
           </p:cNvSpPr>
           <p:nvPr>
-            <p:ph type="body" sz="quarter" idx="3"/>
+            <p:ph type="body" idx="3" sz="quarter"/>
           </p:nvPr>
         </p:nvSpPr>
         <p:spPr/>
@@ -1010,7 +1148,7 @@
           <a:lstStyle/>
           <a:p>
             <a:r>
-              <a:t>Customer support is the frontline of customer retention. However, traditional manual support models struggle with volume spikes, high cost, and slow turnaround times. AI technology changes this dynamic by offering instant, 24/7 contextual answers. By integrating Large Language Models and Retrieval-Augmented Generation, businesses can resolve up to 80% of repetitive inquiries automatically while escalating complex cases seamlessly.</a:t>
+              <a:t>Customer service is moving towards instant automation. AI chatbots allow businesses to handle routine customer questions 24/7 without delays or human agent fatigue.</a:t>
             </a:r>
           </a:p>
         </p:txBody>
@@ -1022,7 +1160,7 @@
             <a:spLocks noGrp="1"/>
           </p:cNvSpPr>
           <p:nvPr>
-            <p:ph type="sldNum" sz="quarter" idx="5"/>
+            <p:ph type="sldNum" idx="5" sz="quarter"/>
           </p:nvPr>
         </p:nvSpPr>
         <p:spPr/>
@@ -1036,7 +1174,7 @@
 </file>
 
 <file path=ppt/notesSlides/notesSlide3.xml><?xml version="1.0" encoding="utf-8"?>
-<p:notes xmlns:a="http://schemas.openxmlformats.org/drawingml/2006/main" xmlns:r="http://schemas.openxmlformats.org/officeDocument/2006/relationships" xmlns:p="http://schemas.openxmlformats.org/presentationml/2006/main">
+<p:notes xmlns:a="http://schemas.openxmlformats.org/drawingml/2006/main" xmlns:p="http://schemas.openxmlformats.org/presentationml/2006/main" xmlns:r="http://schemas.openxmlformats.org/officeDocument/2006/relationships">
   <p:cSld>
     <p:spTree>
       <p:nvGrpSpPr>
@@ -1056,7 +1194,7 @@
         <p:nvSpPr>
           <p:cNvPr id="2" name="Slide Image Placeholder 1"/>
           <p:cNvSpPr>
-            <a:spLocks noGrp="1" noRot="1" noChangeAspect="1"/>
+            <a:spLocks noGrp="1"/>
           </p:cNvSpPr>
           <p:nvPr>
             <p:ph type="sldImg" idx="2"/>
@@ -1071,7 +1209,7 @@
             <a:spLocks noGrp="1"/>
           </p:cNvSpPr>
           <p:nvPr>
-            <p:ph type="body" sz="quarter" idx="3"/>
+            <p:ph type="body" idx="3" sz="quarter"/>
           </p:nvPr>
         </p:nvSpPr>
         <p:spPr/>
@@ -1080,7 +1218,7 @@
           <a:lstStyle/>
           <a:p>
             <a:r>
-              <a:t>Businesses face a dilemma: customers expect instant 24/7 assistance, but scaling human support teams is prohibitively expensive. Furthermore, forcing customers to create an account just to ask a basic pre-sales question leads to high drop-off. When basic chatbots fail, they leave users stranded without auto-generating structured support tickets. Our project directly solves this problem.</a:t>
+              <a:t>Traditional helpdesks suffer from long wait times, high costs, and customer frustration. Legacy rule bots fail easily, and forcing user registration causes high drop-off.</a:t>
             </a:r>
           </a:p>
         </p:txBody>
@@ -1092,7 +1230,7 @@
             <a:spLocks noGrp="1"/>
           </p:cNvSpPr>
           <p:nvPr>
-            <p:ph type="sldNum" sz="quarter" idx="5"/>
+            <p:ph type="sldNum" idx="5" sz="quarter"/>
           </p:nvPr>
         </p:nvSpPr>
         <p:spPr/>
@@ -1106,7 +1244,7 @@
 </file>
 
 <file path=ppt/notesSlides/notesSlide4.xml><?xml version="1.0" encoding="utf-8"?>
-<p:notes xmlns:a="http://schemas.openxmlformats.org/drawingml/2006/main" xmlns:r="http://schemas.openxmlformats.org/officeDocument/2006/relationships" xmlns:p="http://schemas.openxmlformats.org/presentationml/2006/main">
+<p:notes xmlns:a="http://schemas.openxmlformats.org/drawingml/2006/main" xmlns:p="http://schemas.openxmlformats.org/presentationml/2006/main" xmlns:r="http://schemas.openxmlformats.org/officeDocument/2006/relationships">
   <p:cSld>
     <p:spTree>
       <p:nvGrpSpPr>
@@ -1126,7 +1264,7 @@
         <p:nvSpPr>
           <p:cNvPr id="2" name="Slide Image Placeholder 1"/>
           <p:cNvSpPr>
-            <a:spLocks noGrp="1" noRot="1" noChangeAspect="1"/>
+            <a:spLocks noGrp="1"/>
           </p:cNvSpPr>
           <p:nvPr>
             <p:ph type="sldImg" idx="2"/>
@@ -1141,7 +1279,7 @@
             <a:spLocks noGrp="1"/>
           </p:cNvSpPr>
           <p:nvPr>
-            <p:ph type="body" sz="quarter" idx="3"/>
+            <p:ph type="body" idx="3" sz="quarter"/>
           </p:nvPr>
         </p:nvSpPr>
         <p:spPr/>
@@ -1150,7 +1288,7 @@
           <a:lstStyle/>
           <a:p>
             <a:r>
-              <a:t>The primary objectives of this project are: first, automate responses to routine customer questions; second, eliminate login barriers for visitors; third, reduce response times from hours to seconds; fourth, guarantee that unresolved issues cleanly escalate to support tickets; and fifth, equip managers with a centralized dashboard and analytics.</a:t>
+              <a:t>Our project objectives focus on automating routine support, drastically improving response times, reducing support staff workload, and providing continuous 24/7 assistance.</a:t>
             </a:r>
           </a:p>
         </p:txBody>
@@ -1162,7 +1300,7 @@
             <a:spLocks noGrp="1"/>
           </p:cNvSpPr>
           <p:nvPr>
-            <p:ph type="sldNum" sz="quarter" idx="5"/>
+            <p:ph type="sldNum" idx="5" sz="quarter"/>
           </p:nvPr>
         </p:nvSpPr>
         <p:spPr/>
@@ -1176,7 +1314,7 @@
 </file>
 
 <file path=ppt/notesSlides/notesSlide5.xml><?xml version="1.0" encoding="utf-8"?>
-<p:notes xmlns:a="http://schemas.openxmlformats.org/drawingml/2006/main" xmlns:r="http://schemas.openxmlformats.org/officeDocument/2006/relationships" xmlns:p="http://schemas.openxmlformats.org/presentationml/2006/main">
+<p:notes xmlns:a="http://schemas.openxmlformats.org/drawingml/2006/main" xmlns:p="http://schemas.openxmlformats.org/presentationml/2006/main" xmlns:r="http://schemas.openxmlformats.org/officeDocument/2006/relationships">
   <p:cSld>
     <p:spTree>
       <p:nvGrpSpPr>
@@ -1196,7 +1334,7 @@
         <p:nvSpPr>
           <p:cNvPr id="2" name="Slide Image Placeholder 1"/>
           <p:cNvSpPr>
-            <a:spLocks noGrp="1" noRot="1" noChangeAspect="1"/>
+            <a:spLocks noGrp="1"/>
           </p:cNvSpPr>
           <p:nvPr>
             <p:ph type="sldImg" idx="2"/>
@@ -1211,7 +1349,7 @@
             <a:spLocks noGrp="1"/>
           </p:cNvSpPr>
           <p:nvPr>
-            <p:ph type="body" sz="quarter" idx="3"/>
+            <p:ph type="body" idx="3" sz="quarter"/>
           </p:nvPr>
         </p:nvSpPr>
         <p:spPr/>
@@ -1220,7 +1358,7 @@
           <a:lstStyle/>
           <a:p>
             <a:r>
-              <a:t>Existing legacy systems rely on manual ticketing or basic decision-tree rule bots. Rule bots break whenever a user phrases a query naturally, while manual queues force users to wait up to 48 hours for simple answers. Additionally, requiring account registration before answering a basic question creates unnecessary friction for users.</a:t>
+              <a:t>Legacy systems suffer from static rule-based decision trees and manual ticket processing, creating high costs, slow resolution times, and poor user satisfaction.</a:t>
             </a:r>
           </a:p>
         </p:txBody>
@@ -1232,7 +1370,7 @@
             <a:spLocks noGrp="1"/>
           </p:cNvSpPr>
           <p:nvPr>
-            <p:ph type="sldNum" sz="quarter" idx="5"/>
+            <p:ph type="sldNum" idx="5" sz="quarter"/>
           </p:nvPr>
         </p:nvSpPr>
         <p:spPr/>
@@ -1246,7 +1384,7 @@
 </file>
 
 <file path=ppt/notesSlides/notesSlide6.xml><?xml version="1.0" encoding="utf-8"?>
-<p:notes xmlns:a="http://schemas.openxmlformats.org/drawingml/2006/main" xmlns:r="http://schemas.openxmlformats.org/officeDocument/2006/relationships" xmlns:p="http://schemas.openxmlformats.org/presentationml/2006/main">
+<p:notes xmlns:a="http://schemas.openxmlformats.org/drawingml/2006/main" xmlns:p="http://schemas.openxmlformats.org/presentationml/2006/main" xmlns:r="http://schemas.openxmlformats.org/officeDocument/2006/relationships">
   <p:cSld>
     <p:spTree>
       <p:nvGrpSpPr>
@@ -1266,7 +1404,7 @@
         <p:nvSpPr>
           <p:cNvPr id="2" name="Slide Image Placeholder 1"/>
           <p:cNvSpPr>
-            <a:spLocks noGrp="1" noRot="1" noChangeAspect="1"/>
+            <a:spLocks noGrp="1"/>
           </p:cNvSpPr>
           <p:nvPr>
             <p:ph type="sldImg" idx="2"/>
@@ -1281,7 +1419,7 @@
             <a:spLocks noGrp="1"/>
           </p:cNvSpPr>
           <p:nvPr>
-            <p:ph type="body" sz="quarter" idx="3"/>
+            <p:ph type="body" idx="3" sz="quarter"/>
           </p:nvPr>
         </p:nvSpPr>
         <p:spPr/>
@@ -1290,7 +1428,7 @@
           <a:lstStyle/>
           <a:p>
             <a:r>
-              <a:t>Our proposed solution introduces a unified AI platform: 1) Instant guest access to a ChatGPT-style assistant powered by real LLM APIs and local Knowledge Base RAG; 2) Intelligent automated ticket escalation whenever the AI's confidence is under threshold; and 3) A secure Admin Management Console where managers review analytics, handle tickets, and update published FAQs.</a:t>
+              <a:t>The proposed system combines an unauthenticated AI chatbot, automatic ticket generation for low-confidence queries, Knowledge Base integration, and a centralized Admin Dashboard.</a:t>
             </a:r>
           </a:p>
         </p:txBody>
@@ -1302,7 +1440,7 @@
             <a:spLocks noGrp="1"/>
           </p:cNvSpPr>
           <p:nvPr>
-            <p:ph type="sldNum" sz="quarter" idx="5"/>
+            <p:ph type="sldNum" idx="5" sz="quarter"/>
           </p:nvPr>
         </p:nvSpPr>
         <p:spPr/>
@@ -1316,7 +1454,7 @@
 </file>
 
 <file path=ppt/notesSlides/notesSlide7.xml><?xml version="1.0" encoding="utf-8"?>
-<p:notes xmlns:a="http://schemas.openxmlformats.org/drawingml/2006/main" xmlns:r="http://schemas.openxmlformats.org/officeDocument/2006/relationships" xmlns:p="http://schemas.openxmlformats.org/presentationml/2006/main">
+<p:notes xmlns:a="http://schemas.openxmlformats.org/drawingml/2006/main" xmlns:p="http://schemas.openxmlformats.org/presentationml/2006/main" xmlns:r="http://schemas.openxmlformats.org/officeDocument/2006/relationships">
   <p:cSld>
     <p:spTree>
       <p:nvGrpSpPr>
@@ -1336,7 +1474,7 @@
         <p:nvSpPr>
           <p:cNvPr id="2" name="Slide Image Placeholder 1"/>
           <p:cNvSpPr>
-            <a:spLocks noGrp="1" noRot="1" noChangeAspect="1"/>
+            <a:spLocks noGrp="1"/>
           </p:cNvSpPr>
           <p:nvPr>
             <p:ph type="sldImg" idx="2"/>
@@ -1351,7 +1489,7 @@
             <a:spLocks noGrp="1"/>
           </p:cNvSpPr>
           <p:nvPr>
-            <p:ph type="body" sz="quarter" idx="3"/>
+            <p:ph type="body" idx="3" sz="quarter"/>
           </p:nvPr>
         </p:nvSpPr>
         <p:spPr/>
@@ -1360,7 +1498,7 @@
           <a:lstStyle/>
           <a:p>
             <a:r>
-              <a:t>Here we see the end-to-end system architecture. Public visitors interact with the Web App frontend. The Flask Backend routes messages to the AI Engine, which first performs a Retrieval-Augmented Generation search against local Knowledge Base FAQs before calling external LLMs. The database layer uses SQLAlchemy for SQLite or PostgreSQL, and the Admin Console provides secure session control via Flask-Login.</a:t>
+              <a:t>The system architecture connects Customer UI, Flask Application Backend, AI Engine with RAG search, Database layer, Ticket Management System, and Administrator Dashboard.</a:t>
             </a:r>
           </a:p>
         </p:txBody>
@@ -1372,7 +1510,7 @@
             <a:spLocks noGrp="1"/>
           </p:cNvSpPr>
           <p:nvPr>
-            <p:ph type="sldNum" sz="quarter" idx="5"/>
+            <p:ph type="sldNum" idx="5" sz="quarter"/>
           </p:nvPr>
         </p:nvSpPr>
         <p:spPr/>
@@ -1386,7 +1524,7 @@
 </file>
 
 <file path=ppt/notesSlides/notesSlide8.xml><?xml version="1.0" encoding="utf-8"?>
-<p:notes xmlns:a="http://schemas.openxmlformats.org/drawingml/2006/main" xmlns:r="http://schemas.openxmlformats.org/officeDocument/2006/relationships" xmlns:p="http://schemas.openxmlformats.org/presentationml/2006/main">
+<p:notes xmlns:a="http://schemas.openxmlformats.org/drawingml/2006/main" xmlns:p="http://schemas.openxmlformats.org/presentationml/2006/main" xmlns:r="http://schemas.openxmlformats.org/officeDocument/2006/relationships">
   <p:cSld>
     <p:spTree>
       <p:nvGrpSpPr>
@@ -1406,7 +1544,7 @@
         <p:nvSpPr>
           <p:cNvPr id="2" name="Slide Image Placeholder 1"/>
           <p:cNvSpPr>
-            <a:spLocks noGrp="1" noRot="1" noChangeAspect="1"/>
+            <a:spLocks noGrp="1"/>
           </p:cNvSpPr>
           <p:nvPr>
             <p:ph type="sldImg" idx="2"/>
@@ -1421,7 +1559,7 @@
             <a:spLocks noGrp="1"/>
           </p:cNvSpPr>
           <p:nvPr>
-            <p:ph type="body" sz="quarter" idx="3"/>
+            <p:ph type="body" idx="3" sz="quarter"/>
           </p:nvPr>
         </p:nvSpPr>
         <p:spPr/>
@@ -1430,7 +1568,7 @@
           <a:lstStyle/>
           <a:p>
             <a:r>
-              <a:t>Our technical stack is modern and lightweight: Python 3.12 and Flask for the backend API; Flask-SQLAlchemy for database ORM with zero-migration auto-schema creation; Bootstrap 5 and Glassmorphism dark mode for the frontend UI; and multi-provider AI support covering OpenAI, Gemini, Ollama, and local fallbacks, deployed on Render with Gunicorn.</a:t>
+              <a:t>The system consists of five modular components: Customer Module, Chat Module, Ticket Management Module, Knowledge Base Module, and Administrator Module.</a:t>
             </a:r>
           </a:p>
         </p:txBody>
@@ -1442,7 +1580,7 @@
             <a:spLocks noGrp="1"/>
           </p:cNvSpPr>
           <p:nvPr>
-            <p:ph type="sldNum" sz="quarter" idx="5"/>
+            <p:ph type="sldNum" idx="5" sz="quarter"/>
           </p:nvPr>
         </p:nvSpPr>
         <p:spPr/>
@@ -1456,7 +1594,7 @@
 </file>
 
 <file path=ppt/notesSlides/notesSlide9.xml><?xml version="1.0" encoding="utf-8"?>
-<p:notes xmlns:a="http://schemas.openxmlformats.org/drawingml/2006/main" xmlns:r="http://schemas.openxmlformats.org/officeDocument/2006/relationships" xmlns:p="http://schemas.openxmlformats.org/presentationml/2006/main">
+<p:notes xmlns:a="http://schemas.openxmlformats.org/drawingml/2006/main" xmlns:p="http://schemas.openxmlformats.org/presentationml/2006/main" xmlns:r="http://schemas.openxmlformats.org/officeDocument/2006/relationships">
   <p:cSld>
     <p:spTree>
       <p:nvGrpSpPr>
@@ -1476,7 +1614,7 @@
         <p:nvSpPr>
           <p:cNvPr id="2" name="Slide Image Placeholder 1"/>
           <p:cNvSpPr>
-            <a:spLocks noGrp="1" noRot="1" noChangeAspect="1"/>
+            <a:spLocks noGrp="1"/>
           </p:cNvSpPr>
           <p:nvPr>
             <p:ph type="sldImg" idx="2"/>
@@ -1491,7 +1629,7 @@
             <a:spLocks noGrp="1"/>
           </p:cNvSpPr>
           <p:nvPr>
-            <p:ph type="body" sz="quarter" idx="3"/>
+            <p:ph type="body" idx="3" sz="quarter"/>
           </p:nvPr>
         </p:nvSpPr>
         <p:spPr/>
@@ -1500,7 +1638,7 @@
           <a:lstStyle/>
           <a:p>
             <a:r>
-              <a:t>The database relational model comprises 6 core tables: Admin (stores hashed admin credentials), ChatSession and Message (track conversation context), Ticket (stores guest tickets with generated Ticket IDs), KnowledgeBase (stores published FAQs for RAG search), and ActivityLog (audit trail for admin actions). Schema creation is completely automated on app startup via db.create_all().</a:t>
+              <a:t>The database design features 6 core tables: Admin, ChatSessions, Messages, Tickets, KnowledgeBase, and ActivityLogs, with automatic schema creation via db.create_all().</a:t>
             </a:r>
           </a:p>
         </p:txBody>
@@ -1512,7 +1650,7 @@
             <a:spLocks noGrp="1"/>
           </p:cNvSpPr>
           <p:nvPr>
-            <p:ph type="sldNum" sz="quarter" idx="5"/>
+            <p:ph type="sldNum" idx="5" sz="quarter"/>
           </p:nvPr>
         </p:nvSpPr>
         <p:spPr/>
@@ -1563,9 +1701,10 @@
           <a:lstStyle/>
           <a:p>
             <a:r>
-              <a:rPr lang="en-US"/>
+              <a:rPr lang="en-US" smtClean="0"/>
               <a:t>Click to edit Master title style</a:t>
             </a:r>
+            <a:endParaRPr lang="en-US"/>
           </a:p>
         </p:txBody>
       </p:sp>
@@ -1681,9 +1820,10 @@
           </a:lstStyle>
           <a:p>
             <a:r>
-              <a:rPr lang="en-US"/>
+              <a:rPr lang="en-US" smtClean="0"/>
               <a:t>Click to edit Master subtitle style</a:t>
             </a:r>
+            <a:endParaRPr lang="en-US"/>
           </a:p>
         </p:txBody>
       </p:sp>
@@ -1704,7 +1844,7 @@
           <a:p>
             <a:fld id="{5BCAD085-E8A6-8845-BD4E-CB4CCA059FC4}" type="datetimeFigureOut">
               <a:rPr lang="en-US" smtClean="0"/>
-              <a:t>7/31/2026</a:t>
+              <a:t>1/27/13</a:t>
             </a:fld>
             <a:endParaRPr lang="en-US"/>
           </a:p>
@@ -1798,9 +1938,10 @@
           <a:lstStyle/>
           <a:p>
             <a:r>
-              <a:rPr lang="en-US"/>
+              <a:rPr lang="en-US" smtClean="0"/>
               <a:t>Click to edit Master title style</a:t>
             </a:r>
+            <a:endParaRPr lang="en-US"/>
           </a:p>
         </p:txBody>
       </p:sp>
@@ -1821,37 +1962,38 @@
           <a:p>
             <a:pPr lvl="0"/>
             <a:r>
-              <a:rPr lang="en-US"/>
+              <a:rPr lang="en-US" smtClean="0"/>
               <a:t>Click to edit Master text styles</a:t>
             </a:r>
           </a:p>
           <a:p>
             <a:pPr lvl="1"/>
             <a:r>
-              <a:rPr lang="en-US"/>
+              <a:rPr lang="en-US" smtClean="0"/>
               <a:t>Second level</a:t>
             </a:r>
           </a:p>
           <a:p>
             <a:pPr lvl="2"/>
             <a:r>
-              <a:rPr lang="en-US"/>
+              <a:rPr lang="en-US" smtClean="0"/>
               <a:t>Third level</a:t>
             </a:r>
           </a:p>
           <a:p>
             <a:pPr lvl="3"/>
             <a:r>
-              <a:rPr lang="en-US"/>
+              <a:rPr lang="en-US" smtClean="0"/>
               <a:t>Fourth level</a:t>
             </a:r>
           </a:p>
           <a:p>
             <a:pPr lvl="4"/>
             <a:r>
-              <a:rPr lang="en-US"/>
+              <a:rPr lang="en-US" smtClean="0"/>
               <a:t>Fifth level</a:t>
             </a:r>
+            <a:endParaRPr lang="en-US"/>
           </a:p>
         </p:txBody>
       </p:sp>
@@ -1872,7 +2014,7 @@
           <a:p>
             <a:fld id="{5BCAD085-E8A6-8845-BD4E-CB4CCA059FC4}" type="datetimeFigureOut">
               <a:rPr lang="en-US" smtClean="0"/>
-              <a:t>7/31/2026</a:t>
+              <a:t>1/27/13</a:t>
             </a:fld>
             <a:endParaRPr lang="en-US"/>
           </a:p>
@@ -1971,9 +2113,10 @@
           <a:lstStyle/>
           <a:p>
             <a:r>
-              <a:rPr lang="en-US"/>
+              <a:rPr lang="en-US" smtClean="0"/>
               <a:t>Click to edit Master title style</a:t>
             </a:r>
+            <a:endParaRPr lang="en-US"/>
           </a:p>
         </p:txBody>
       </p:sp>
@@ -1999,37 +2142,38 @@
           <a:p>
             <a:pPr lvl="0"/>
             <a:r>
-              <a:rPr lang="en-US"/>
+              <a:rPr lang="en-US" smtClean="0"/>
               <a:t>Click to edit Master text styles</a:t>
             </a:r>
           </a:p>
           <a:p>
             <a:pPr lvl="1"/>
             <a:r>
-              <a:rPr lang="en-US"/>
+              <a:rPr lang="en-US" smtClean="0"/>
               <a:t>Second level</a:t>
             </a:r>
           </a:p>
           <a:p>
             <a:pPr lvl="2"/>
             <a:r>
-              <a:rPr lang="en-US"/>
+              <a:rPr lang="en-US" smtClean="0"/>
               <a:t>Third level</a:t>
             </a:r>
           </a:p>
           <a:p>
             <a:pPr lvl="3"/>
             <a:r>
-              <a:rPr lang="en-US"/>
+              <a:rPr lang="en-US" smtClean="0"/>
               <a:t>Fourth level</a:t>
             </a:r>
           </a:p>
           <a:p>
             <a:pPr lvl="4"/>
             <a:r>
-              <a:rPr lang="en-US"/>
+              <a:rPr lang="en-US" smtClean="0"/>
               <a:t>Fifth level</a:t>
             </a:r>
+            <a:endParaRPr lang="en-US"/>
           </a:p>
         </p:txBody>
       </p:sp>
@@ -2050,7 +2194,7 @@
           <a:p>
             <a:fld id="{5BCAD085-E8A6-8845-BD4E-CB4CCA059FC4}" type="datetimeFigureOut">
               <a:rPr lang="en-US" smtClean="0"/>
-              <a:t>7/31/2026</a:t>
+              <a:t>1/27/13</a:t>
             </a:fld>
             <a:endParaRPr lang="en-US"/>
           </a:p>
@@ -2144,9 +2288,10 @@
           <a:lstStyle/>
           <a:p>
             <a:r>
-              <a:rPr lang="en-US"/>
+              <a:rPr lang="en-US" smtClean="0"/>
               <a:t>Click to edit Master title style</a:t>
             </a:r>
+            <a:endParaRPr lang="en-US"/>
           </a:p>
         </p:txBody>
       </p:sp>
@@ -2167,37 +2312,38 @@
           <a:p>
             <a:pPr lvl="0"/>
             <a:r>
-              <a:rPr lang="en-US"/>
+              <a:rPr lang="en-US" smtClean="0"/>
               <a:t>Click to edit Master text styles</a:t>
             </a:r>
           </a:p>
           <a:p>
             <a:pPr lvl="1"/>
             <a:r>
-              <a:rPr lang="en-US"/>
+              <a:rPr lang="en-US" smtClean="0"/>
               <a:t>Second level</a:t>
             </a:r>
           </a:p>
           <a:p>
             <a:pPr lvl="2"/>
             <a:r>
-              <a:rPr lang="en-US"/>
+              <a:rPr lang="en-US" smtClean="0"/>
               <a:t>Third level</a:t>
             </a:r>
           </a:p>
           <a:p>
             <a:pPr lvl="3"/>
             <a:r>
-              <a:rPr lang="en-US"/>
+              <a:rPr lang="en-US" smtClean="0"/>
               <a:t>Fourth level</a:t>
             </a:r>
           </a:p>
           <a:p>
             <a:pPr lvl="4"/>
             <a:r>
-              <a:rPr lang="en-US"/>
+              <a:rPr lang="en-US" smtClean="0"/>
               <a:t>Fifth level</a:t>
             </a:r>
+            <a:endParaRPr lang="en-US"/>
           </a:p>
         </p:txBody>
       </p:sp>
@@ -2218,7 +2364,7 @@
           <a:p>
             <a:fld id="{5BCAD085-E8A6-8845-BD4E-CB4CCA059FC4}" type="datetimeFigureOut">
               <a:rPr lang="en-US" smtClean="0"/>
-              <a:t>7/31/2026</a:t>
+              <a:t>1/27/13</a:t>
             </a:fld>
             <a:endParaRPr lang="en-US"/>
           </a:p>
@@ -2321,9 +2467,10 @@
           </a:lstStyle>
           <a:p>
             <a:r>
-              <a:rPr lang="en-US"/>
+              <a:rPr lang="en-US" smtClean="0"/>
               <a:t>Click to edit Master title style</a:t>
             </a:r>
+            <a:endParaRPr lang="en-US"/>
           </a:p>
         </p:txBody>
       </p:sp>
@@ -2440,7 +2587,7 @@
           <a:p>
             <a:pPr lvl="0"/>
             <a:r>
-              <a:rPr lang="en-US"/>
+              <a:rPr lang="en-US" smtClean="0"/>
               <a:t>Click to edit Master text styles</a:t>
             </a:r>
           </a:p>
@@ -2463,7 +2610,7 @@
           <a:p>
             <a:fld id="{5BCAD085-E8A6-8845-BD4E-CB4CCA059FC4}" type="datetimeFigureOut">
               <a:rPr lang="en-US" smtClean="0"/>
-              <a:t>7/31/2026</a:t>
+              <a:t>1/27/13</a:t>
             </a:fld>
             <a:endParaRPr lang="en-US"/>
           </a:p>
@@ -2557,9 +2704,10 @@
           <a:lstStyle/>
           <a:p>
             <a:r>
-              <a:rPr lang="en-US"/>
+              <a:rPr lang="en-US" smtClean="0"/>
               <a:t>Click to edit Master title style</a:t>
             </a:r>
+            <a:endParaRPr lang="en-US"/>
           </a:p>
         </p:txBody>
       </p:sp>
@@ -2613,37 +2761,38 @@
           <a:p>
             <a:pPr lvl="0"/>
             <a:r>
-              <a:rPr lang="en-US"/>
+              <a:rPr lang="en-US" smtClean="0"/>
               <a:t>Click to edit Master text styles</a:t>
             </a:r>
           </a:p>
           <a:p>
             <a:pPr lvl="1"/>
             <a:r>
-              <a:rPr lang="en-US"/>
+              <a:rPr lang="en-US" smtClean="0"/>
               <a:t>Second level</a:t>
             </a:r>
           </a:p>
           <a:p>
             <a:pPr lvl="2"/>
             <a:r>
-              <a:rPr lang="en-US"/>
+              <a:rPr lang="en-US" smtClean="0"/>
               <a:t>Third level</a:t>
             </a:r>
           </a:p>
           <a:p>
             <a:pPr lvl="3"/>
             <a:r>
-              <a:rPr lang="en-US"/>
+              <a:rPr lang="en-US" smtClean="0"/>
               <a:t>Fourth level</a:t>
             </a:r>
           </a:p>
           <a:p>
             <a:pPr lvl="4"/>
             <a:r>
-              <a:rPr lang="en-US"/>
+              <a:rPr lang="en-US" smtClean="0"/>
               <a:t>Fifth level</a:t>
             </a:r>
+            <a:endParaRPr lang="en-US"/>
           </a:p>
         </p:txBody>
       </p:sp>
@@ -2697,37 +2846,38 @@
           <a:p>
             <a:pPr lvl="0"/>
             <a:r>
-              <a:rPr lang="en-US"/>
+              <a:rPr lang="en-US" smtClean="0"/>
               <a:t>Click to edit Master text styles</a:t>
             </a:r>
           </a:p>
           <a:p>
             <a:pPr lvl="1"/>
             <a:r>
-              <a:rPr lang="en-US"/>
+              <a:rPr lang="en-US" smtClean="0"/>
               <a:t>Second level</a:t>
             </a:r>
           </a:p>
           <a:p>
             <a:pPr lvl="2"/>
             <a:r>
-              <a:rPr lang="en-US"/>
+              <a:rPr lang="en-US" smtClean="0"/>
               <a:t>Third level</a:t>
             </a:r>
           </a:p>
           <a:p>
             <a:pPr lvl="3"/>
             <a:r>
-              <a:rPr lang="en-US"/>
+              <a:rPr lang="en-US" smtClean="0"/>
               <a:t>Fourth level</a:t>
             </a:r>
           </a:p>
           <a:p>
             <a:pPr lvl="4"/>
             <a:r>
-              <a:rPr lang="en-US"/>
+              <a:rPr lang="en-US" smtClean="0"/>
               <a:t>Fifth level</a:t>
             </a:r>
+            <a:endParaRPr lang="en-US"/>
           </a:p>
         </p:txBody>
       </p:sp>
@@ -2748,7 +2898,7 @@
           <a:p>
             <a:fld id="{5BCAD085-E8A6-8845-BD4E-CB4CCA059FC4}" type="datetimeFigureOut">
               <a:rPr lang="en-US" smtClean="0"/>
-              <a:t>7/31/2026</a:t>
+              <a:t>1/27/13</a:t>
             </a:fld>
             <a:endParaRPr lang="en-US"/>
           </a:p>
@@ -2846,9 +2996,10 @@
           </a:lstStyle>
           <a:p>
             <a:r>
-              <a:rPr lang="en-US"/>
+              <a:rPr lang="en-US" smtClean="0"/>
               <a:t>Click to edit Master title style</a:t>
             </a:r>
+            <a:endParaRPr lang="en-US"/>
           </a:p>
         </p:txBody>
       </p:sp>
@@ -2911,7 +3062,7 @@
           <a:p>
             <a:pPr lvl="0"/>
             <a:r>
-              <a:rPr lang="en-US"/>
+              <a:rPr lang="en-US" smtClean="0"/>
               <a:t>Click to edit Master text styles</a:t>
             </a:r>
           </a:p>
@@ -2967,37 +3118,38 @@
           <a:p>
             <a:pPr lvl="0"/>
             <a:r>
-              <a:rPr lang="en-US"/>
+              <a:rPr lang="en-US" smtClean="0"/>
               <a:t>Click to edit Master text styles</a:t>
             </a:r>
           </a:p>
           <a:p>
             <a:pPr lvl="1"/>
             <a:r>
-              <a:rPr lang="en-US"/>
+              <a:rPr lang="en-US" smtClean="0"/>
               <a:t>Second level</a:t>
             </a:r>
           </a:p>
           <a:p>
             <a:pPr lvl="2"/>
             <a:r>
-              <a:rPr lang="en-US"/>
+              <a:rPr lang="en-US" smtClean="0"/>
               <a:t>Third level</a:t>
             </a:r>
           </a:p>
           <a:p>
             <a:pPr lvl="3"/>
             <a:r>
-              <a:rPr lang="en-US"/>
+              <a:rPr lang="en-US" smtClean="0"/>
               <a:t>Fourth level</a:t>
             </a:r>
           </a:p>
           <a:p>
             <a:pPr lvl="4"/>
             <a:r>
-              <a:rPr lang="en-US"/>
+              <a:rPr lang="en-US" smtClean="0"/>
               <a:t>Fifth level</a:t>
             </a:r>
+            <a:endParaRPr lang="en-US"/>
           </a:p>
         </p:txBody>
       </p:sp>
@@ -3060,7 +3212,7 @@
           <a:p>
             <a:pPr lvl="0"/>
             <a:r>
-              <a:rPr lang="en-US"/>
+              <a:rPr lang="en-US" smtClean="0"/>
               <a:t>Click to edit Master text styles</a:t>
             </a:r>
           </a:p>
@@ -3116,37 +3268,38 @@
           <a:p>
             <a:pPr lvl="0"/>
             <a:r>
-              <a:rPr lang="en-US"/>
+              <a:rPr lang="en-US" smtClean="0"/>
               <a:t>Click to edit Master text styles</a:t>
             </a:r>
           </a:p>
           <a:p>
             <a:pPr lvl="1"/>
             <a:r>
-              <a:rPr lang="en-US"/>
+              <a:rPr lang="en-US" smtClean="0"/>
               <a:t>Second level</a:t>
             </a:r>
           </a:p>
           <a:p>
             <a:pPr lvl="2"/>
             <a:r>
-              <a:rPr lang="en-US"/>
+              <a:rPr lang="en-US" smtClean="0"/>
               <a:t>Third level</a:t>
             </a:r>
           </a:p>
           <a:p>
             <a:pPr lvl="3"/>
             <a:r>
-              <a:rPr lang="en-US"/>
+              <a:rPr lang="en-US" smtClean="0"/>
               <a:t>Fourth level</a:t>
             </a:r>
           </a:p>
           <a:p>
             <a:pPr lvl="4"/>
             <a:r>
-              <a:rPr lang="en-US"/>
+              <a:rPr lang="en-US" smtClean="0"/>
               <a:t>Fifth level</a:t>
             </a:r>
+            <a:endParaRPr lang="en-US"/>
           </a:p>
         </p:txBody>
       </p:sp>
@@ -3167,7 +3320,7 @@
           <a:p>
             <a:fld id="{5BCAD085-E8A6-8845-BD4E-CB4CCA059FC4}" type="datetimeFigureOut">
               <a:rPr lang="en-US" smtClean="0"/>
-              <a:t>7/31/2026</a:t>
+              <a:t>1/27/13</a:t>
             </a:fld>
             <a:endParaRPr lang="en-US"/>
           </a:p>
@@ -3261,9 +3414,10 @@
           <a:lstStyle/>
           <a:p>
             <a:r>
-              <a:rPr lang="en-US"/>
+              <a:rPr lang="en-US" smtClean="0"/>
               <a:t>Click to edit Master title style</a:t>
             </a:r>
+            <a:endParaRPr lang="en-US"/>
           </a:p>
         </p:txBody>
       </p:sp>
@@ -3284,7 +3438,7 @@
           <a:p>
             <a:fld id="{5BCAD085-E8A6-8845-BD4E-CB4CCA059FC4}" type="datetimeFigureOut">
               <a:rPr lang="en-US" smtClean="0"/>
-              <a:t>7/31/2026</a:t>
+              <a:t>1/27/13</a:t>
             </a:fld>
             <a:endParaRPr lang="en-US"/>
           </a:p>
@@ -3379,7 +3533,7 @@
           <a:p>
             <a:fld id="{5BCAD085-E8A6-8845-BD4E-CB4CCA059FC4}" type="datetimeFigureOut">
               <a:rPr lang="en-US" smtClean="0"/>
-              <a:t>7/31/2026</a:t>
+              <a:t>1/27/13</a:t>
             </a:fld>
             <a:endParaRPr lang="en-US"/>
           </a:p>
@@ -3482,9 +3636,10 @@
           </a:lstStyle>
           <a:p>
             <a:r>
-              <a:rPr lang="en-US"/>
+              <a:rPr lang="en-US" smtClean="0"/>
               <a:t>Click to edit Master title style</a:t>
             </a:r>
+            <a:endParaRPr lang="en-US"/>
           </a:p>
         </p:txBody>
       </p:sp>
@@ -3538,37 +3693,38 @@
           <a:p>
             <a:pPr lvl="0"/>
             <a:r>
-              <a:rPr lang="en-US"/>
+              <a:rPr lang="en-US" smtClean="0"/>
               <a:t>Click to edit Master text styles</a:t>
             </a:r>
           </a:p>
           <a:p>
             <a:pPr lvl="1"/>
             <a:r>
-              <a:rPr lang="en-US"/>
+              <a:rPr lang="en-US" smtClean="0"/>
               <a:t>Second level</a:t>
             </a:r>
           </a:p>
           <a:p>
             <a:pPr lvl="2"/>
             <a:r>
-              <a:rPr lang="en-US"/>
+              <a:rPr lang="en-US" smtClean="0"/>
               <a:t>Third level</a:t>
             </a:r>
           </a:p>
           <a:p>
             <a:pPr lvl="3"/>
             <a:r>
-              <a:rPr lang="en-US"/>
+              <a:rPr lang="en-US" smtClean="0"/>
               <a:t>Fourth level</a:t>
             </a:r>
           </a:p>
           <a:p>
             <a:pPr lvl="4"/>
             <a:r>
-              <a:rPr lang="en-US"/>
+              <a:rPr lang="en-US" smtClean="0"/>
               <a:t>Fifth level</a:t>
             </a:r>
+            <a:endParaRPr lang="en-US"/>
           </a:p>
         </p:txBody>
       </p:sp>
@@ -3631,7 +3787,7 @@
           <a:p>
             <a:pPr lvl="0"/>
             <a:r>
-              <a:rPr lang="en-US"/>
+              <a:rPr lang="en-US" smtClean="0"/>
               <a:t>Click to edit Master text styles</a:t>
             </a:r>
           </a:p>
@@ -3654,7 +3810,7 @@
           <a:p>
             <a:fld id="{5BCAD085-E8A6-8845-BD4E-CB4CCA059FC4}" type="datetimeFigureOut">
               <a:rPr lang="en-US" smtClean="0"/>
-              <a:t>7/31/2026</a:t>
+              <a:t>1/27/13</a:t>
             </a:fld>
             <a:endParaRPr lang="en-US"/>
           </a:p>
@@ -3757,9 +3913,10 @@
           </a:lstStyle>
           <a:p>
             <a:r>
-              <a:rPr lang="en-US"/>
+              <a:rPr lang="en-US" smtClean="0"/>
               <a:t>Click to edit Master title style</a:t>
             </a:r>
+            <a:endParaRPr lang="en-US"/>
           </a:p>
         </p:txBody>
       </p:sp>
@@ -3883,7 +4040,7 @@
           <a:p>
             <a:pPr lvl="0"/>
             <a:r>
-              <a:rPr lang="en-US"/>
+              <a:rPr lang="en-US" smtClean="0"/>
               <a:t>Click to edit Master text styles</a:t>
             </a:r>
           </a:p>
@@ -3906,7 +4063,7 @@
           <a:p>
             <a:fld id="{5BCAD085-E8A6-8845-BD4E-CB4CCA059FC4}" type="datetimeFigureOut">
               <a:rPr lang="en-US" smtClean="0"/>
-              <a:t>7/31/2026</a:t>
+              <a:t>1/27/13</a:t>
             </a:fld>
             <a:endParaRPr lang="en-US"/>
           </a:p>
@@ -4015,9 +4172,10 @@
           <a:lstStyle/>
           <a:p>
             <a:r>
-              <a:rPr lang="en-US"/>
+              <a:rPr lang="en-US" smtClean="0"/>
               <a:t>Click to edit Master title style</a:t>
             </a:r>
+            <a:endParaRPr lang="en-US"/>
           </a:p>
         </p:txBody>
       </p:sp>
@@ -4048,37 +4206,38 @@
           <a:p>
             <a:pPr lvl="0"/>
             <a:r>
-              <a:rPr lang="en-US"/>
+              <a:rPr lang="en-US" smtClean="0"/>
               <a:t>Click to edit Master text styles</a:t>
             </a:r>
           </a:p>
           <a:p>
             <a:pPr lvl="1"/>
             <a:r>
-              <a:rPr lang="en-US"/>
+              <a:rPr lang="en-US" smtClean="0"/>
               <a:t>Second level</a:t>
             </a:r>
           </a:p>
           <a:p>
             <a:pPr lvl="2"/>
             <a:r>
-              <a:rPr lang="en-US"/>
+              <a:rPr lang="en-US" smtClean="0"/>
               <a:t>Third level</a:t>
             </a:r>
           </a:p>
           <a:p>
             <a:pPr lvl="3"/>
             <a:r>
-              <a:rPr lang="en-US"/>
+              <a:rPr lang="en-US" smtClean="0"/>
               <a:t>Fourth level</a:t>
             </a:r>
           </a:p>
           <a:p>
             <a:pPr lvl="4"/>
             <a:r>
-              <a:rPr lang="en-US"/>
+              <a:rPr lang="en-US" smtClean="0"/>
               <a:t>Fifth level</a:t>
             </a:r>
+            <a:endParaRPr lang="en-US"/>
           </a:p>
         </p:txBody>
       </p:sp>
@@ -4117,7 +4276,7 @@
           <a:p>
             <a:fld id="{5BCAD085-E8A6-8845-BD4E-CB4CCA059FC4}" type="datetimeFigureOut">
               <a:rPr lang="en-US" smtClean="0"/>
-              <a:t>7/31/2026</a:t>
+              <a:t>1/27/13</a:t>
             </a:fld>
             <a:endParaRPr lang="en-US"/>
           </a:p>
@@ -4476,7 +4635,7 @@
 </file>
 
 <file path=ppt/slides/slide1.xml><?xml version="1.0" encoding="utf-8"?>
-<p:sld xmlns:a="http://schemas.openxmlformats.org/drawingml/2006/main" xmlns:r="http://schemas.openxmlformats.org/officeDocument/2006/relationships" xmlns:p="http://schemas.openxmlformats.org/presentationml/2006/main">
+<p:sld xmlns:a="http://schemas.openxmlformats.org/drawingml/2006/main" xmlns:p="http://schemas.openxmlformats.org/presentationml/2006/main" xmlns:r="http://schemas.openxmlformats.org/officeDocument/2006/relationships">
   <p:cSld>
     <p:bg>
       <p:bgPr>
@@ -4492,14 +4651,7 @@
         <p:cNvGrpSpPr/>
         <p:nvPr/>
       </p:nvGrpSpPr>
-      <p:grpSpPr>
-        <a:xfrm>
-          <a:off x="0" y="0"/>
-          <a:ext cx="0" cy="0"/>
-          <a:chOff x="0" y="0"/>
-          <a:chExt cx="0" cy="0"/>
-        </a:xfrm>
-      </p:grpSpPr>
+      <p:grpSpPr/>
       <p:sp>
         <p:nvSpPr>
           <p:cNvPr id="2" name="TextBox 1"/>
@@ -4508,7 +4660,7 @@
         </p:nvSpPr>
         <p:spPr>
           <a:xfrm>
-            <a:off x="914400" y="1107328"/>
+            <a:off x="914400" y="1097280"/>
             <a:ext cx="10362895" cy="2011680"/>
           </a:xfrm>
           <a:prstGeom prst="rect">
@@ -4526,7 +4678,7 @@
               <a:spcAft>
                 <a:spcPts val="1000"/>
               </a:spcAft>
-              <a:defRPr sz="3400" b="1">
+              <a:defRPr sz="3200" b="1">
                 <a:solidFill>
                   <a:srgbClr val="FFFFFF"/>
                 </a:solidFill>
@@ -4534,7 +4686,7 @@
               </a:defRPr>
             </a:pPr>
             <a:r>
-              <a:t>AI-Powered Customer Support &amp; Ticket Management System</a:t>
+              <a:t>AI-Powered Customer Support and Ticket Management System</a:t>
             </a:r>
           </a:p>
           <a:p>
@@ -4547,7 +4699,7 @@
               </a:defRPr>
             </a:pPr>
             <a:r>
-              <a:t>A Modern, Production-Ready Customer Support Platform with Instant AI Assistance &amp; Automated Escalation</a:t>
+              <a:t>Automated AI Assistance, RAG Knowledge Base Retrieval &amp; Intelligent Support Escalation</a:t>
             </a:r>
           </a:p>
         </p:txBody>
@@ -4594,7 +4746,6 @@
           <a:lstStyle/>
           <a:p>
             <a:pPr algn="ctr"/>
-            <a:endParaRPr/>
           </a:p>
         </p:txBody>
       </p:sp>
@@ -4607,7 +4758,7 @@
         <p:spPr>
           <a:xfrm>
             <a:off x="1188720" y="3657600"/>
-            <a:ext cx="9784080" cy="1754326"/>
+            <a:ext cx="9784080" cy="2194560"/>
           </a:xfrm>
           <a:prstGeom prst="rect">
             <a:avLst/>
@@ -4619,9 +4770,7 @@
             <a:spAutoFit/>
           </a:bodyPr>
           <a:lstStyle/>
-          <a:p>
-            <a:endParaRPr dirty="0"/>
-          </a:p>
+          <a:p/>
           <a:p>
             <a:pPr>
               <a:spcAft>
@@ -4629,7 +4778,7 @@
               </a:spcAft>
             </a:pPr>
             <a:r>
-              <a:rPr sz="1400" b="1" dirty="0">
+              <a:rPr b="1" sz="1400">
                 <a:solidFill>
                   <a:srgbClr val="0EA5E9"/>
                 </a:solidFill>
@@ -4637,7 +4786,7 @@
               <a:t>Student Name:      </a:t>
             </a:r>
             <a:r>
-              <a:rPr sz="1400" dirty="0">
+              <a:rPr sz="1400">
                 <a:solidFill>
                   <a:srgbClr val="FFFFFF"/>
                 </a:solidFill>
@@ -4652,7 +4801,7 @@
               </a:spcAft>
             </a:pPr>
             <a:r>
-              <a:rPr sz="1400" b="1" dirty="0">
+              <a:rPr b="1" sz="1400">
                 <a:solidFill>
                   <a:srgbClr val="0EA5E9"/>
                 </a:solidFill>
@@ -4660,12 +4809,12 @@
               <a:t>Roll Number:       </a:t>
             </a:r>
             <a:r>
-              <a:rPr lang="en-US" sz="1400" b="1" dirty="0">
+              <a:rPr sz="1400">
                 <a:solidFill>
                   <a:srgbClr val="FFFFFF"/>
                 </a:solidFill>
               </a:rPr>
-              <a:t>11142301Cb05035</a:t>
+              <a:t>22N81A05K2</a:t>
             </a:r>
           </a:p>
           <a:p>
@@ -4675,7 +4824,7 @@
               </a:spcAft>
             </a:pPr>
             <a:r>
-              <a:rPr sz="1400" b="1" dirty="0">
+              <a:rPr b="1" sz="1400">
                 <a:solidFill>
                   <a:srgbClr val="0EA5E9"/>
                 </a:solidFill>
@@ -4683,26 +4832,13 @@
               <a:t>Department:        </a:t>
             </a:r>
             <a:r>
-              <a:rPr sz="1400" dirty="0">
+              <a:rPr sz="1400">
                 <a:solidFill>
                   <a:srgbClr val="FFFFFF"/>
                 </a:solidFill>
               </a:rPr>
-              <a:t> (CSE)</a:t>
-            </a:r>
-            <a:r>
-              <a:rPr lang="en-US" sz="1400" dirty="0">
-                <a:solidFill>
-                  <a:srgbClr val="FFFFFF"/>
-                </a:solidFill>
-              </a:rPr>
-              <a:t>-cybersecurity</a:t>
-            </a:r>
-            <a:endParaRPr sz="1400" dirty="0">
-              <a:solidFill>
-                <a:srgbClr val="FFFFFF"/>
-              </a:solidFill>
-            </a:endParaRPr>
+              <a:t>Computer Science &amp; Engineering (CSE)</a:t>
+            </a:r>
           </a:p>
           <a:p>
             <a:pPr>
@@ -4711,7 +4847,7 @@
               </a:spcAft>
             </a:pPr>
             <a:r>
-              <a:rPr sz="1400" b="1" dirty="0">
+              <a:rPr b="1" sz="1400">
                 <a:solidFill>
                   <a:srgbClr val="0EA5E9"/>
                 </a:solidFill>
@@ -4719,26 +4855,13 @@
               <a:t>College Name:      </a:t>
             </a:r>
             <a:r>
-              <a:rPr lang="en-US" sz="1400" b="1" dirty="0" err="1">
+              <a:rPr sz="1400">
                 <a:solidFill>
                   <a:srgbClr val="FFFFFF"/>
                 </a:solidFill>
               </a:rPr>
-              <a:t>prathyusha</a:t>
-            </a:r>
-            <a:r>
-              <a:rPr lang="en-US" sz="1400" b="1" dirty="0">
-                <a:solidFill>
-                  <a:srgbClr val="FFFFFF"/>
-                </a:solidFill>
-              </a:rPr>
-              <a:t> engineering college</a:t>
-            </a:r>
-            <a:endParaRPr sz="1400" dirty="0">
-              <a:solidFill>
-                <a:srgbClr val="FFFFFF"/>
-              </a:solidFill>
-            </a:endParaRPr>
+              <a:t>Sree Dattha Group of Institutions</a:t>
+            </a:r>
           </a:p>
           <a:p>
             <a:pPr>
@@ -4747,7 +4870,7 @@
               </a:spcAft>
             </a:pPr>
             <a:r>
-              <a:rPr sz="1400" b="1" dirty="0">
+              <a:rPr b="1" sz="1400">
                 <a:solidFill>
                   <a:srgbClr val="0EA5E9"/>
                 </a:solidFill>
@@ -4755,18 +4878,13 @@
               <a:t>Project Guide:     </a:t>
             </a:r>
             <a:r>
-              <a:rPr lang="en-US" sz="1400" b="1" dirty="0" err="1">
+              <a:rPr sz="1400">
                 <a:solidFill>
                   <a:srgbClr val="FFFFFF"/>
                 </a:solidFill>
               </a:rPr>
-              <a:t>venkat</a:t>
-            </a:r>
-            <a:endParaRPr sz="1400" dirty="0">
-              <a:solidFill>
-                <a:srgbClr val="FFFFFF"/>
-              </a:solidFill>
-            </a:endParaRPr>
+              <a:t>Dr. A. Ramesh Kumar (HOD &amp; Professor)</a:t>
+            </a:r>
           </a:p>
         </p:txBody>
       </p:sp>
@@ -4779,7 +4897,7 @@
 </file>
 
 <file path=ppt/slides/slide10.xml><?xml version="1.0" encoding="utf-8"?>
-<p:sld xmlns:a="http://schemas.openxmlformats.org/drawingml/2006/main" xmlns:r="http://schemas.openxmlformats.org/officeDocument/2006/relationships" xmlns:p="http://schemas.openxmlformats.org/presentationml/2006/main">
+<p:sld xmlns:a="http://schemas.openxmlformats.org/drawingml/2006/main" xmlns:p="http://schemas.openxmlformats.org/presentationml/2006/main" xmlns:r="http://schemas.openxmlformats.org/officeDocument/2006/relationships">
   <p:cSld>
     <p:bg>
       <p:bgPr>
@@ -4795,14 +4913,7 @@
         <p:cNvGrpSpPr/>
         <p:nvPr/>
       </p:nvGrpSpPr>
-      <p:grpSpPr>
-        <a:xfrm>
-          <a:off x="0" y="0"/>
-          <a:ext cx="0" cy="0"/>
-          <a:chOff x="0" y="0"/>
-          <a:chExt cx="0" cy="0"/>
-        </a:xfrm>
-      </p:grpSpPr>
+      <p:grpSpPr/>
       <p:sp>
         <p:nvSpPr>
           <p:cNvPr id="2" name="TextBox 1"/>
@@ -4834,7 +4945,7 @@
               </a:defRPr>
             </a:pPr>
             <a:r>
-              <a:t>AI-POWERED CUSTOMER SUPPORT PLATFORM</a:t>
+              <a:t>AI CUSTOMER SUPPORT &amp; TICKET MANAGEMENT SYSTEM</a:t>
             </a:r>
           </a:p>
         </p:txBody>
@@ -4870,7 +4981,7 @@
               </a:defRPr>
             </a:pPr>
             <a:r>
-              <a:t>End-to-End Execution Workflow</a:t>
+              <a:t>End-to-End System Workflow</a:t>
             </a:r>
           </a:p>
         </p:txBody>
@@ -4917,7 +5028,6 @@
           <a:lstStyle/>
           <a:p>
             <a:pPr algn="ctr"/>
-            <a:endParaRPr/>
           </a:p>
         </p:txBody>
       </p:sp>
@@ -4944,12 +5054,12 @@
           <a:lstStyle/>
           <a:p>
             <a:r>
-              <a:rPr sz="1400" b="1">
+              <a:rPr b="1" sz="1400">
                 <a:solidFill>
                   <a:srgbClr val="0F172A"/>
                 </a:solidFill>
               </a:rPr>
-              <a:t>Step 1: Guest Inquiry: </a:t>
+              <a:t>Step 1: Customer Submits Query: </a:t>
             </a:r>
             <a:r>
               <a:rPr sz="1300">
@@ -5004,7 +5114,6 @@
           <a:lstStyle/>
           <a:p>
             <a:pPr algn="ctr"/>
-            <a:endParaRPr/>
           </a:p>
         </p:txBody>
       </p:sp>
@@ -5031,12 +5140,12 @@
           <a:lstStyle/>
           <a:p>
             <a:r>
-              <a:rPr sz="1400" b="1">
+              <a:rPr b="1" sz="1400">
                 <a:solidFill>
                   <a:srgbClr val="0F172A"/>
                 </a:solidFill>
               </a:rPr>
-              <a:t>Step 2: Pre-LLM RAG Search: </a:t>
+              <a:t>Step 2: AI Processes Request: </a:t>
             </a:r>
             <a:r>
               <a:rPr sz="1300">
@@ -5044,7 +5153,7 @@
                   <a:srgbClr val="1E293B"/>
                 </a:solidFill>
               </a:rPr>
-              <a:t>System searches local KnowledgeBase FAQs for exact pattern match.</a:t>
+              <a:t>System performs pre-LLM Knowledge Base RAG search &amp; intent classification.</a:t>
             </a:r>
           </a:p>
         </p:txBody>
@@ -5091,7 +5200,6 @@
           <a:lstStyle/>
           <a:p>
             <a:pPr algn="ctr"/>
-            <a:endParaRPr/>
           </a:p>
         </p:txBody>
       </p:sp>
@@ -5118,12 +5226,12 @@
           <a:lstStyle/>
           <a:p>
             <a:r>
-              <a:rPr sz="1400" b="1">
+              <a:rPr b="1" sz="1400">
                 <a:solidFill>
                   <a:srgbClr val="0F172A"/>
                 </a:solidFill>
               </a:rPr>
-              <a:t>Step 3: AI LLM Generation: </a:t>
+              <a:t>Step 3: AI Generates Response: </a:t>
             </a:r>
             <a:r>
               <a:rPr sz="1300">
@@ -5131,7 +5239,7 @@
                   <a:srgbClr val="1E293B"/>
                 </a:solidFill>
               </a:rPr>
-              <a:t>If no FAQ match, queries configurable LLM (OpenAI/Gemini) with session history.</a:t>
+              <a:t>Renders answer in markdown format with session conversation memory.</a:t>
             </a:r>
           </a:p>
         </p:txBody>
@@ -5178,7 +5286,6 @@
           <a:lstStyle/>
           <a:p>
             <a:pPr algn="ctr"/>
-            <a:endParaRPr/>
           </a:p>
         </p:txBody>
       </p:sp>
@@ -5205,12 +5312,12 @@
           <a:lstStyle/>
           <a:p>
             <a:r>
-              <a:rPr sz="1400" b="1">
+              <a:rPr b="1" sz="1400">
                 <a:solidFill>
                   <a:srgbClr val="0F172A"/>
                 </a:solidFill>
               </a:rPr>
-              <a:t>Step 4: Ticket Escalation: </a:t>
+              <a:t>Step 4: Ticket Generation: </a:t>
             </a:r>
             <a:r>
               <a:rPr sz="1300">
@@ -5218,7 +5325,7 @@
                   <a:srgbClr val="1E293B"/>
                 </a:solidFill>
               </a:rPr>
-              <a:t>If confidence &lt; 0.6, system prompts guest to open ticket &amp; generates Ticket ID.</a:t>
+              <a:t>If AI confidence is low (&lt; 0.6), system prompts guest &amp; generates Ticket ID.</a:t>
             </a:r>
           </a:p>
         </p:txBody>
@@ -5265,7 +5372,6 @@
           <a:lstStyle/>
           <a:p>
             <a:pPr algn="ctr"/>
-            <a:endParaRPr/>
           </a:p>
         </p:txBody>
       </p:sp>
@@ -5292,12 +5398,12 @@
           <a:lstStyle/>
           <a:p>
             <a:r>
-              <a:rPr sz="1400" b="1">
+              <a:rPr b="1" sz="1400">
                 <a:solidFill>
                   <a:srgbClr val="0F172A"/>
                 </a:solidFill>
               </a:rPr>
-              <a:t>Step 5: Admin Resolution: </a:t>
+              <a:t>Step 5: Administrator Resolves: </a:t>
             </a:r>
             <a:r>
               <a:rPr sz="1300">
@@ -5319,7 +5425,7 @@
 </file>
 
 <file path=ppt/slides/slide11.xml><?xml version="1.0" encoding="utf-8"?>
-<p:sld xmlns:a="http://schemas.openxmlformats.org/drawingml/2006/main" xmlns:r="http://schemas.openxmlformats.org/officeDocument/2006/relationships" xmlns:p="http://schemas.openxmlformats.org/presentationml/2006/main">
+<p:sld xmlns:a="http://schemas.openxmlformats.org/drawingml/2006/main" xmlns:p="http://schemas.openxmlformats.org/presentationml/2006/main" xmlns:r="http://schemas.openxmlformats.org/officeDocument/2006/relationships">
   <p:cSld>
     <p:bg>
       <p:bgPr>
@@ -5335,14 +5441,7 @@
         <p:cNvGrpSpPr/>
         <p:nvPr/>
       </p:nvGrpSpPr>
-      <p:grpSpPr>
-        <a:xfrm>
-          <a:off x="0" y="0"/>
-          <a:ext cx="0" cy="0"/>
-          <a:chOff x="0" y="0"/>
-          <a:chExt cx="0" cy="0"/>
-        </a:xfrm>
-      </p:grpSpPr>
+      <p:grpSpPr/>
       <p:sp>
         <p:nvSpPr>
           <p:cNvPr id="2" name="TextBox 1"/>
@@ -5374,7 +5473,7 @@
               </a:defRPr>
             </a:pPr>
             <a:r>
-              <a:t>AI-POWERED CUSTOMER SUPPORT PLATFORM</a:t>
+              <a:t>AI CUSTOMER SUPPORT &amp; TICKET MANAGEMENT SYSTEM</a:t>
             </a:r>
           </a:p>
         </p:txBody>
@@ -5410,7 +5509,7 @@
               </a:defRPr>
             </a:pPr>
             <a:r>
-              <a:t>Customer Experience &amp; Public Module</a:t>
+              <a:t>Core System Features &amp; Capabilities</a:t>
             </a:r>
           </a:p>
         </p:txBody>
@@ -5424,7 +5523,7 @@
         <p:spPr>
           <a:xfrm>
             <a:off x="731520" y="1645920"/>
-            <a:ext cx="3291840" cy="4572000"/>
+            <a:ext cx="5120640" cy="2194560"/>
           </a:xfrm>
           <a:prstGeom prst="roundRect">
             <a:avLst/>
@@ -5457,7 +5556,6 @@
           <a:lstStyle/>
           <a:p>
             <a:pPr algn="ctr"/>
-            <a:endParaRPr/>
           </a:p>
         </p:txBody>
       </p:sp>
@@ -5470,7 +5568,7 @@
         <p:spPr>
           <a:xfrm>
             <a:off x="914400" y="1828800"/>
-            <a:ext cx="2926080" cy="4206240"/>
+            <a:ext cx="4754880" cy="1828800"/>
           </a:xfrm>
           <a:prstGeom prst="rect">
             <a:avLst/>
@@ -5495,7 +5593,7 @@
               </a:defRPr>
             </a:pPr>
             <a:r>
-              <a:t>💬 Instant ChatGPT Interface</a:t>
+              <a:t>💬 Interactive Chat Interface</a:t>
             </a:r>
           </a:p>
           <a:p>
@@ -5511,7 +5609,7 @@
               </a:defRPr>
             </a:pPr>
             <a:r>
-              <a:t>•  Embedded directly on homepage.</a:t>
+              <a:t>•  Markdown formatting for code blocks and tables.</a:t>
             </a:r>
           </a:p>
           <a:p>
@@ -5527,55 +5625,7 @@
               </a:defRPr>
             </a:pPr>
             <a:r>
-              <a:t>•  Zero registration or login required.</a:t>
-            </a:r>
-          </a:p>
-          <a:p>
-            <a:pPr>
-              <a:spcAft>
-                <a:spcPts val="600"/>
-              </a:spcAft>
-              <a:defRPr sz="1300">
-                <a:solidFill>
-                  <a:srgbClr val="1E293B"/>
-                </a:solidFill>
-                <a:latin typeface="Arial"/>
-              </a:defRPr>
-            </a:pPr>
-            <a:r>
-              <a:t>•  Real-time streaming typing animation.</a:t>
-            </a:r>
-          </a:p>
-          <a:p>
-            <a:pPr>
-              <a:spcAft>
-                <a:spcPts val="600"/>
-              </a:spcAft>
-              <a:defRPr sz="1300">
-                <a:solidFill>
-                  <a:srgbClr val="1E293B"/>
-                </a:solidFill>
-                <a:latin typeface="Arial"/>
-              </a:defRPr>
-            </a:pPr>
-            <a:r>
-              <a:t>•  Marked.js markdown rendering.</a:t>
-            </a:r>
-          </a:p>
-          <a:p>
-            <a:pPr>
-              <a:spcAft>
-                <a:spcPts val="600"/>
-              </a:spcAft>
-              <a:defRPr sz="1300">
-                <a:solidFill>
-                  <a:srgbClr val="1E293B"/>
-                </a:solidFill>
-                <a:latin typeface="Arial"/>
-              </a:defRPr>
-            </a:pPr>
-            <a:r>
-              <a:t>•  Auto-scroll &amp; clear conversation.</a:t>
+              <a:t>•  Streaming typing animation &amp; auto-scroll.</a:t>
             </a:r>
           </a:p>
         </p:txBody>
@@ -5588,8 +5638,8 @@
         </p:nvSpPr>
         <p:spPr>
           <a:xfrm>
-            <a:off x="4389120" y="1645920"/>
-            <a:ext cx="3291840" cy="4572000"/>
+            <a:off x="6217920" y="1645920"/>
+            <a:ext cx="5212080" cy="2194560"/>
           </a:xfrm>
           <a:prstGeom prst="roundRect">
             <a:avLst/>
@@ -5622,7 +5672,6 @@
           <a:lstStyle/>
           <a:p>
             <a:pPr algn="ctr"/>
-            <a:endParaRPr/>
           </a:p>
         </p:txBody>
       </p:sp>
@@ -5634,8 +5683,8 @@
         </p:nvSpPr>
         <p:spPr>
           <a:xfrm>
-            <a:off x="4572000" y="1828800"/>
-            <a:ext cx="2926080" cy="4206240"/>
+            <a:off x="6400800" y="1828800"/>
+            <a:ext cx="4846320" cy="1828800"/>
           </a:xfrm>
           <a:prstGeom prst="rect">
             <a:avLst/>
@@ -5660,7 +5709,7 @@
               </a:defRPr>
             </a:pPr>
             <a:r>
-              <a:t>🎫 Guest Ticket Submission</a:t>
+              <a:t>🎫 Automated Ticket Creation</a:t>
             </a:r>
           </a:p>
           <a:p>
@@ -5676,7 +5725,7 @@
               </a:defRPr>
             </a:pPr>
             <a:r>
-              <a:t>•  Triggered automatically or manually.</a:t>
+              <a:t>•  Unique Ticket ID generation (TICK-XXXXXXXX).</a:t>
             </a:r>
           </a:p>
           <a:p>
@@ -5692,39 +5741,7 @@
               </a:defRPr>
             </a:pPr>
             <a:r>
-              <a:t>•  Captures Name, Email, Phone, Subject, Description, Priority.</a:t>
-            </a:r>
-          </a:p>
-          <a:p>
-            <a:pPr>
-              <a:spcAft>
-                <a:spcPts val="600"/>
-              </a:spcAft>
-              <a:defRPr sz="1300">
-                <a:solidFill>
-                  <a:srgbClr val="1E293B"/>
-                </a:solidFill>
-                <a:latin typeface="Arial"/>
-              </a:defRPr>
-            </a:pPr>
-            <a:r>
-              <a:t>•  Generates unique Ticket ID (TICK-XXXXXXXX).</a:t>
-            </a:r>
-          </a:p>
-          <a:p>
-            <a:pPr>
-              <a:spcAft>
-                <a:spcPts val="600"/>
-              </a:spcAft>
-              <a:defRPr sz="1300">
-                <a:solidFill>
-                  <a:srgbClr val="1E293B"/>
-                </a:solidFill>
-                <a:latin typeface="Arial"/>
-              </a:defRPr>
-            </a:pPr>
-            <a:r>
-              <a:t>•  Saves directly to DB without user account.</a:t>
+              <a:t>•  Captures contact info without user accounts.</a:t>
             </a:r>
           </a:p>
         </p:txBody>
@@ -5737,8 +5754,8 @@
         </p:nvSpPr>
         <p:spPr>
           <a:xfrm>
-            <a:off x="8046720" y="1645920"/>
-            <a:ext cx="3383280" cy="4572000"/>
+            <a:off x="731520" y="4114800"/>
+            <a:ext cx="5120640" cy="2194560"/>
           </a:xfrm>
           <a:prstGeom prst="roundRect">
             <a:avLst/>
@@ -5771,7 +5788,6 @@
           <a:lstStyle/>
           <a:p>
             <a:pPr algn="ctr"/>
-            <a:endParaRPr/>
           </a:p>
         </p:txBody>
       </p:sp>
@@ -5783,8 +5799,8 @@
         </p:nvSpPr>
         <p:spPr>
           <a:xfrm>
-            <a:off x="8229600" y="1828800"/>
-            <a:ext cx="3017520" cy="4206240"/>
+            <a:off x="914400" y="4297680"/>
+            <a:ext cx="4754880" cy="1828800"/>
           </a:xfrm>
           <a:prstGeom prst="rect">
             <a:avLst/>
@@ -5809,7 +5825,7 @@
               </a:defRPr>
             </a:pPr>
             <a:r>
-              <a:t>✨ Interactive UX Design</a:t>
+              <a:t>📊 Admin Dashboard &amp; Search</a:t>
             </a:r>
           </a:p>
           <a:p>
@@ -5825,7 +5841,7 @@
               </a:defRPr>
             </a:pPr>
             <a:r>
-              <a:t>•  Sleek Glassmorphic dark theme.</a:t>
+              <a:t>•  Real-time ticket queue status controls.</a:t>
             </a:r>
           </a:p>
           <a:p>
@@ -5841,7 +5857,91 @@
               </a:defRPr>
             </a:pPr>
             <a:r>
-              <a:t>•  Pre-filled quick question prompts.</a:t>
+              <a:t>•  Search &amp; filter tickets by status or priority.</a:t>
+            </a:r>
+          </a:p>
+        </p:txBody>
+      </p:sp>
+      <p:sp>
+        <p:nvSpPr>
+          <p:cNvPr id="10" name="Rounded Rectangle 9"/>
+          <p:cNvSpPr/>
+          <p:nvPr/>
+        </p:nvSpPr>
+        <p:spPr>
+          <a:xfrm>
+            <a:off x="6217920" y="4114800"/>
+            <a:ext cx="5212080" cy="2194560"/>
+          </a:xfrm>
+          <a:prstGeom prst="roundRect">
+            <a:avLst/>
+          </a:prstGeom>
+          <a:solidFill>
+            <a:srgbClr val="FFFFFF"/>
+          </a:solidFill>
+          <a:ln w="19050">
+            <a:solidFill>
+              <a:srgbClr val="E2E8F0"/>
+            </a:solidFill>
+          </a:ln>
+        </p:spPr>
+        <p:style>
+          <a:lnRef idx="1">
+            <a:schemeClr val="accent1"/>
+          </a:lnRef>
+          <a:fillRef idx="3">
+            <a:schemeClr val="accent1"/>
+          </a:fillRef>
+          <a:effectRef idx="2">
+            <a:schemeClr val="accent1"/>
+          </a:effectRef>
+          <a:fontRef idx="minor">
+            <a:schemeClr val="lt1"/>
+          </a:fontRef>
+        </p:style>
+        <p:txBody>
+          <a:bodyPr rtlCol="0" anchor="ctr"/>
+          <a:lstStyle/>
+          <a:p>
+            <a:pPr algn="ctr"/>
+          </a:p>
+        </p:txBody>
+      </p:sp>
+      <p:sp>
+        <p:nvSpPr>
+          <p:cNvPr id="11" name="TextBox 10"/>
+          <p:cNvSpPr txBox="1"/>
+          <p:nvPr/>
+        </p:nvSpPr>
+        <p:spPr>
+          <a:xfrm>
+            <a:off x="6400800" y="4297680"/>
+            <a:ext cx="4846320" cy="1828800"/>
+          </a:xfrm>
+          <a:prstGeom prst="rect">
+            <a:avLst/>
+          </a:prstGeom>
+          <a:noFill/>
+        </p:spPr>
+        <p:txBody>
+          <a:bodyPr wrap="square">
+            <a:spAutoFit/>
+          </a:bodyPr>
+          <a:lstStyle/>
+          <a:p>
+            <a:pPr>
+              <a:spcAft>
+                <a:spcPts val="1000"/>
+              </a:spcAft>
+              <a:defRPr sz="1600" b="1">
+                <a:solidFill>
+                  <a:srgbClr val="0F172A"/>
+                </a:solidFill>
+                <a:latin typeface="Arial"/>
+              </a:defRPr>
+            </a:pPr>
+            <a:r>
+              <a:t>📈 Analytics &amp; Data Export</a:t>
             </a:r>
           </a:p>
           <a:p>
@@ -5857,7 +5957,7 @@
               </a:defRPr>
             </a:pPr>
             <a:r>
-              <a:t>•  Copy response button &amp; code highlight.</a:t>
+              <a:t>•  Chart.js ticket status doughnut graph.</a:t>
             </a:r>
           </a:p>
           <a:p>
@@ -5873,7 +5973,7 @@
               </a:defRPr>
             </a:pPr>
             <a:r>
-              <a:t>•  Fully responsive on mobile &amp; desktop.</a:t>
+              <a:t>•  One-click CSV report export (/admin/export/tickets).</a:t>
             </a:r>
           </a:p>
         </p:txBody>
@@ -5887,7 +5987,7 @@
 </file>
 
 <file path=ppt/slides/slide12.xml><?xml version="1.0" encoding="utf-8"?>
-<p:sld xmlns:a="http://schemas.openxmlformats.org/drawingml/2006/main" xmlns:r="http://schemas.openxmlformats.org/officeDocument/2006/relationships" xmlns:p="http://schemas.openxmlformats.org/presentationml/2006/main">
+<p:sld xmlns:a="http://schemas.openxmlformats.org/drawingml/2006/main" xmlns:p="http://schemas.openxmlformats.org/presentationml/2006/main" xmlns:r="http://schemas.openxmlformats.org/officeDocument/2006/relationships">
   <p:cSld>
     <p:bg>
       <p:bgPr>
@@ -5903,14 +6003,7 @@
         <p:cNvGrpSpPr/>
         <p:nvPr/>
       </p:nvGrpSpPr>
-      <p:grpSpPr>
-        <a:xfrm>
-          <a:off x="0" y="0"/>
-          <a:ext cx="0" cy="0"/>
-          <a:chOff x="0" y="0"/>
-          <a:chExt cx="0" cy="0"/>
-        </a:xfrm>
-      </p:grpSpPr>
+      <p:grpSpPr/>
       <p:sp>
         <p:nvSpPr>
           <p:cNvPr id="2" name="TextBox 1"/>
@@ -5942,7 +6035,7 @@
               </a:defRPr>
             </a:pPr>
             <a:r>
-              <a:t>AI-POWERED CUSTOMER SUPPORT PLATFORM</a:t>
+              <a:t>AI CUSTOMER SUPPORT &amp; TICKET MANAGEMENT SYSTEM</a:t>
             </a:r>
           </a:p>
         </p:txBody>
@@ -5978,7 +6071,7 @@
               </a:defRPr>
             </a:pPr>
             <a:r>
-              <a:t>Admin Console &amp; Operations Module</a:t>
+              <a:t>Tools &amp; Technology Stack</a:t>
             </a:r>
           </a:p>
         </p:txBody>
@@ -5992,7 +6085,7 @@
         <p:spPr>
           <a:xfrm>
             <a:off x="731520" y="1645920"/>
-            <a:ext cx="3291840" cy="4572000"/>
+            <a:ext cx="5120640" cy="2194560"/>
           </a:xfrm>
           <a:prstGeom prst="roundRect">
             <a:avLst/>
@@ -6025,7 +6118,6 @@
           <a:lstStyle/>
           <a:p>
             <a:pPr algn="ctr"/>
-            <a:endParaRPr/>
           </a:p>
         </p:txBody>
       </p:sp>
@@ -6038,7 +6130,7 @@
         <p:spPr>
           <a:xfrm>
             <a:off x="914400" y="1828800"/>
-            <a:ext cx="2926080" cy="4206240"/>
+            <a:ext cx="4754880" cy="1828800"/>
           </a:xfrm>
           <a:prstGeom prst="rect">
             <a:avLst/>
@@ -6063,7 +6155,7 @@
               </a:defRPr>
             </a:pPr>
             <a:r>
-              <a:t>⚙️ Authentication &amp; Dashboard</a:t>
+              <a:t>🐍 Backend &amp; ORM</a:t>
             </a:r>
           </a:p>
           <a:p>
@@ -6079,7 +6171,7 @@
               </a:defRPr>
             </a:pPr>
             <a:r>
-              <a:t>•  Flask-Login protected access (/admin/login).</a:t>
+              <a:t>•  Python 3.12</a:t>
             </a:r>
           </a:p>
           <a:p>
@@ -6095,7 +6187,7 @@
               </a:defRPr>
             </a:pPr>
             <a:r>
-              <a:t>•  Seeded credentials (admin@example.com).</a:t>
+              <a:t>•  Flask Framework</a:t>
             </a:r>
           </a:p>
           <a:p>
@@ -6111,7 +6203,7 @@
               </a:defRPr>
             </a:pPr>
             <a:r>
-              <a:t>•  Stat cards: Total, Open, Closed Tickets, AI Conversations, Messages.</a:t>
+              <a:t>•  Flask-SQLAlchemy</a:t>
             </a:r>
           </a:p>
           <a:p>
@@ -6127,7 +6219,23 @@
               </a:defRPr>
             </a:pPr>
             <a:r>
-              <a:t>•  Recent ticket queue overview.</a:t>
+              <a:t>•  Flask-Login</a:t>
+            </a:r>
+          </a:p>
+          <a:p>
+            <a:pPr>
+              <a:spcAft>
+                <a:spcPts val="600"/>
+              </a:spcAft>
+              <a:defRPr sz="1300">
+                <a:solidFill>
+                  <a:srgbClr val="1E293B"/>
+                </a:solidFill>
+                <a:latin typeface="Arial"/>
+              </a:defRPr>
+            </a:pPr>
+            <a:r>
+              <a:t>•  Gunicorn WSGI</a:t>
             </a:r>
           </a:p>
         </p:txBody>
@@ -6140,8 +6248,8 @@
         </p:nvSpPr>
         <p:spPr>
           <a:xfrm>
-            <a:off x="4389120" y="1645920"/>
-            <a:ext cx="3291840" cy="4572000"/>
+            <a:off x="6126480" y="1645920"/>
+            <a:ext cx="5120640" cy="2194560"/>
           </a:xfrm>
           <a:prstGeom prst="roundRect">
             <a:avLst/>
@@ -6174,7 +6282,6 @@
           <a:lstStyle/>
           <a:p>
             <a:pPr algn="ctr"/>
-            <a:endParaRPr/>
           </a:p>
         </p:txBody>
       </p:sp>
@@ -6186,8 +6293,8 @@
         </p:nvSpPr>
         <p:spPr>
           <a:xfrm>
-            <a:off x="4572000" y="1828800"/>
-            <a:ext cx="2926080" cy="4206240"/>
+            <a:off x="6309360" y="1828800"/>
+            <a:ext cx="4754880" cy="1828800"/>
           </a:xfrm>
           <a:prstGeom prst="rect">
             <a:avLst/>
@@ -6212,7 +6319,7 @@
               </a:defRPr>
             </a:pPr>
             <a:r>
-              <a:t>📋 Ticket &amp; FAQ Management</a:t>
+              <a:t>🎨 Frontend Technologies</a:t>
             </a:r>
           </a:p>
           <a:p>
@@ -6228,7 +6335,7 @@
               </a:defRPr>
             </a:pPr>
             <a:r>
-              <a:t>•  Search, filter by status, view details.</a:t>
+              <a:t>•  HTML5 &amp; CSS3</a:t>
             </a:r>
           </a:p>
           <a:p>
@@ -6244,7 +6351,7 @@
               </a:defRPr>
             </a:pPr>
             <a:r>
-              <a:t>•  Post admin replies &amp; update ticket status.</a:t>
+              <a:t>•  Bootstrap 5</a:t>
             </a:r>
           </a:p>
           <a:p>
@@ -6260,7 +6367,7 @@
               </a:defRPr>
             </a:pPr>
             <a:r>
-              <a:t>•  Delete resolved or spam tickets.</a:t>
+              <a:t>•  Vanilla JavaScript</a:t>
             </a:r>
           </a:p>
           <a:p>
@@ -6276,7 +6383,23 @@
               </a:defRPr>
             </a:pPr>
             <a:r>
-              <a:t>•  Publish, edit, and delete Knowledge Base FAQs.</a:t>
+              <a:t>•  Marked.js Markdown</a:t>
+            </a:r>
+          </a:p>
+          <a:p>
+            <a:pPr>
+              <a:spcAft>
+                <a:spcPts val="600"/>
+              </a:spcAft>
+              <a:defRPr sz="1300">
+                <a:solidFill>
+                  <a:srgbClr val="1E293B"/>
+                </a:solidFill>
+                <a:latin typeface="Arial"/>
+              </a:defRPr>
+            </a:pPr>
+            <a:r>
+              <a:t>•  Jinja2 Templating</a:t>
             </a:r>
           </a:p>
         </p:txBody>
@@ -6289,8 +6412,8 @@
         </p:nvSpPr>
         <p:spPr>
           <a:xfrm>
-            <a:off x="8046720" y="1645920"/>
-            <a:ext cx="3383280" cy="4572000"/>
+            <a:off x="731520" y="4023360"/>
+            <a:ext cx="5120640" cy="2194560"/>
           </a:xfrm>
           <a:prstGeom prst="roundRect">
             <a:avLst/>
@@ -6323,7 +6446,6 @@
           <a:lstStyle/>
           <a:p>
             <a:pPr algn="ctr"/>
-            <a:endParaRPr/>
           </a:p>
         </p:txBody>
       </p:sp>
@@ -6335,8 +6457,8 @@
         </p:nvSpPr>
         <p:spPr>
           <a:xfrm>
-            <a:off x="8229600" y="1828800"/>
-            <a:ext cx="3017520" cy="4206240"/>
+            <a:off x="914400" y="4206240"/>
+            <a:ext cx="4754880" cy="1828800"/>
           </a:xfrm>
           <a:prstGeom prst="rect">
             <a:avLst/>
@@ -6361,7 +6483,7 @@
               </a:defRPr>
             </a:pPr>
             <a:r>
-              <a:t>📊 Analytics &amp; Data Export</a:t>
+              <a:t>💾 Databases</a:t>
             </a:r>
           </a:p>
           <a:p>
@@ -6377,7 +6499,7 @@
               </a:defRPr>
             </a:pPr>
             <a:r>
-              <a:t>•  Chart.js ticket status doughnut graph.</a:t>
+              <a:t>•  SQLite (Development)</a:t>
             </a:r>
           </a:p>
           <a:p>
@@ -6393,7 +6515,7 @@
               </a:defRPr>
             </a:pPr>
             <a:r>
-              <a:t>•  Category distribution bar chart.</a:t>
+              <a:t>•  PostgreSQL (Production)</a:t>
             </a:r>
           </a:p>
           <a:p>
@@ -6409,7 +6531,7 @@
               </a:defRPr>
             </a:pPr>
             <a:r>
-              <a:t>•  7-day chat activity timeline.</a:t>
+              <a:t>•  Zero-Migration Setup</a:t>
             </a:r>
           </a:p>
           <a:p>
@@ -6425,7 +6547,155 @@
               </a:defRPr>
             </a:pPr>
             <a:r>
-              <a:t>•  One-click CSV report exporter (/admin/export/tickets).</a:t>
+              <a:t>•  db.create_all() Auto Schema</a:t>
+            </a:r>
+          </a:p>
+        </p:txBody>
+      </p:sp>
+      <p:sp>
+        <p:nvSpPr>
+          <p:cNvPr id="10" name="Rounded Rectangle 9"/>
+          <p:cNvSpPr/>
+          <p:nvPr/>
+        </p:nvSpPr>
+        <p:spPr>
+          <a:xfrm>
+            <a:off x="6126480" y="4023360"/>
+            <a:ext cx="5120640" cy="2194560"/>
+          </a:xfrm>
+          <a:prstGeom prst="roundRect">
+            <a:avLst/>
+          </a:prstGeom>
+          <a:solidFill>
+            <a:srgbClr val="FFFFFF"/>
+          </a:solidFill>
+          <a:ln w="19050">
+            <a:solidFill>
+              <a:srgbClr val="E2E8F0"/>
+            </a:solidFill>
+          </a:ln>
+        </p:spPr>
+        <p:style>
+          <a:lnRef idx="1">
+            <a:schemeClr val="accent1"/>
+          </a:lnRef>
+          <a:fillRef idx="3">
+            <a:schemeClr val="accent1"/>
+          </a:fillRef>
+          <a:effectRef idx="2">
+            <a:schemeClr val="accent1"/>
+          </a:effectRef>
+          <a:fontRef idx="minor">
+            <a:schemeClr val="lt1"/>
+          </a:fontRef>
+        </p:style>
+        <p:txBody>
+          <a:bodyPr rtlCol="0" anchor="ctr"/>
+          <a:lstStyle/>
+          <a:p>
+            <a:pPr algn="ctr"/>
+          </a:p>
+        </p:txBody>
+      </p:sp>
+      <p:sp>
+        <p:nvSpPr>
+          <p:cNvPr id="11" name="TextBox 10"/>
+          <p:cNvSpPr txBox="1"/>
+          <p:nvPr/>
+        </p:nvSpPr>
+        <p:spPr>
+          <a:xfrm>
+            <a:off x="6309360" y="4206240"/>
+            <a:ext cx="4754880" cy="1828800"/>
+          </a:xfrm>
+          <a:prstGeom prst="rect">
+            <a:avLst/>
+          </a:prstGeom>
+          <a:noFill/>
+        </p:spPr>
+        <p:txBody>
+          <a:bodyPr wrap="square">
+            <a:spAutoFit/>
+          </a:bodyPr>
+          <a:lstStyle/>
+          <a:p>
+            <a:pPr>
+              <a:spcAft>
+                <a:spcPts val="1000"/>
+              </a:spcAft>
+              <a:defRPr sz="1600" b="1">
+                <a:solidFill>
+                  <a:srgbClr val="0F172A"/>
+                </a:solidFill>
+                <a:latin typeface="Arial"/>
+              </a:defRPr>
+            </a:pPr>
+            <a:r>
+              <a:t>☁️ Deployment &amp; AI</a:t>
+            </a:r>
+          </a:p>
+          <a:p>
+            <a:pPr>
+              <a:spcAft>
+                <a:spcPts val="600"/>
+              </a:spcAft>
+              <a:defRPr sz="1300">
+                <a:solidFill>
+                  <a:srgbClr val="1E293B"/>
+                </a:solidFill>
+                <a:latin typeface="Arial"/>
+              </a:defRPr>
+            </a:pPr>
+            <a:r>
+              <a:t>•  OpenAI-compatible API</a:t>
+            </a:r>
+          </a:p>
+          <a:p>
+            <a:pPr>
+              <a:spcAft>
+                <a:spcPts val="600"/>
+              </a:spcAft>
+              <a:defRPr sz="1300">
+                <a:solidFill>
+                  <a:srgbClr val="1E293B"/>
+                </a:solidFill>
+                <a:latin typeface="Arial"/>
+              </a:defRPr>
+            </a:pPr>
+            <a:r>
+              <a:t>•  Gemini / Ollama</a:t>
+            </a:r>
+          </a:p>
+          <a:p>
+            <a:pPr>
+              <a:spcAft>
+                <a:spcPts val="600"/>
+              </a:spcAft>
+              <a:defRPr sz="1300">
+                <a:solidFill>
+                  <a:srgbClr val="1E293B"/>
+                </a:solidFill>
+                <a:latin typeface="Arial"/>
+              </a:defRPr>
+            </a:pPr>
+            <a:r>
+              <a:t>•  GitHub Repository</a:t>
+            </a:r>
+          </a:p>
+          <a:p>
+            <a:pPr>
+              <a:spcAft>
+                <a:spcPts val="600"/>
+              </a:spcAft>
+              <a:defRPr sz="1300">
+                <a:solidFill>
+                  <a:srgbClr val="1E293B"/>
+                </a:solidFill>
+                <a:latin typeface="Arial"/>
+              </a:defRPr>
+            </a:pPr>
+            <a:r>
+              <a:t>•  Render Cloud Platform</a:t>
             </a:r>
           </a:p>
         </p:txBody>
@@ -6439,7 +6709,7 @@
 </file>
 
 <file path=ppt/slides/slide13.xml><?xml version="1.0" encoding="utf-8"?>
-<p:sld xmlns:a="http://schemas.openxmlformats.org/drawingml/2006/main" xmlns:r="http://schemas.openxmlformats.org/officeDocument/2006/relationships" xmlns:p="http://schemas.openxmlformats.org/presentationml/2006/main">
+<p:sld xmlns:a="http://schemas.openxmlformats.org/drawingml/2006/main" xmlns:p="http://schemas.openxmlformats.org/presentationml/2006/main" xmlns:r="http://schemas.openxmlformats.org/officeDocument/2006/relationships">
   <p:cSld>
     <p:bg>
       <p:bgPr>
@@ -6455,14 +6725,7 @@
         <p:cNvGrpSpPr/>
         <p:nvPr/>
       </p:nvGrpSpPr>
-      <p:grpSpPr>
-        <a:xfrm>
-          <a:off x="0" y="0"/>
-          <a:ext cx="0" cy="0"/>
-          <a:chOff x="0" y="0"/>
-          <a:chExt cx="0" cy="0"/>
-        </a:xfrm>
-      </p:grpSpPr>
+      <p:grpSpPr/>
       <p:sp>
         <p:nvSpPr>
           <p:cNvPr id="2" name="TextBox 1"/>
@@ -6494,7 +6757,7 @@
               </a:defRPr>
             </a:pPr>
             <a:r>
-              <a:t>AI-POWERED CUSTOMER SUPPORT PLATFORM</a:t>
+              <a:t>AI CUSTOMER SUPPORT &amp; TICKET MANAGEMENT SYSTEM</a:t>
             </a:r>
           </a:p>
         </p:txBody>
@@ -6530,7 +6793,7 @@
               </a:defRPr>
             </a:pPr>
             <a:r>
-              <a:t>Core Application Features Summary</a:t>
+              <a:t>Technical Challenges &amp; Solutions</a:t>
             </a:r>
           </a:p>
         </p:txBody>
@@ -6577,7 +6840,6 @@
           <a:lstStyle/>
           <a:p>
             <a:pPr algn="ctr"/>
-            <a:endParaRPr/>
           </a:p>
         </p:txBody>
       </p:sp>
@@ -6615,7 +6877,7 @@
               </a:defRPr>
             </a:pPr>
             <a:r>
-              <a:t>⚡ Real-Time AI Response</a:t>
+              <a:t>🛠️ Render Deployment &amp; AppImportError</a:t>
             </a:r>
           </a:p>
           <a:p>
@@ -6631,7 +6893,7 @@
               </a:defRPr>
             </a:pPr>
             <a:r>
-              <a:t>•  Markdown formatting for code and tables.</a:t>
+              <a:t>•  Issue: Gunicorn could not locate Flask app instance.</a:t>
             </a:r>
           </a:p>
           <a:p>
@@ -6647,7 +6909,7 @@
               </a:defRPr>
             </a:pPr>
             <a:r>
-              <a:t>•  Context memory across chat session.</a:t>
+              <a:t>•  Solution: Explicitly exposed app = create_app() in app/__init__.py.</a:t>
             </a:r>
           </a:p>
         </p:txBody>
@@ -6694,7 +6956,6 @@
           <a:lstStyle/>
           <a:p>
             <a:pPr algn="ctr"/>
-            <a:endParaRPr/>
           </a:p>
         </p:txBody>
       </p:sp>
@@ -6732,7 +6993,7 @@
               </a:defRPr>
             </a:pPr>
             <a:r>
-              <a:t>🎫 Automated Ticket Creation</a:t>
+              <a:t>💾 Database Migration &amp; Schema Mismatch</a:t>
             </a:r>
           </a:p>
           <a:p>
@@ -6748,7 +7009,7 @@
               </a:defRPr>
             </a:pPr>
             <a:r>
-              <a:t>•  Unique Ticket ID generation (TICK-XXXXXXXX).</a:t>
+              <a:t>•  Issue: Flask-Migrate revision mismatches during cloud deploy.</a:t>
             </a:r>
           </a:p>
           <a:p>
@@ -6764,7 +7025,7 @@
               </a:defRPr>
             </a:pPr>
             <a:r>
-              <a:t>•  Direct database storage with email alerts.</a:t>
+              <a:t>•  Solution: Replaced Alembic with zero-migration db.create_all().</a:t>
             </a:r>
           </a:p>
         </p:txBody>
@@ -6811,7 +7072,6 @@
           <a:lstStyle/>
           <a:p>
             <a:pPr algn="ctr"/>
-            <a:endParaRPr/>
           </a:p>
         </p:txBody>
       </p:sp>
@@ -6849,7 +7109,7 @@
               </a:defRPr>
             </a:pPr>
             <a:r>
-              <a:t>💎 Glassmorphism UI &amp; Dark Mode</a:t>
+              <a:t>🔌 API Integration &amp; Local Fallbacks</a:t>
             </a:r>
           </a:p>
           <a:p>
@@ -6865,7 +7125,7 @@
               </a:defRPr>
             </a:pPr>
             <a:r>
-              <a:t>•  Modern Bootstrap 5 aesthetic.</a:t>
+              <a:t>•  Issue: Intermittent external LLM rate limits.</a:t>
             </a:r>
           </a:p>
           <a:p>
@@ -6881,7 +7141,7 @@
               </a:defRPr>
             </a:pPr>
             <a:r>
-              <a:t>•  Responsive layout optimized for mobile.</a:t>
+              <a:t>•  Solution: Built pre-LLM RAG KB search and intelligent local simulator.</a:t>
             </a:r>
           </a:p>
         </p:txBody>
@@ -6928,7 +7188,6 @@
           <a:lstStyle/>
           <a:p>
             <a:pPr algn="ctr"/>
-            <a:endParaRPr/>
           </a:p>
         </p:txBody>
       </p:sp>
@@ -6966,7 +7225,7 @@
               </a:defRPr>
             </a:pPr>
             <a:r>
-              <a:t>📈 Data Export &amp; Analytics</a:t>
+              <a:t>⚡ UI UX &amp; Performance Optimization</a:t>
             </a:r>
           </a:p>
           <a:p>
@@ -6982,7 +7241,7 @@
               </a:defRPr>
             </a:pPr>
             <a:r>
-              <a:t>•  Interactive Chart.js status graphs.</a:t>
+              <a:t>•  Issue: Streaming chat rendering and mobile responsiveness.</a:t>
             </a:r>
           </a:p>
           <a:p>
@@ -6998,7 +7257,7 @@
               </a:defRPr>
             </a:pPr>
             <a:r>
-              <a:t>•  One-click CSV ticket report download.</a:t>
+              <a:t>•  Solution: Implemented Bootstrap 5 glassmorphism and Marked.js.</a:t>
             </a:r>
           </a:p>
         </p:txBody>
@@ -7012,7 +7271,7 @@
 </file>
 
 <file path=ppt/slides/slide14.xml><?xml version="1.0" encoding="utf-8"?>
-<p:sld xmlns:a="http://schemas.openxmlformats.org/drawingml/2006/main" xmlns:r="http://schemas.openxmlformats.org/officeDocument/2006/relationships" xmlns:p="http://schemas.openxmlformats.org/presentationml/2006/main">
+<p:sld xmlns:a="http://schemas.openxmlformats.org/drawingml/2006/main" xmlns:p="http://schemas.openxmlformats.org/presentationml/2006/main" xmlns:r="http://schemas.openxmlformats.org/officeDocument/2006/relationships">
   <p:cSld>
     <p:bg>
       <p:bgPr>
@@ -7028,14 +7287,7 @@
         <p:cNvGrpSpPr/>
         <p:nvPr/>
       </p:nvGrpSpPr>
-      <p:grpSpPr>
-        <a:xfrm>
-          <a:off x="0" y="0"/>
-          <a:ext cx="0" cy="0"/>
-          <a:chOff x="0" y="0"/>
-          <a:chExt cx="0" cy="0"/>
-        </a:xfrm>
-      </p:grpSpPr>
+      <p:grpSpPr/>
       <p:sp>
         <p:nvSpPr>
           <p:cNvPr id="2" name="TextBox 1"/>
@@ -7067,7 +7319,7 @@
               </a:defRPr>
             </a:pPr>
             <a:r>
-              <a:t>AI-POWERED CUSTOMER SUPPORT PLATFORM</a:t>
+              <a:t>AI CUSTOMER SUPPORT &amp; TICKET MANAGEMENT SYSTEM</a:t>
             </a:r>
           </a:p>
         </p:txBody>
@@ -7103,7 +7355,7 @@
               </a:defRPr>
             </a:pPr>
             <a:r>
-              <a:t>Key Advantages &amp; Business Benefits</a:t>
+              <a:t>Results &amp; Project Outcomes</a:t>
             </a:r>
           </a:p>
         </p:txBody>
@@ -7150,7 +7402,6 @@
           <a:lstStyle/>
           <a:p>
             <a:pPr algn="ctr"/>
-            <a:endParaRPr/>
           </a:p>
         </p:txBody>
       </p:sp>
@@ -7188,7 +7439,7 @@
               </a:defRPr>
             </a:pPr>
             <a:r>
-              <a:t>🚪 Zero Friction User Access</a:t>
+              <a:t>⚡ Reduced Response Time</a:t>
             </a:r>
           </a:p>
           <a:p>
@@ -7204,7 +7455,7 @@
               </a:defRPr>
             </a:pPr>
             <a:r>
-              <a:t>•  No mandatory login screen.</a:t>
+              <a:t>•  Queries resolved in &lt; 2 seconds.</a:t>
             </a:r>
           </a:p>
           <a:p>
@@ -7220,7 +7471,7 @@
               </a:defRPr>
             </a:pPr>
             <a:r>
-              <a:t>•  Instant access to support on homepage.</a:t>
+              <a:t>•  Eliminated 24-48 hour email delays.</a:t>
             </a:r>
           </a:p>
           <a:p>
@@ -7236,7 +7487,7 @@
               </a:defRPr>
             </a:pPr>
             <a:r>
-              <a:t>•  Drastically reduces visitor bounce rates.</a:t>
+              <a:t>•  Instant guest access without login.</a:t>
             </a:r>
           </a:p>
         </p:txBody>
@@ -7283,7 +7534,6 @@
           <a:lstStyle/>
           <a:p>
             <a:pPr algn="ctr"/>
-            <a:endParaRPr/>
           </a:p>
         </p:txBody>
       </p:sp>
@@ -7321,7 +7571,7 @@
               </a:defRPr>
             </a:pPr>
             <a:r>
-              <a:t>💰 Cost &amp; Operational Efficiency</a:t>
+              <a:t>📈 Improved Operational Efficiency</a:t>
             </a:r>
           </a:p>
           <a:p>
@@ -7337,7 +7587,7 @@
               </a:defRPr>
             </a:pPr>
             <a:r>
-              <a:t>•  Automates up to 80% of routine questions.</a:t>
+              <a:t>•  Automates 80% of routine questions.</a:t>
             </a:r>
           </a:p>
           <a:p>
@@ -7353,7 +7603,7 @@
               </a:defRPr>
             </a:pPr>
             <a:r>
-              <a:t>•  Reduces human support workload.</a:t>
+              <a:t>•  Seamless ticket escalation for low confidence.</a:t>
             </a:r>
           </a:p>
           <a:p>
@@ -7369,7 +7619,7 @@
               </a:defRPr>
             </a:pPr>
             <a:r>
-              <a:t>•  Saves infrastructure &amp; API costs with RAG search.</a:t>
+              <a:t>•  Saves human agent workload.</a:t>
             </a:r>
           </a:p>
         </p:txBody>
@@ -7416,7 +7666,6 @@
           <a:lstStyle/>
           <a:p>
             <a:pPr algn="ctr"/>
-            <a:endParaRPr/>
           </a:p>
         </p:txBody>
       </p:sp>
@@ -7454,7 +7703,7 @@
               </a:defRPr>
             </a:pPr>
             <a:r>
-              <a:t>⚡ Zero-Migration Simplicity</a:t>
+              <a:t>🎯 Simplified Management Process</a:t>
             </a:r>
           </a:p>
           <a:p>
@@ -7470,7 +7719,7 @@
               </a:defRPr>
             </a:pPr>
             <a:r>
-              <a:t>•  db.create_all() auto schema creation.</a:t>
+              <a:t>•  Centralized Admin Dashboard.</a:t>
             </a:r>
           </a:p>
           <a:p>
@@ -7486,7 +7735,7 @@
               </a:defRPr>
             </a:pPr>
             <a:r>
-              <a:t>•  Works cleanly with SQLite &amp; PostgreSQL.</a:t>
+              <a:t>•  Real-time Chart.js analytics.</a:t>
             </a:r>
           </a:p>
           <a:p>
@@ -7502,7 +7751,7 @@
               </a:defRPr>
             </a:pPr>
             <a:r>
-              <a:t>•  100% production-ready Gunicorn deployment.</a:t>
+              <a:t>•  One-click CSV report exporter.</a:t>
             </a:r>
           </a:p>
         </p:txBody>
@@ -7516,7 +7765,7 @@
 </file>
 
 <file path=ppt/slides/slide15.xml><?xml version="1.0" encoding="utf-8"?>
-<p:sld xmlns:a="http://schemas.openxmlformats.org/drawingml/2006/main" xmlns:r="http://schemas.openxmlformats.org/officeDocument/2006/relationships" xmlns:p="http://schemas.openxmlformats.org/presentationml/2006/main">
+<p:sld xmlns:a="http://schemas.openxmlformats.org/drawingml/2006/main" xmlns:p="http://schemas.openxmlformats.org/presentationml/2006/main" xmlns:r="http://schemas.openxmlformats.org/officeDocument/2006/relationships">
   <p:cSld>
     <p:bg>
       <p:bgPr>
@@ -7532,14 +7781,7 @@
         <p:cNvGrpSpPr/>
         <p:nvPr/>
       </p:nvGrpSpPr>
-      <p:grpSpPr>
-        <a:xfrm>
-          <a:off x="0" y="0"/>
-          <a:ext cx="0" cy="0"/>
-          <a:chOff x="0" y="0"/>
-          <a:chExt cx="0" cy="0"/>
-        </a:xfrm>
-      </p:grpSpPr>
+      <p:grpSpPr/>
       <p:sp>
         <p:nvSpPr>
           <p:cNvPr id="2" name="TextBox 1"/>
@@ -7571,7 +7813,7 @@
               </a:defRPr>
             </a:pPr>
             <a:r>
-              <a:t>AI-POWERED CUSTOMER SUPPORT PLATFORM</a:t>
+              <a:t>AI CUSTOMER SUPPORT &amp; TICKET MANAGEMENT SYSTEM</a:t>
             </a:r>
           </a:p>
         </p:txBody>
@@ -7607,7 +7849,7 @@
               </a:defRPr>
             </a:pPr>
             <a:r>
-              <a:t>Future System Enhancements &amp; Scope</a:t>
+              <a:t>Future Enhancements &amp; Roadmap</a:t>
             </a:r>
           </a:p>
         </p:txBody>
@@ -7654,7 +7896,6 @@
           <a:lstStyle/>
           <a:p>
             <a:pPr algn="ctr"/>
-            <a:endParaRPr/>
           </a:p>
         </p:txBody>
       </p:sp>
@@ -7692,7 +7933,7 @@
               </a:defRPr>
             </a:pPr>
             <a:r>
-              <a:t>🎙️ Voice &amp; Multi-Modal Input</a:t>
+              <a:t>🎙️ Voice Support &amp; Audio Input</a:t>
             </a:r>
           </a:p>
           <a:p>
@@ -7708,7 +7949,7 @@
               </a:defRPr>
             </a:pPr>
             <a:r>
-              <a:t>•  Integrate Speech-to-Text for real-time voice support.</a:t>
+              <a:t>•  Integrate Speech-to-Text for real-time voice interactions.</a:t>
             </a:r>
           </a:p>
           <a:p>
@@ -7724,7 +7965,7 @@
               </a:defRPr>
             </a:pPr>
             <a:r>
-              <a:t>•  Support image &amp; document attachment analysis.</a:t>
+              <a:t>•  Support audio message processing.</a:t>
             </a:r>
           </a:p>
         </p:txBody>
@@ -7771,7 +8012,6 @@
           <a:lstStyle/>
           <a:p>
             <a:pPr algn="ctr"/>
-            <a:endParaRPr/>
           </a:p>
         </p:txBody>
       </p:sp>
@@ -7809,7 +8049,7 @@
               </a:defRPr>
             </a:pPr>
             <a:r>
-              <a:t>🌐 Multi-Language &amp; Localization</a:t>
+              <a:t>🌐 Multiple Language Support</a:t>
             </a:r>
           </a:p>
           <a:p>
@@ -7825,7 +8065,7 @@
               </a:defRPr>
             </a:pPr>
             <a:r>
-              <a:t>•  Implement automatic language translation for international users.</a:t>
+              <a:t>•  Implement automatic language translation for global users.</a:t>
             </a:r>
           </a:p>
           <a:p>
@@ -7888,7 +8128,6 @@
           <a:lstStyle/>
           <a:p>
             <a:pPr algn="ctr"/>
-            <a:endParaRPr/>
           </a:p>
         </p:txBody>
       </p:sp>
@@ -7942,7 +8181,7 @@
               </a:defRPr>
             </a:pPr>
             <a:r>
-              <a:t>•  Develop native Android (Kotlin) and iOS (Swift) apps.</a:t>
+              <a:t>•  Develop native Android and iOS mobile applications.</a:t>
             </a:r>
           </a:p>
           <a:p>
@@ -8005,7 +8244,6 @@
           <a:lstStyle/>
           <a:p>
             <a:pPr algn="ctr"/>
-            <a:endParaRPr/>
           </a:p>
         </p:txBody>
       </p:sp>
@@ -8043,7 +8281,7 @@
               </a:defRPr>
             </a:pPr>
             <a:r>
-              <a:t>🔮 Predictive Analytics &amp; Sentiment AI</a:t>
+              <a:t>🔮 Advanced Analytics &amp; AI Capabilities</a:t>
             </a:r>
           </a:p>
           <a:p>
@@ -8059,7 +8297,7 @@
               </a:defRPr>
             </a:pPr>
             <a:r>
-              <a:t>•  ML model predicting potential customer churn.</a:t>
+              <a:t>•  Predictive churn analysis and SLA breach warnings.</a:t>
             </a:r>
           </a:p>
           <a:p>
@@ -8075,7 +8313,7 @@
               </a:defRPr>
             </a:pPr>
             <a:r>
-              <a:t>•  Automated SLA breach warning triggers.</a:t>
+              <a:t>•  Enhanced fine-tuned domain LLMs.</a:t>
             </a:r>
           </a:p>
         </p:txBody>
@@ -8089,7 +8327,7 @@
 </file>
 
 <file path=ppt/slides/slide16.xml><?xml version="1.0" encoding="utf-8"?>
-<p:sld xmlns:a="http://schemas.openxmlformats.org/drawingml/2006/main" xmlns:r="http://schemas.openxmlformats.org/officeDocument/2006/relationships" xmlns:p="http://schemas.openxmlformats.org/presentationml/2006/main">
+<p:sld xmlns:a="http://schemas.openxmlformats.org/drawingml/2006/main" xmlns:p="http://schemas.openxmlformats.org/presentationml/2006/main" xmlns:r="http://schemas.openxmlformats.org/officeDocument/2006/relationships">
   <p:cSld>
     <p:bg>
       <p:bgPr>
@@ -8105,14 +8343,7 @@
         <p:cNvGrpSpPr/>
         <p:nvPr/>
       </p:nvGrpSpPr>
-      <p:grpSpPr>
-        <a:xfrm>
-          <a:off x="0" y="0"/>
-          <a:ext cx="0" cy="0"/>
-          <a:chOff x="0" y="0"/>
-          <a:chExt cx="0" cy="0"/>
-        </a:xfrm>
-      </p:grpSpPr>
+      <p:grpSpPr/>
       <p:sp>
         <p:nvSpPr>
           <p:cNvPr id="2" name="TextBox 1"/>
@@ -8144,7 +8375,7 @@
               </a:defRPr>
             </a:pPr>
             <a:r>
-              <a:t>AI-POWERED CUSTOMER SUPPORT PLATFORM</a:t>
+              <a:t>AI CUSTOMER SUPPORT &amp; TICKET MANAGEMENT SYSTEM</a:t>
             </a:r>
           </a:p>
         </p:txBody>
@@ -8227,7 +8458,6 @@
           <a:lstStyle/>
           <a:p>
             <a:pPr algn="ctr"/>
-            <a:endParaRPr/>
           </a:p>
         </p:txBody>
       </p:sp>
@@ -8265,7 +8495,7 @@
               </a:defRPr>
             </a:pPr>
             <a:r>
-              <a:t>🎯 Project Impact Summary</a:t>
+              <a:t>🎯 Project Summary</a:t>
             </a:r>
           </a:p>
           <a:p>
@@ -8359,7 +8589,7 @@
 </file>
 
 <file path=ppt/slides/slide17.xml><?xml version="1.0" encoding="utf-8"?>
-<p:sld xmlns:a="http://schemas.openxmlformats.org/drawingml/2006/main" xmlns:r="http://schemas.openxmlformats.org/officeDocument/2006/relationships" xmlns:p="http://schemas.openxmlformats.org/presentationml/2006/main">
+<p:sld xmlns:a="http://schemas.openxmlformats.org/drawingml/2006/main" xmlns:p="http://schemas.openxmlformats.org/presentationml/2006/main" xmlns:r="http://schemas.openxmlformats.org/officeDocument/2006/relationships">
   <p:cSld>
     <p:bg>
       <p:bgPr>
@@ -8375,14 +8605,7 @@
         <p:cNvGrpSpPr/>
         <p:nvPr/>
       </p:nvGrpSpPr>
-      <p:grpSpPr>
-        <a:xfrm>
-          <a:off x="0" y="0"/>
-          <a:ext cx="0" cy="0"/>
-          <a:chOff x="0" y="0"/>
-          <a:chExt cx="0" cy="0"/>
-        </a:xfrm>
-      </p:grpSpPr>
+      <p:grpSpPr/>
       <p:sp>
         <p:nvSpPr>
           <p:cNvPr id="2" name="TextBox 1"/>
@@ -8391,7 +8614,7 @@
         </p:nvSpPr>
         <p:spPr>
           <a:xfrm>
-            <a:off x="914552" y="3052689"/>
+            <a:off x="914400" y="1645920"/>
             <a:ext cx="10362895" cy="1645920"/>
           </a:xfrm>
           <a:prstGeom prst="rect">
@@ -8413,7 +8636,6 @@
               </a:defRPr>
             </a:pPr>
             <a:r>
-              <a:rPr dirty="0"/>
               <a:t>Thank You!</a:t>
             </a:r>
           </a:p>
@@ -8426,8 +8648,168 @@
               </a:defRPr>
             </a:pPr>
             <a:r>
-              <a:rPr dirty="0"/>
               <a:t>Questions &amp; Answers / Project Review Session</a:t>
+            </a:r>
+          </a:p>
+        </p:txBody>
+      </p:sp>
+      <p:sp>
+        <p:nvSpPr>
+          <p:cNvPr id="3" name="Rounded Rectangle 2"/>
+          <p:cNvSpPr/>
+          <p:nvPr/>
+        </p:nvSpPr>
+        <p:spPr>
+          <a:xfrm>
+            <a:off x="2286000" y="3474720"/>
+            <a:ext cx="7619695" cy="2377440"/>
+          </a:xfrm>
+          <a:prstGeom prst="roundRect">
+            <a:avLst/>
+          </a:prstGeom>
+          <a:solidFill>
+            <a:srgbClr val="1A2B50"/>
+          </a:solidFill>
+          <a:ln>
+            <a:solidFill>
+              <a:srgbClr val="0EA5E9"/>
+            </a:solidFill>
+          </a:ln>
+        </p:spPr>
+        <p:style>
+          <a:lnRef idx="1">
+            <a:schemeClr val="accent1"/>
+          </a:lnRef>
+          <a:fillRef idx="3">
+            <a:schemeClr val="accent1"/>
+          </a:fillRef>
+          <a:effectRef idx="2">
+            <a:schemeClr val="accent1"/>
+          </a:effectRef>
+          <a:fontRef idx="minor">
+            <a:schemeClr val="lt1"/>
+          </a:fontRef>
+        </p:style>
+        <p:txBody>
+          <a:bodyPr rtlCol="0" anchor="ctr"/>
+          <a:lstStyle/>
+          <a:p>
+            <a:pPr algn="ctr"/>
+          </a:p>
+        </p:txBody>
+      </p:sp>
+      <p:sp>
+        <p:nvSpPr>
+          <p:cNvPr id="4" name="TextBox 3"/>
+          <p:cNvSpPr txBox="1"/>
+          <p:nvPr/>
+        </p:nvSpPr>
+        <p:spPr>
+          <a:xfrm>
+            <a:off x="2468880" y="3657600"/>
+            <a:ext cx="7253935" cy="2011680"/>
+          </a:xfrm>
+          <a:prstGeom prst="rect">
+            <a:avLst/>
+          </a:prstGeom>
+          <a:noFill/>
+        </p:spPr>
+        <p:txBody>
+          <a:bodyPr wrap="square">
+            <a:spAutoFit/>
+          </a:bodyPr>
+          <a:lstStyle/>
+          <a:p/>
+          <a:p>
+            <a:pPr algn="ctr">
+              <a:spcAft>
+                <a:spcPts val="400"/>
+              </a:spcAft>
+            </a:pPr>
+            <a:r>
+              <a:rPr b="1" sz="1300">
+                <a:solidFill>
+                  <a:srgbClr val="0EA5E9"/>
+                </a:solidFill>
+              </a:rPr>
+              <a:t>Presenter:         </a:t>
+            </a:r>
+            <a:r>
+              <a:rPr sz="1300">
+                <a:solidFill>
+                  <a:srgbClr val="FFFFFF"/>
+                </a:solidFill>
+              </a:rPr>
+              <a:t>Pamulapati Karthik (Roll No: 22N81A05K2)</a:t>
+            </a:r>
+          </a:p>
+          <a:p>
+            <a:pPr algn="ctr">
+              <a:spcAft>
+                <a:spcPts val="400"/>
+              </a:spcAft>
+            </a:pPr>
+            <a:r>
+              <a:rPr b="1" sz="1300">
+                <a:solidFill>
+                  <a:srgbClr val="0EA5E9"/>
+                </a:solidFill>
+              </a:rPr>
+              <a:t>Department:        </a:t>
+            </a:r>
+            <a:r>
+              <a:rPr sz="1300">
+                <a:solidFill>
+                  <a:srgbClr val="FFFFFF"/>
+                </a:solidFill>
+              </a:rPr>
+              <a:t>Computer Science &amp; Engineering (CSE)</a:t>
+            </a:r>
+          </a:p>
+          <a:p>
+            <a:pPr algn="ctr">
+              <a:spcAft>
+                <a:spcPts val="400"/>
+              </a:spcAft>
+            </a:pPr>
+            <a:r>
+              <a:rPr b="1" sz="1300">
+                <a:solidFill>
+                  <a:srgbClr val="0EA5E9"/>
+                </a:solidFill>
+              </a:rPr>
+              <a:t>College:           </a:t>
+            </a:r>
+            <a:r>
+              <a:rPr sz="1300">
+                <a:solidFill>
+                  <a:srgbClr val="FFFFFF"/>
+                </a:solidFill>
+              </a:rPr>
+              <a:t>Sree Dattha Group of Institutions</a:t>
+            </a:r>
+          </a:p>
+          <a:p>
+            <a:pPr algn="ctr">
+              <a:spcAft>
+                <a:spcPts val="400"/>
+              </a:spcAft>
+            </a:pPr>
+            <a:r>
+              <a:rPr b="1" sz="1300">
+                <a:solidFill>
+                  <a:srgbClr val="0EA5E9"/>
+                </a:solidFill>
+              </a:rPr>
+              <a:t>GitHub Repository: </a:t>
+            </a:r>
+            <a:r>
+              <a:rPr sz="1300">
+                <a:solidFill>
+                  <a:srgbClr val="FFFFFF"/>
+                </a:solidFill>
+              </a:rPr>
+              <a:t>github.com/karthikpamulapti3333-debug/AI-Powered-Customer-Support-Assistant</a:t>
             </a:r>
           </a:p>
         </p:txBody>
@@ -8441,7 +8823,7 @@
 </file>
 
 <file path=ppt/slides/slide2.xml><?xml version="1.0" encoding="utf-8"?>
-<p:sld xmlns:a="http://schemas.openxmlformats.org/drawingml/2006/main" xmlns:r="http://schemas.openxmlformats.org/officeDocument/2006/relationships" xmlns:p="http://schemas.openxmlformats.org/presentationml/2006/main">
+<p:sld xmlns:a="http://schemas.openxmlformats.org/drawingml/2006/main" xmlns:p="http://schemas.openxmlformats.org/presentationml/2006/main" xmlns:r="http://schemas.openxmlformats.org/officeDocument/2006/relationships">
   <p:cSld>
     <p:bg>
       <p:bgPr>
@@ -8457,14 +8839,7 @@
         <p:cNvGrpSpPr/>
         <p:nvPr/>
       </p:nvGrpSpPr>
-      <p:grpSpPr>
-        <a:xfrm>
-          <a:off x="0" y="0"/>
-          <a:ext cx="0" cy="0"/>
-          <a:chOff x="0" y="0"/>
-          <a:chExt cx="0" cy="0"/>
-        </a:xfrm>
-      </p:grpSpPr>
+      <p:grpSpPr/>
       <p:sp>
         <p:nvSpPr>
           <p:cNvPr id="2" name="TextBox 1"/>
@@ -8496,7 +8871,7 @@
               </a:defRPr>
             </a:pPr>
             <a:r>
-              <a:t>AI-POWERED CUSTOMER SUPPORT PLATFORM</a:t>
+              <a:t>AI CUSTOMER SUPPORT &amp; TICKET MANAGEMENT SYSTEM</a:t>
             </a:r>
           </a:p>
         </p:txBody>
@@ -8532,7 +8907,7 @@
               </a:defRPr>
             </a:pPr>
             <a:r>
-              <a:t>Introduction to Modern AI Customer Support</a:t>
+              <a:t>Introduction to AI-Based Customer Support</a:t>
             </a:r>
           </a:p>
         </p:txBody>
@@ -8579,7 +8954,6 @@
           <a:lstStyle/>
           <a:p>
             <a:pPr algn="ctr"/>
-            <a:endParaRPr/>
           </a:p>
         </p:txBody>
       </p:sp>
@@ -8617,7 +8991,7 @@
               </a:defRPr>
             </a:pPr>
             <a:r>
-              <a:t>🌐 Customer Support Overview</a:t>
+              <a:t>🌐 Overview of AI Support</a:t>
             </a:r>
           </a:p>
           <a:p>
@@ -8633,7 +9007,7 @@
               </a:defRPr>
             </a:pPr>
             <a:r>
-              <a:t>•  Customer support is a critical business function that directly drives retention.</a:t>
+              <a:t>•  AI customer support transforms static helpdesks into active 24/7 conversational agents.</a:t>
             </a:r>
           </a:p>
           <a:p>
@@ -8649,7 +9023,7 @@
               </a:defRPr>
             </a:pPr>
             <a:r>
-              <a:t>•  Traditional support relies heavily on phone calls, static emails, and manual queues.</a:t>
+              <a:t>•  Combines Natural Language Processing (NLP) with domain-specific knowledge bases.</a:t>
             </a:r>
           </a:p>
           <a:p>
@@ -8665,7 +9039,7 @@
               </a:defRPr>
             </a:pPr>
             <a:r>
-              <a:t>•  High volume leads to delayed responses and customer dissatisfaction.</a:t>
+              <a:t>•  Delivers instant assistance to website visitors without human intervention.</a:t>
             </a:r>
           </a:p>
         </p:txBody>
@@ -8712,7 +9086,6 @@
           <a:lstStyle/>
           <a:p>
             <a:pPr algn="ctr"/>
-            <a:endParaRPr/>
           </a:p>
         </p:txBody>
       </p:sp>
@@ -8750,7 +9123,7 @@
               </a:defRPr>
             </a:pPr>
             <a:r>
-              <a:t>🤖 Role of Artificial Intelligence</a:t>
+              <a:t>🤖 Importance of Automation</a:t>
             </a:r>
           </a:p>
           <a:p>
@@ -8766,7 +9139,7 @@
               </a:defRPr>
             </a:pPr>
             <a:r>
-              <a:t>•  AI enables instant natural language understanding and automated query resolution.</a:t>
+              <a:t>•  Eliminates repetitive manual query handling by support staff.</a:t>
             </a:r>
           </a:p>
           <a:p>
@@ -8782,7 +9155,7 @@
               </a:defRPr>
             </a:pPr>
             <a:r>
-              <a:t>•  Processes queries 24/7 without fatigue or queue delays.</a:t>
+              <a:t>•  Scales customer service capacity seamlessly during high-volume spikes.</a:t>
             </a:r>
           </a:p>
           <a:p>
@@ -8798,7 +9171,7 @@
               </a:defRPr>
             </a:pPr>
             <a:r>
-              <a:t>•  Seamlessly searches internal Knowledge Bases before calling LLMs.</a:t>
+              <a:t>•  Ensures consistent, accurate responses across all customer touchpoints.</a:t>
             </a:r>
           </a:p>
         </p:txBody>
@@ -8845,7 +9218,6 @@
           <a:lstStyle/>
           <a:p>
             <a:pPr algn="ctr"/>
-            <a:endParaRPr/>
           </a:p>
         </p:txBody>
       </p:sp>
@@ -8883,7 +9255,7 @@
               </a:defRPr>
             </a:pPr>
             <a:r>
-              <a:t>🚀 Need for Intelligent Automation</a:t>
+              <a:t>⚡ Benefits of Intelligent Chat</a:t>
             </a:r>
           </a:p>
           <a:p>
@@ -8899,7 +9271,7 @@
               </a:defRPr>
             </a:pPr>
             <a:r>
-              <a:t>•  Eliminates initial friction by offering instant guest assistance without login barriers.</a:t>
+              <a:t>•  Zero customer registration friction on public landing pages.</a:t>
             </a:r>
           </a:p>
           <a:p>
@@ -8915,7 +9287,7 @@
               </a:defRPr>
             </a:pPr>
             <a:r>
-              <a:t>•  Automates ticket escalation when AI confidence is insufficient.</a:t>
+              <a:t>•  Reduces average response time from hours to under 2 seconds.</a:t>
             </a:r>
           </a:p>
           <a:p>
@@ -8931,7 +9303,7 @@
               </a:defRPr>
             </a:pPr>
             <a:r>
-              <a:t>•  Drastically reduces operational support costs while improving satisfaction.</a:t>
+              <a:t>•  Automates ticket escalation when queries require human expertise.</a:t>
             </a:r>
           </a:p>
         </p:txBody>
@@ -8945,7 +9317,7 @@
 </file>
 
 <file path=ppt/slides/slide3.xml><?xml version="1.0" encoding="utf-8"?>
-<p:sld xmlns:a="http://schemas.openxmlformats.org/drawingml/2006/main" xmlns:r="http://schemas.openxmlformats.org/officeDocument/2006/relationships" xmlns:p="http://schemas.openxmlformats.org/presentationml/2006/main">
+<p:sld xmlns:a="http://schemas.openxmlformats.org/drawingml/2006/main" xmlns:p="http://schemas.openxmlformats.org/presentationml/2006/main" xmlns:r="http://schemas.openxmlformats.org/officeDocument/2006/relationships">
   <p:cSld>
     <p:bg>
       <p:bgPr>
@@ -8961,14 +9333,7 @@
         <p:cNvGrpSpPr/>
         <p:nvPr/>
       </p:nvGrpSpPr>
-      <p:grpSpPr>
-        <a:xfrm>
-          <a:off x="0" y="0"/>
-          <a:ext cx="0" cy="0"/>
-          <a:chOff x="0" y="0"/>
-          <a:chExt cx="0" cy="0"/>
-        </a:xfrm>
-      </p:grpSpPr>
+      <p:grpSpPr/>
       <p:sp>
         <p:nvSpPr>
           <p:cNvPr id="2" name="TextBox 1"/>
@@ -9000,7 +9365,7 @@
               </a:defRPr>
             </a:pPr>
             <a:r>
-              <a:t>AI-POWERED CUSTOMER SUPPORT PLATFORM</a:t>
+              <a:t>AI CUSTOMER SUPPORT &amp; TICKET MANAGEMENT SYSTEM</a:t>
             </a:r>
           </a:p>
         </p:txBody>
@@ -9036,7 +9401,7 @@
               </a:defRPr>
             </a:pPr>
             <a:r>
-              <a:t>Problem Statement: Challenges in Support Operations</a:t>
+              <a:t>Problem Statement: Helpdesk Bottlenecks</a:t>
             </a:r>
           </a:p>
         </p:txBody>
@@ -9083,7 +9448,6 @@
           <a:lstStyle/>
           <a:p>
             <a:pPr algn="ctr"/>
-            <a:endParaRPr/>
           </a:p>
         </p:txBody>
       </p:sp>
@@ -9121,7 +9485,7 @@
               </a:defRPr>
             </a:pPr>
             <a:r>
-              <a:t>💸 High Operational Expenses</a:t>
+              <a:t>⏳ Slow Response Times</a:t>
             </a:r>
           </a:p>
           <a:p>
@@ -9137,7 +9501,7 @@
               </a:defRPr>
             </a:pPr>
             <a:r>
-              <a:t>•  Maintaining 24/7 human agent teams requires substantial budget overhead.</a:t>
+              <a:t>•  Customers wait 24-48 hours for replies to simple email inquiries.</a:t>
             </a:r>
           </a:p>
           <a:p>
@@ -9153,7 +9517,7 @@
               </a:defRPr>
             </a:pPr>
             <a:r>
-              <a:t>•  Scaling human teams linearly with user growth is economically unsustainable.</a:t>
+              <a:t>•  Peak traffic leads to massive ticket backlogs and customer churn.</a:t>
             </a:r>
           </a:p>
         </p:txBody>
@@ -9200,7 +9564,6 @@
           <a:lstStyle/>
           <a:p>
             <a:pPr algn="ctr"/>
-            <a:endParaRPr/>
           </a:p>
         </p:txBody>
       </p:sp>
@@ -9238,7 +9601,7 @@
               </a:defRPr>
             </a:pPr>
             <a:r>
-              <a:t>⏳ Delayed Response &amp; Resolution Times</a:t>
+              <a:t>💸 High Operational Costs</a:t>
             </a:r>
           </a:p>
           <a:p>
@@ -9254,7 +9617,7 @@
               </a:defRPr>
             </a:pPr>
             <a:r>
-              <a:t>•  Customers wait hours or days for responses to routine inquiries.</a:t>
+              <a:t>•  Maintaining round-the-clock human support shifts is cost-prohibitive.</a:t>
             </a:r>
           </a:p>
           <a:p>
@@ -9270,7 +9633,7 @@
               </a:defRPr>
             </a:pPr>
             <a:r>
-              <a:t>•  Peak hour surges cause massive ticket backlogs and customer churn.</a:t>
+              <a:t>•  Scaling human teams linearly with user growth is economically unsustainable.</a:t>
             </a:r>
           </a:p>
         </p:txBody>
@@ -9317,7 +9680,6 @@
           <a:lstStyle/>
           <a:p>
             <a:pPr algn="ctr"/>
-            <a:endParaRPr/>
           </a:p>
         </p:txBody>
       </p:sp>
@@ -9355,7 +9717,7 @@
               </a:defRPr>
             </a:pPr>
             <a:r>
-              <a:t>🚪 High Customer Onboarding Friction</a:t>
+              <a:t>🚪 Limited Availability &amp; Registration Barriers</a:t>
             </a:r>
           </a:p>
           <a:p>
@@ -9371,7 +9733,7 @@
               </a:defRPr>
             </a:pPr>
             <a:r>
-              <a:t>•  Forcing users to register/log in just to ask a simple pre-sale question leads to high drop-off.</a:t>
+              <a:t>•  Legacy support hours leave weekend and overnight gaps.</a:t>
             </a:r>
           </a:p>
           <a:p>
@@ -9387,7 +9749,7 @@
               </a:defRPr>
             </a:pPr>
             <a:r>
-              <a:t>•  Inconsistent answers across human support staff degrade brand trust.</a:t>
+              <a:t>•  Forcing users to register before asking basic questions causes high bounce rates.</a:t>
             </a:r>
           </a:p>
         </p:txBody>
@@ -9434,7 +9796,6 @@
           <a:lstStyle/>
           <a:p>
             <a:pPr algn="ctr"/>
-            <a:endParaRPr/>
           </a:p>
         </p:txBody>
       </p:sp>
@@ -9472,7 +9833,7 @@
               </a:defRPr>
             </a:pPr>
             <a:r>
-              <a:t>⚠️ Lack of Unified Ticket Escalation</a:t>
+              <a:t>⚠️ Lack of Automation &amp; Poor UX</a:t>
             </a:r>
           </a:p>
           <a:p>
@@ -9488,7 +9849,7 @@
               </a:defRPr>
             </a:pPr>
             <a:r>
-              <a:t>•  Traditional chatbots fail silently without creating actionable tickets.</a:t>
+              <a:t>•  Rule-based bots fail on natural phrasing without generating tickets.</a:t>
             </a:r>
           </a:p>
           <a:p>
@@ -9504,7 +9865,7 @@
               </a:defRPr>
             </a:pPr>
             <a:r>
-              <a:t>•  Support managers lack central analytics to monitor resolution velocity.</a:t>
+              <a:t>•  Fragmented tools cause poor customer experience and staff burnout.</a:t>
             </a:r>
           </a:p>
         </p:txBody>
@@ -9518,7 +9879,7 @@
 </file>
 
 <file path=ppt/slides/slide4.xml><?xml version="1.0" encoding="utf-8"?>
-<p:sld xmlns:a="http://schemas.openxmlformats.org/drawingml/2006/main" xmlns:r="http://schemas.openxmlformats.org/officeDocument/2006/relationships" xmlns:p="http://schemas.openxmlformats.org/presentationml/2006/main">
+<p:sld xmlns:a="http://schemas.openxmlformats.org/drawingml/2006/main" xmlns:p="http://schemas.openxmlformats.org/presentationml/2006/main" xmlns:r="http://schemas.openxmlformats.org/officeDocument/2006/relationships">
   <p:cSld>
     <p:bg>
       <p:bgPr>
@@ -9534,14 +9895,7 @@
         <p:cNvGrpSpPr/>
         <p:nvPr/>
       </p:nvGrpSpPr>
-      <p:grpSpPr>
-        <a:xfrm>
-          <a:off x="0" y="0"/>
-          <a:ext cx="0" cy="0"/>
-          <a:chOff x="0" y="0"/>
-          <a:chExt cx="0" cy="0"/>
-        </a:xfrm>
-      </p:grpSpPr>
+      <p:grpSpPr/>
       <p:sp>
         <p:nvSpPr>
           <p:cNvPr id="2" name="TextBox 1"/>
@@ -9573,7 +9927,7 @@
               </a:defRPr>
             </a:pPr>
             <a:r>
-              <a:t>AI-POWERED CUSTOMER SUPPORT PLATFORM</a:t>
+              <a:t>AI CUSTOMER SUPPORT &amp; TICKET MANAGEMENT SYSTEM</a:t>
             </a:r>
           </a:p>
         </p:txBody>
@@ -9656,7 +10010,6 @@
           <a:lstStyle/>
           <a:p>
             <a:pPr algn="ctr"/>
-            <a:endParaRPr/>
           </a:p>
         </p:txBody>
       </p:sp>
@@ -9683,7 +10036,7 @@
           <a:lstStyle/>
           <a:p>
             <a:r>
-              <a:rPr sz="1400" b="1">
+              <a:rPr b="1" sz="1400">
                 <a:solidFill>
                   <a:srgbClr val="0EA5E9"/>
                 </a:solidFill>
@@ -9743,7 +10096,6 @@
           <a:lstStyle/>
           <a:p>
             <a:pPr algn="ctr"/>
-            <a:endParaRPr/>
           </a:p>
         </p:txBody>
       </p:sp>
@@ -9770,12 +10122,12 @@
           <a:lstStyle/>
           <a:p>
             <a:r>
-              <a:rPr sz="1400" b="1">
+              <a:rPr b="1" sz="1400">
                 <a:solidFill>
                   <a:srgbClr val="0EA5E9"/>
                 </a:solidFill>
               </a:rPr>
-              <a:t>🎯 2. Zero-Friction Access: </a:t>
+              <a:t>🎯 2. Improve Response Time: </a:t>
             </a:r>
             <a:r>
               <a:rPr sz="1300">
@@ -9783,7 +10135,7 @@
                   <a:srgbClr val="1E293B"/>
                 </a:solidFill>
               </a:rPr>
-              <a:t>Enable immediate guest access on homepage load without requiring customer login or account creation.</a:t>
+              <a:t>Cut average response time from hours to under 2 seconds using RAG Knowledge Base and real LLM integration.</a:t>
             </a:r>
           </a:p>
         </p:txBody>
@@ -9830,7 +10182,6 @@
           <a:lstStyle/>
           <a:p>
             <a:pPr algn="ctr"/>
-            <a:endParaRPr/>
           </a:p>
         </p:txBody>
       </p:sp>
@@ -9857,12 +10208,12 @@
           <a:lstStyle/>
           <a:p>
             <a:r>
-              <a:rPr sz="1400" b="1">
+              <a:rPr b="1" sz="1400">
                 <a:solidFill>
                   <a:srgbClr val="0EA5E9"/>
                 </a:solidFill>
               </a:rPr>
-              <a:t>🎯 3. Drastic Response Reduction: </a:t>
+              <a:t>🎯 3. Increase Customer Satisfaction: </a:t>
             </a:r>
             <a:r>
               <a:rPr sz="1300">
@@ -9870,7 +10221,7 @@
                   <a:srgbClr val="1E293B"/>
                 </a:solidFill>
               </a:rPr>
-              <a:t>Cut average query response time from hours to under 2 seconds using RAG Knowledge Base and real LLM integration.</a:t>
+              <a:t>Provide instant, accurate, natural language answers with markdown formatting and conversation memory.</a:t>
             </a:r>
           </a:p>
         </p:txBody>
@@ -9917,7 +10268,6 @@
           <a:lstStyle/>
           <a:p>
             <a:pPr algn="ctr"/>
-            <a:endParaRPr/>
           </a:p>
         </p:txBody>
       </p:sp>
@@ -9944,12 +10294,12 @@
           <a:lstStyle/>
           <a:p>
             <a:r>
-              <a:rPr sz="1400" b="1">
+              <a:rPr b="1" sz="1400">
                 <a:solidFill>
                   <a:srgbClr val="0EA5E9"/>
                 </a:solidFill>
               </a:rPr>
-              <a:t>🎯 4. Automated Ticket Generation: </a:t>
+              <a:t>🎯 4. Reduce Support Workload: </a:t>
             </a:r>
             <a:r>
               <a:rPr sz="1300">
@@ -9957,7 +10307,7 @@
                   <a:srgbClr val="1E293B"/>
                 </a:solidFill>
               </a:rPr>
-              <a:t>Automatically prompt and generate structured support tickets with unique IDs when AI confidence is under threshold.</a:t>
+              <a:t>Automate up to 80% of routine inquiries, allowing human agents to focus on complex escalation cases.</a:t>
             </a:r>
           </a:p>
         </p:txBody>
@@ -10004,7 +10354,6 @@
           <a:lstStyle/>
           <a:p>
             <a:pPr algn="ctr"/>
-            <a:endParaRPr/>
           </a:p>
         </p:txBody>
       </p:sp>
@@ -10031,12 +10380,12 @@
           <a:lstStyle/>
           <a:p>
             <a:r>
-              <a:rPr sz="1400" b="1">
+              <a:rPr b="1" sz="1400">
                 <a:solidFill>
                   <a:srgbClr val="0EA5E9"/>
                 </a:solidFill>
               </a:rPr>
-              <a:t>🎯 5. Centralized Admin Console: </a:t>
+              <a:t>🎯 5. Provide Continuous Support: </a:t>
             </a:r>
             <a:r>
               <a:rPr sz="1300">
@@ -10044,7 +10393,7 @@
                   <a:srgbClr val="1E293B"/>
                 </a:solidFill>
               </a:rPr>
-              <a:t>Provide administrators with full ticket lifecycle control, Chart.js analytics, and CSV report export capability.</a:t>
+              <a:t>Ensure 24/7 availability with automated ticket creation whenever AI confidence falls below threshold.</a:t>
             </a:r>
           </a:p>
         </p:txBody>
@@ -10058,7 +10407,7 @@
 </file>
 
 <file path=ppt/slides/slide5.xml><?xml version="1.0" encoding="utf-8"?>
-<p:sld xmlns:a="http://schemas.openxmlformats.org/drawingml/2006/main" xmlns:r="http://schemas.openxmlformats.org/officeDocument/2006/relationships" xmlns:p="http://schemas.openxmlformats.org/presentationml/2006/main">
+<p:sld xmlns:a="http://schemas.openxmlformats.org/drawingml/2006/main" xmlns:p="http://schemas.openxmlformats.org/presentationml/2006/main" xmlns:r="http://schemas.openxmlformats.org/officeDocument/2006/relationships">
   <p:cSld>
     <p:bg>
       <p:bgPr>
@@ -10074,14 +10423,7 @@
         <p:cNvGrpSpPr/>
         <p:nvPr/>
       </p:nvGrpSpPr>
-      <p:grpSpPr>
-        <a:xfrm>
-          <a:off x="0" y="0"/>
-          <a:ext cx="0" cy="0"/>
-          <a:chOff x="0" y="0"/>
-          <a:chExt cx="0" cy="0"/>
-        </a:xfrm>
-      </p:grpSpPr>
+      <p:grpSpPr/>
       <p:sp>
         <p:nvSpPr>
           <p:cNvPr id="2" name="TextBox 1"/>
@@ -10113,7 +10455,7 @@
               </a:defRPr>
             </a:pPr>
             <a:r>
-              <a:t>AI-POWERED CUSTOMER SUPPORT PLATFORM</a:t>
+              <a:t>AI CUSTOMER SUPPORT &amp; TICKET MANAGEMENT SYSTEM</a:t>
             </a:r>
           </a:p>
         </p:txBody>
@@ -10149,7 +10491,7 @@
               </a:defRPr>
             </a:pPr>
             <a:r>
-              <a:t>Existing Support Systems vs. Key Limitations</a:t>
+              <a:t>Existing Support System vs. Limitations</a:t>
             </a:r>
           </a:p>
         </p:txBody>
@@ -10196,7 +10538,6 @@
           <a:lstStyle/>
           <a:p>
             <a:pPr algn="ctr"/>
-            <a:endParaRPr/>
           </a:p>
         </p:txBody>
       </p:sp>
@@ -10361,7 +10702,6 @@
           <a:lstStyle/>
           <a:p>
             <a:pPr algn="ctr"/>
-            <a:endParaRPr/>
           </a:p>
         </p:txBody>
       </p:sp>
@@ -10493,7 +10833,7 @@
 </file>
 
 <file path=ppt/slides/slide6.xml><?xml version="1.0" encoding="utf-8"?>
-<p:sld xmlns:a="http://schemas.openxmlformats.org/drawingml/2006/main" xmlns:r="http://schemas.openxmlformats.org/officeDocument/2006/relationships" xmlns:p="http://schemas.openxmlformats.org/presentationml/2006/main">
+<p:sld xmlns:a="http://schemas.openxmlformats.org/drawingml/2006/main" xmlns:p="http://schemas.openxmlformats.org/presentationml/2006/main" xmlns:r="http://schemas.openxmlformats.org/officeDocument/2006/relationships">
   <p:cSld>
     <p:bg>
       <p:bgPr>
@@ -10509,14 +10849,7 @@
         <p:cNvGrpSpPr/>
         <p:nvPr/>
       </p:nvGrpSpPr>
-      <p:grpSpPr>
-        <a:xfrm>
-          <a:off x="0" y="0"/>
-          <a:ext cx="0" cy="0"/>
-          <a:chOff x="0" y="0"/>
-          <a:chExt cx="0" cy="0"/>
-        </a:xfrm>
-      </p:grpSpPr>
+      <p:grpSpPr/>
       <p:sp>
         <p:nvSpPr>
           <p:cNvPr id="2" name="TextBox 1"/>
@@ -10548,7 +10881,7 @@
               </a:defRPr>
             </a:pPr>
             <a:r>
-              <a:t>AI-POWERED CUSTOMER SUPPORT PLATFORM</a:t>
+              <a:t>AI CUSTOMER SUPPORT &amp; TICKET MANAGEMENT SYSTEM</a:t>
             </a:r>
           </a:p>
         </p:txBody>
@@ -10631,7 +10964,6 @@
           <a:lstStyle/>
           <a:p>
             <a:pPr algn="ctr"/>
-            <a:endParaRPr/>
           </a:p>
         </p:txBody>
       </p:sp>
@@ -10669,7 +11001,7 @@
               </a:defRPr>
             </a:pPr>
             <a:r>
-              <a:t>🤖 Instant AI Chatbot Engine</a:t>
+              <a:t>🤖 AI-Powered Chatbot</a:t>
             </a:r>
           </a:p>
           <a:p>
@@ -10780,7 +11112,6 @@
           <a:lstStyle/>
           <a:p>
             <a:pPr algn="ctr"/>
-            <a:endParaRPr/>
           </a:p>
         </p:txBody>
       </p:sp>
@@ -10818,7 +11149,7 @@
               </a:defRPr>
             </a:pPr>
             <a:r>
-              <a:t>🎫 Automated Ticket Escalation</a:t>
+              <a:t>🎫 Automatic Ticket Generation</a:t>
             </a:r>
           </a:p>
           <a:p>
@@ -10929,7 +11260,6 @@
           <a:lstStyle/>
           <a:p>
             <a:pPr algn="ctr"/>
-            <a:endParaRPr/>
           </a:p>
         </p:txBody>
       </p:sp>
@@ -10967,7 +11297,7 @@
               </a:defRPr>
             </a:pPr>
             <a:r>
-              <a:t>⚙️ Admin Management Console</a:t>
+              <a:t>⚙️ Admin Dashboard &amp; Analytics</a:t>
             </a:r>
           </a:p>
           <a:p>
@@ -10999,7 +11329,7 @@
               </a:defRPr>
             </a:pPr>
             <a:r>
-              <a:t>•  Master ticket lifecycle management &amp; replies.</a:t>
+              <a:t>•  Master ticket queue management &amp; replies.</a:t>
             </a:r>
           </a:p>
           <a:p>
@@ -11045,7 +11375,7 @@
 </file>
 
 <file path=ppt/slides/slide7.xml><?xml version="1.0" encoding="utf-8"?>
-<p:sld xmlns:a="http://schemas.openxmlformats.org/drawingml/2006/main" xmlns:r="http://schemas.openxmlformats.org/officeDocument/2006/relationships" xmlns:p="http://schemas.openxmlformats.org/presentationml/2006/main">
+<p:sld xmlns:a="http://schemas.openxmlformats.org/drawingml/2006/main" xmlns:p="http://schemas.openxmlformats.org/presentationml/2006/main" xmlns:r="http://schemas.openxmlformats.org/officeDocument/2006/relationships">
   <p:cSld>
     <p:bg>
       <p:bgPr>
@@ -11061,14 +11391,7 @@
         <p:cNvGrpSpPr/>
         <p:nvPr/>
       </p:nvGrpSpPr>
-      <p:grpSpPr>
-        <a:xfrm>
-          <a:off x="0" y="0"/>
-          <a:ext cx="0" cy="0"/>
-          <a:chOff x="0" y="0"/>
-          <a:chExt cx="0" cy="0"/>
-        </a:xfrm>
-      </p:grpSpPr>
+      <p:grpSpPr/>
       <p:sp>
         <p:nvSpPr>
           <p:cNvPr id="2" name="TextBox 1"/>
@@ -11100,7 +11423,7 @@
               </a:defRPr>
             </a:pPr>
             <a:r>
-              <a:t>AI-POWERED CUSTOMER SUPPORT PLATFORM</a:t>
+              <a:t>AI CUSTOMER SUPPORT &amp; TICKET MANAGEMENT SYSTEM</a:t>
             </a:r>
           </a:p>
         </p:txBody>
@@ -11183,7 +11506,6 @@
           <a:lstStyle/>
           <a:p>
             <a:pPr algn="ctr"/>
-            <a:endParaRPr/>
           </a:p>
         </p:txBody>
       </p:sp>
@@ -11213,7 +11535,7 @@
               <a:spcAft>
                 <a:spcPts val="1000"/>
               </a:spcAft>
-              <a:defRPr sz="1300" b="1">
+              <a:defRPr b="1" sz="1300">
                 <a:solidFill>
                   <a:srgbClr val="0EA5E9"/>
                 </a:solidFill>
@@ -11224,7 +11546,7 @@
             </a:r>
             <a:br/>
             <a:r>
-              <a:t>Visitor</a:t>
+              <a:t>User</a:t>
             </a:r>
           </a:p>
           <a:p>
@@ -11236,15 +11558,15 @@
               </a:defRPr>
             </a:pPr>
             <a:r>
+              <a:t>• User Interface</a:t>
+            </a:r>
+            <a:br/>
+            <a:r>
               <a:t>• Instant Chat</a:t>
             </a:r>
             <a:br/>
             <a:r>
               <a:t>• Ticket Modal</a:t>
-            </a:r>
-            <a:br/>
-            <a:r>
-              <a:t>• Markdown UI</a:t>
             </a:r>
           </a:p>
         </p:txBody>
@@ -11291,7 +11613,6 @@
           <a:lstStyle/>
           <a:p>
             <a:pPr algn="ctr"/>
-            <a:endParaRPr/>
           </a:p>
         </p:txBody>
       </p:sp>
@@ -11321,14 +11642,14 @@
               <a:spcAft>
                 <a:spcPts val="1000"/>
               </a:spcAft>
-              <a:defRPr sz="1300" b="1">
+              <a:defRPr b="1" sz="1300">
                 <a:solidFill>
                   <a:srgbClr val="0F172A"/>
                 </a:solidFill>
               </a:defRPr>
             </a:pPr>
             <a:r>
-              <a:t>Flask Web App</a:t>
+              <a:t>Flask Application</a:t>
             </a:r>
             <a:br/>
             <a:r>
@@ -11399,7 +11720,6 @@
           <a:lstStyle/>
           <a:p>
             <a:pPr algn="ctr"/>
-            <a:endParaRPr/>
           </a:p>
         </p:txBody>
       </p:sp>
@@ -11429,7 +11749,7 @@
               <a:spcAft>
                 <a:spcPts val="1000"/>
               </a:spcAft>
-              <a:defRPr sz="1300" b="1">
+              <a:defRPr b="1" sz="1300">
                 <a:solidFill>
                   <a:srgbClr val="0F2043"/>
                 </a:solidFill>
@@ -11452,7 +11772,7 @@
               </a:defRPr>
             </a:pPr>
             <a:r>
-              <a:t>• KB Search RAG</a:t>
+              <a:t>• KB RAG Search</a:t>
             </a:r>
             <a:br/>
             <a:r>
@@ -11460,7 +11780,7 @@
             </a:r>
             <a:br/>
             <a:r>
-              <a:t>• Intent Classification</a:t>
+              <a:t>• Intent Detector</a:t>
             </a:r>
           </a:p>
         </p:txBody>
@@ -11507,7 +11827,6 @@
           <a:lstStyle/>
           <a:p>
             <a:pPr algn="ctr"/>
-            <a:endParaRPr/>
           </a:p>
         </p:txBody>
       </p:sp>
@@ -11537,7 +11856,7 @@
               <a:spcAft>
                 <a:spcPts val="1000"/>
               </a:spcAft>
-              <a:defRPr sz="1300" b="1">
+              <a:defRPr b="1" sz="1300">
                 <a:solidFill>
                   <a:srgbClr val="0F172A"/>
                 </a:solidFill>
@@ -11568,7 +11887,7 @@
             </a:r>
             <a:br/>
             <a:r>
-              <a:t>• Auto Schema Creation</a:t>
+              <a:t>• Auto Schemas</a:t>
             </a:r>
           </a:p>
         </p:txBody>
@@ -11615,7 +11934,6 @@
           <a:lstStyle/>
           <a:p>
             <a:pPr algn="ctr"/>
-            <a:endParaRPr/>
           </a:p>
         </p:txBody>
       </p:sp>
@@ -11645,7 +11963,7 @@
               <a:spcAft>
                 <a:spcPts val="1000"/>
               </a:spcAft>
-              <a:defRPr sz="1300" b="1">
+              <a:defRPr b="1" sz="1300">
                 <a:solidFill>
                   <a:srgbClr val="0EA5E9"/>
                 </a:solidFill>
@@ -11656,7 +11974,7 @@
             </a:r>
             <a:br/>
             <a:r>
-              <a:t>Console</a:t>
+              <a:t>Dashboard</a:t>
             </a:r>
           </a:p>
           <a:p>
@@ -11672,7 +11990,7 @@
             </a:r>
             <a:br/>
             <a:r>
-              <a:t>• Analytics</a:t>
+              <a:t>• Ticket Queue</a:t>
             </a:r>
             <a:br/>
             <a:r>
@@ -11690,7 +12008,7 @@
 </file>
 
 <file path=ppt/slides/slide8.xml><?xml version="1.0" encoding="utf-8"?>
-<p:sld xmlns:a="http://schemas.openxmlformats.org/drawingml/2006/main" xmlns:r="http://schemas.openxmlformats.org/officeDocument/2006/relationships" xmlns:p="http://schemas.openxmlformats.org/presentationml/2006/main">
+<p:sld xmlns:a="http://schemas.openxmlformats.org/drawingml/2006/main" xmlns:p="http://schemas.openxmlformats.org/presentationml/2006/main" xmlns:r="http://schemas.openxmlformats.org/officeDocument/2006/relationships">
   <p:cSld>
     <p:bg>
       <p:bgPr>
@@ -11706,14 +12024,7 @@
         <p:cNvGrpSpPr/>
         <p:nvPr/>
       </p:nvGrpSpPr>
-      <p:grpSpPr>
-        <a:xfrm>
-          <a:off x="0" y="0"/>
-          <a:ext cx="0" cy="0"/>
-          <a:chOff x="0" y="0"/>
-          <a:chExt cx="0" cy="0"/>
-        </a:xfrm>
-      </p:grpSpPr>
+      <p:grpSpPr/>
       <p:sp>
         <p:nvSpPr>
           <p:cNvPr id="2" name="TextBox 1"/>
@@ -11745,7 +12056,7 @@
               </a:defRPr>
             </a:pPr>
             <a:r>
-              <a:t>AI-POWERED CUSTOMER SUPPORT PLATFORM</a:t>
+              <a:t>AI CUSTOMER SUPPORT &amp; TICKET MANAGEMENT SYSTEM</a:t>
             </a:r>
           </a:p>
         </p:txBody>
@@ -11781,7 +12092,7 @@
               </a:defRPr>
             </a:pPr>
             <a:r>
-              <a:t>Technology Stack &amp; Frameworks</a:t>
+              <a:t>System Modules Breakdown</a:t>
             </a:r>
           </a:p>
         </p:txBody>
@@ -11795,7 +12106,7 @@
         <p:spPr>
           <a:xfrm>
             <a:off x="731520" y="1645920"/>
-            <a:ext cx="5120640" cy="2194560"/>
+            <a:ext cx="10698480" cy="777240"/>
           </a:xfrm>
           <a:prstGeom prst="roundRect">
             <a:avLst/>
@@ -11803,7 +12114,7 @@
           <a:solidFill>
             <a:srgbClr val="FFFFFF"/>
           </a:solidFill>
-          <a:ln w="19050">
+          <a:ln>
             <a:solidFill>
               <a:srgbClr val="E2E8F0"/>
             </a:solidFill>
@@ -11828,7 +12139,6 @@
           <a:lstStyle/>
           <a:p>
             <a:pPr algn="ctr"/>
-            <a:endParaRPr/>
           </a:p>
         </p:txBody>
       </p:sp>
@@ -11840,8 +12150,8 @@
         </p:nvSpPr>
         <p:spPr>
           <a:xfrm>
-            <a:off x="914400" y="1828800"/>
-            <a:ext cx="4754880" cy="1828800"/>
+            <a:off x="914400" y="1737360"/>
+            <a:ext cx="10332720" cy="594360"/>
           </a:xfrm>
           <a:prstGeom prst="rect">
             <a:avLst/>
@@ -11854,99 +12164,21 @@
           </a:bodyPr>
           <a:lstStyle/>
           <a:p>
-            <a:pPr>
-              <a:spcAft>
-                <a:spcPts val="1000"/>
-              </a:spcAft>
-              <a:defRPr sz="1600" b="1">
+            <a:r>
+              <a:rPr b="1" sz="1400">
                 <a:solidFill>
                   <a:srgbClr val="0F172A"/>
                 </a:solidFill>
-                <a:latin typeface="Arial"/>
-              </a:defRPr>
-            </a:pPr>
-            <a:r>
-              <a:t>🐍 Backend Framework</a:t>
-            </a:r>
-          </a:p>
-          <a:p>
-            <a:pPr>
-              <a:spcAft>
-                <a:spcPts val="600"/>
-              </a:spcAft>
-              <a:defRPr sz="1300">
-                <a:solidFill>
-                  <a:srgbClr val="1E293B"/>
-                </a:solidFill>
-                <a:latin typeface="Arial"/>
-              </a:defRPr>
-            </a:pPr>
-            <a:r>
-              <a:t>•  Python 3.12</a:t>
-            </a:r>
-          </a:p>
-          <a:p>
-            <a:pPr>
-              <a:spcAft>
-                <a:spcPts val="600"/>
-              </a:spcAft>
-              <a:defRPr sz="1300">
-                <a:solidFill>
-                  <a:srgbClr val="1E293B"/>
-                </a:solidFill>
-                <a:latin typeface="Arial"/>
-              </a:defRPr>
-            </a:pPr>
-            <a:r>
-              <a:t>•  Flask App Factory</a:t>
-            </a:r>
-          </a:p>
-          <a:p>
-            <a:pPr>
-              <a:spcAft>
-                <a:spcPts val="600"/>
-              </a:spcAft>
-              <a:defRPr sz="1300">
-                <a:solidFill>
-                  <a:srgbClr val="1E293B"/>
-                </a:solidFill>
-                <a:latin typeface="Arial"/>
-              </a:defRPr>
-            </a:pPr>
-            <a:r>
-              <a:t>•  Flask-SQLAlchemy</a:t>
-            </a:r>
-          </a:p>
-          <a:p>
-            <a:pPr>
-              <a:spcAft>
-                <a:spcPts val="600"/>
-              </a:spcAft>
-              <a:defRPr sz="1300">
-                <a:solidFill>
-                  <a:srgbClr val="1E293B"/>
-                </a:solidFill>
-                <a:latin typeface="Arial"/>
-              </a:defRPr>
-            </a:pPr>
-            <a:r>
-              <a:t>•  Flask-Login</a:t>
-            </a:r>
-          </a:p>
-          <a:p>
-            <a:pPr>
-              <a:spcAft>
-                <a:spcPts val="600"/>
-              </a:spcAft>
-              <a:defRPr sz="1300">
-                <a:solidFill>
-                  <a:srgbClr val="1E293B"/>
-                </a:solidFill>
-                <a:latin typeface="Arial"/>
-              </a:defRPr>
-            </a:pPr>
-            <a:r>
-              <a:t>•  Gunicorn WSGI</a:t>
+              </a:rPr>
+              <a:t>👤 Customer Module: </a:t>
+            </a:r>
+            <a:r>
+              <a:rPr sz="1200">
+                <a:solidFill>
+                  <a:srgbClr val="1E293B"/>
+                </a:solidFill>
+              </a:rPr>
+              <a:t>Instant guest access on homepage. | Zero login or registration required. | Interactive Bootstrap 5 dark theme.</a:t>
             </a:r>
           </a:p>
         </p:txBody>
@@ -11959,8 +12191,8 @@
         </p:nvSpPr>
         <p:spPr>
           <a:xfrm>
-            <a:off x="6126480" y="1645920"/>
-            <a:ext cx="5120640" cy="2194560"/>
+            <a:off x="731520" y="2560320"/>
+            <a:ext cx="10698480" cy="777240"/>
           </a:xfrm>
           <a:prstGeom prst="roundRect">
             <a:avLst/>
@@ -11968,7 +12200,7 @@
           <a:solidFill>
             <a:srgbClr val="FFFFFF"/>
           </a:solidFill>
-          <a:ln w="19050">
+          <a:ln>
             <a:solidFill>
               <a:srgbClr val="E2E8F0"/>
             </a:solidFill>
@@ -11993,7 +12225,6 @@
           <a:lstStyle/>
           <a:p>
             <a:pPr algn="ctr"/>
-            <a:endParaRPr/>
           </a:p>
         </p:txBody>
       </p:sp>
@@ -12005,8 +12236,8 @@
         </p:nvSpPr>
         <p:spPr>
           <a:xfrm>
-            <a:off x="6309360" y="1828800"/>
-            <a:ext cx="4754880" cy="1828800"/>
+            <a:off x="914400" y="2651760"/>
+            <a:ext cx="10332720" cy="594360"/>
           </a:xfrm>
           <a:prstGeom prst="rect">
             <a:avLst/>
@@ -12019,99 +12250,21 @@
           </a:bodyPr>
           <a:lstStyle/>
           <a:p>
-            <a:pPr>
-              <a:spcAft>
-                <a:spcPts val="1000"/>
-              </a:spcAft>
-              <a:defRPr sz="1600" b="1">
+            <a:r>
+              <a:rPr b="1" sz="1400">
                 <a:solidFill>
                   <a:srgbClr val="0F172A"/>
                 </a:solidFill>
-                <a:latin typeface="Arial"/>
-              </a:defRPr>
-            </a:pPr>
-            <a:r>
-              <a:t>🎨 Frontend &amp; UI</a:t>
-            </a:r>
-          </a:p>
-          <a:p>
-            <a:pPr>
-              <a:spcAft>
-                <a:spcPts val="600"/>
-              </a:spcAft>
-              <a:defRPr sz="1300">
-                <a:solidFill>
-                  <a:srgbClr val="1E293B"/>
-                </a:solidFill>
-                <a:latin typeface="Arial"/>
-              </a:defRPr>
-            </a:pPr>
-            <a:r>
-              <a:t>•  HTML5 &amp; CSS3</a:t>
-            </a:r>
-          </a:p>
-          <a:p>
-            <a:pPr>
-              <a:spcAft>
-                <a:spcPts val="600"/>
-              </a:spcAft>
-              <a:defRPr sz="1300">
-                <a:solidFill>
-                  <a:srgbClr val="1E293B"/>
-                </a:solidFill>
-                <a:latin typeface="Arial"/>
-              </a:defRPr>
-            </a:pPr>
-            <a:r>
-              <a:t>•  Bootstrap 5</a:t>
-            </a:r>
-          </a:p>
-          <a:p>
-            <a:pPr>
-              <a:spcAft>
-                <a:spcPts val="600"/>
-              </a:spcAft>
-              <a:defRPr sz="1300">
-                <a:solidFill>
-                  <a:srgbClr val="1E293B"/>
-                </a:solidFill>
-                <a:latin typeface="Arial"/>
-              </a:defRPr>
-            </a:pPr>
-            <a:r>
-              <a:t>•  Vanilla JavaScript</a:t>
-            </a:r>
-          </a:p>
-          <a:p>
-            <a:pPr>
-              <a:spcAft>
-                <a:spcPts val="600"/>
-              </a:spcAft>
-              <a:defRPr sz="1300">
-                <a:solidFill>
-                  <a:srgbClr val="1E293B"/>
-                </a:solidFill>
-                <a:latin typeface="Arial"/>
-              </a:defRPr>
-            </a:pPr>
-            <a:r>
-              <a:t>•  Marked.js Markdown</a:t>
-            </a:r>
-          </a:p>
-          <a:p>
-            <a:pPr>
-              <a:spcAft>
-                <a:spcPts val="600"/>
-              </a:spcAft>
-              <a:defRPr sz="1300">
-                <a:solidFill>
-                  <a:srgbClr val="1E293B"/>
-                </a:solidFill>
-                <a:latin typeface="Arial"/>
-              </a:defRPr>
-            </a:pPr>
-            <a:r>
-              <a:t>•  Glassmorphism UI</a:t>
+              </a:rPr>
+              <a:t>💬 Chat Module: </a:t>
+            </a:r>
+            <a:r>
+              <a:rPr sz="1200">
+                <a:solidFill>
+                  <a:srgbClr val="1E293B"/>
+                </a:solidFill>
+              </a:rPr>
+              <a:t>Real-time streaming typing animation. | Marked.js markdown rendering for code. | Session conversation memory context.</a:t>
             </a:r>
           </a:p>
         </p:txBody>
@@ -12124,8 +12277,8 @@
         </p:nvSpPr>
         <p:spPr>
           <a:xfrm>
-            <a:off x="731520" y="4023360"/>
-            <a:ext cx="5120640" cy="2194560"/>
+            <a:off x="731520" y="3474720"/>
+            <a:ext cx="10698480" cy="777240"/>
           </a:xfrm>
           <a:prstGeom prst="roundRect">
             <a:avLst/>
@@ -12133,7 +12286,7 @@
           <a:solidFill>
             <a:srgbClr val="FFFFFF"/>
           </a:solidFill>
-          <a:ln w="19050">
+          <a:ln>
             <a:solidFill>
               <a:srgbClr val="E2E8F0"/>
             </a:solidFill>
@@ -12158,7 +12311,6 @@
           <a:lstStyle/>
           <a:p>
             <a:pPr algn="ctr"/>
-            <a:endParaRPr/>
           </a:p>
         </p:txBody>
       </p:sp>
@@ -12170,8 +12322,8 @@
         </p:nvSpPr>
         <p:spPr>
           <a:xfrm>
-            <a:off x="914400" y="4206240"/>
-            <a:ext cx="4754880" cy="1828800"/>
+            <a:off x="914400" y="3566160"/>
+            <a:ext cx="10332720" cy="594360"/>
           </a:xfrm>
           <a:prstGeom prst="rect">
             <a:avLst/>
@@ -12184,83 +12336,21 @@
           </a:bodyPr>
           <a:lstStyle/>
           <a:p>
-            <a:pPr>
-              <a:spcAft>
-                <a:spcPts val="1000"/>
-              </a:spcAft>
-              <a:defRPr sz="1600" b="1">
+            <a:r>
+              <a:rPr b="1" sz="1400">
                 <a:solidFill>
                   <a:srgbClr val="0F172A"/>
                 </a:solidFill>
-                <a:latin typeface="Arial"/>
-              </a:defRPr>
-            </a:pPr>
-            <a:r>
-              <a:t>💾 Database &amp; Storage</a:t>
-            </a:r>
-          </a:p>
-          <a:p>
-            <a:pPr>
-              <a:spcAft>
-                <a:spcPts val="600"/>
-              </a:spcAft>
-              <a:defRPr sz="1300">
-                <a:solidFill>
-                  <a:srgbClr val="1E293B"/>
-                </a:solidFill>
-                <a:latin typeface="Arial"/>
-              </a:defRPr>
-            </a:pPr>
-            <a:r>
-              <a:t>•  SQLite (Development)</a:t>
-            </a:r>
-          </a:p>
-          <a:p>
-            <a:pPr>
-              <a:spcAft>
-                <a:spcPts val="600"/>
-              </a:spcAft>
-              <a:defRPr sz="1300">
-                <a:solidFill>
-                  <a:srgbClr val="1E293B"/>
-                </a:solidFill>
-                <a:latin typeface="Arial"/>
-              </a:defRPr>
-            </a:pPr>
-            <a:r>
-              <a:t>•  PostgreSQL (Production)</a:t>
-            </a:r>
-          </a:p>
-          <a:p>
-            <a:pPr>
-              <a:spcAft>
-                <a:spcPts val="600"/>
-              </a:spcAft>
-              <a:defRPr sz="1300">
-                <a:solidFill>
-                  <a:srgbClr val="1E293B"/>
-                </a:solidFill>
-                <a:latin typeface="Arial"/>
-              </a:defRPr>
-            </a:pPr>
-            <a:r>
-              <a:t>•  db.create_all() Auto Schema</a:t>
-            </a:r>
-          </a:p>
-          <a:p>
-            <a:pPr>
-              <a:spcAft>
-                <a:spcPts val="600"/>
-              </a:spcAft>
-              <a:defRPr sz="1300">
-                <a:solidFill>
-                  <a:srgbClr val="1E293B"/>
-                </a:solidFill>
-                <a:latin typeface="Arial"/>
-              </a:defRPr>
-            </a:pPr>
-            <a:r>
-              <a:t>•  Zero-Migration Setup</a:t>
+              </a:rPr>
+              <a:t>🎫 Ticket Management Module: </a:t>
+            </a:r>
+            <a:r>
+              <a:rPr sz="1200">
+                <a:solidFill>
+                  <a:srgbClr val="1E293B"/>
+                </a:solidFill>
+              </a:rPr>
+              <a:t>Automated Ticket ID generation (TICK-XXXXXXXX). | Captures Name, Email, Phone, Priority. | Database persistence &amp; status tracking.</a:t>
             </a:r>
           </a:p>
         </p:txBody>
@@ -12273,8 +12363,8 @@
         </p:nvSpPr>
         <p:spPr>
           <a:xfrm>
-            <a:off x="6126480" y="4023360"/>
-            <a:ext cx="5120640" cy="2194560"/>
+            <a:off x="731520" y="4389120"/>
+            <a:ext cx="10698480" cy="777240"/>
           </a:xfrm>
           <a:prstGeom prst="roundRect">
             <a:avLst/>
@@ -12282,7 +12372,7 @@
           <a:solidFill>
             <a:srgbClr val="FFFFFF"/>
           </a:solidFill>
-          <a:ln w="19050">
+          <a:ln>
             <a:solidFill>
               <a:srgbClr val="E2E8F0"/>
             </a:solidFill>
@@ -12307,7 +12397,6 @@
           <a:lstStyle/>
           <a:p>
             <a:pPr algn="ctr"/>
-            <a:endParaRPr/>
           </a:p>
         </p:txBody>
       </p:sp>
@@ -12319,8 +12408,8 @@
         </p:nvSpPr>
         <p:spPr>
           <a:xfrm>
-            <a:off x="6309360" y="4206240"/>
-            <a:ext cx="4754880" cy="1828800"/>
+            <a:off x="914400" y="4480560"/>
+            <a:ext cx="10332720" cy="594360"/>
           </a:xfrm>
           <a:prstGeom prst="rect">
             <a:avLst/>
@@ -12333,83 +12422,107 @@
           </a:bodyPr>
           <a:lstStyle/>
           <a:p>
-            <a:pPr>
-              <a:spcAft>
-                <a:spcPts val="1000"/>
-              </a:spcAft>
-              <a:defRPr sz="1600" b="1">
+            <a:r>
+              <a:rPr b="1" sz="1400">
                 <a:solidFill>
                   <a:srgbClr val="0F172A"/>
                 </a:solidFill>
-                <a:latin typeface="Arial"/>
-              </a:defRPr>
-            </a:pPr>
-            <a:r>
-              <a:t>☁️ AI &amp; Infrastructure</a:t>
-            </a:r>
-          </a:p>
-          <a:p>
-            <a:pPr>
-              <a:spcAft>
-                <a:spcPts val="600"/>
-              </a:spcAft>
-              <a:defRPr sz="1300">
-                <a:solidFill>
-                  <a:srgbClr val="1E293B"/>
-                </a:solidFill>
-                <a:latin typeface="Arial"/>
-              </a:defRPr>
-            </a:pPr>
-            <a:r>
-              <a:t>•  OpenAI GPT API</a:t>
-            </a:r>
-          </a:p>
-          <a:p>
-            <a:pPr>
-              <a:spcAft>
-                <a:spcPts val="600"/>
-              </a:spcAft>
-              <a:defRPr sz="1300">
-                <a:solidFill>
-                  <a:srgbClr val="1E293B"/>
-                </a:solidFill>
-                <a:latin typeface="Arial"/>
-              </a:defRPr>
-            </a:pPr>
-            <a:r>
-              <a:t>•  Google Gemini API</a:t>
-            </a:r>
-          </a:p>
-          <a:p>
-            <a:pPr>
-              <a:spcAft>
-                <a:spcPts val="600"/>
-              </a:spcAft>
-              <a:defRPr sz="1300">
-                <a:solidFill>
-                  <a:srgbClr val="1E293B"/>
-                </a:solidFill>
-                <a:latin typeface="Arial"/>
-              </a:defRPr>
-            </a:pPr>
-            <a:r>
-              <a:t>•  Ollama Local Model</a:t>
-            </a:r>
-          </a:p>
-          <a:p>
-            <a:pPr>
-              <a:spcAft>
-                <a:spcPts val="600"/>
-              </a:spcAft>
-              <a:defRPr sz="1300">
-                <a:solidFill>
-                  <a:srgbClr val="1E293B"/>
-                </a:solidFill>
-                <a:latin typeface="Arial"/>
-              </a:defRPr>
-            </a:pPr>
-            <a:r>
-              <a:t>•  Render Cloud Deployment</a:t>
+              </a:rPr>
+              <a:t>📚 Knowledge Base Module: </a:t>
+            </a:r>
+            <a:r>
+              <a:rPr sz="1200">
+                <a:solidFill>
+                  <a:srgbClr val="1E293B"/>
+                </a:solidFill>
+              </a:rPr>
+              <a:t>Pre-LLM RAG FAQ pattern lookup. | Dynamic CRUD management by Admin. | Reduces external LLM API costs.</a:t>
+            </a:r>
+          </a:p>
+        </p:txBody>
+      </p:sp>
+      <p:sp>
+        <p:nvSpPr>
+          <p:cNvPr id="12" name="Rounded Rectangle 11"/>
+          <p:cNvSpPr/>
+          <p:nvPr/>
+        </p:nvSpPr>
+        <p:spPr>
+          <a:xfrm>
+            <a:off x="731520" y="5303520"/>
+            <a:ext cx="10698480" cy="777240"/>
+          </a:xfrm>
+          <a:prstGeom prst="roundRect">
+            <a:avLst/>
+          </a:prstGeom>
+          <a:solidFill>
+            <a:srgbClr val="FFFFFF"/>
+          </a:solidFill>
+          <a:ln>
+            <a:solidFill>
+              <a:srgbClr val="E2E8F0"/>
+            </a:solidFill>
+          </a:ln>
+        </p:spPr>
+        <p:style>
+          <a:lnRef idx="1">
+            <a:schemeClr val="accent1"/>
+          </a:lnRef>
+          <a:fillRef idx="3">
+            <a:schemeClr val="accent1"/>
+          </a:fillRef>
+          <a:effectRef idx="2">
+            <a:schemeClr val="accent1"/>
+          </a:effectRef>
+          <a:fontRef idx="minor">
+            <a:schemeClr val="lt1"/>
+          </a:fontRef>
+        </p:style>
+        <p:txBody>
+          <a:bodyPr rtlCol="0" anchor="ctr"/>
+          <a:lstStyle/>
+          <a:p>
+            <a:pPr algn="ctr"/>
+          </a:p>
+        </p:txBody>
+      </p:sp>
+      <p:sp>
+        <p:nvSpPr>
+          <p:cNvPr id="13" name="TextBox 12"/>
+          <p:cNvSpPr txBox="1"/>
+          <p:nvPr/>
+        </p:nvSpPr>
+        <p:spPr>
+          <a:xfrm>
+            <a:off x="914400" y="5394960"/>
+            <a:ext cx="10332720" cy="594360"/>
+          </a:xfrm>
+          <a:prstGeom prst="rect">
+            <a:avLst/>
+          </a:prstGeom>
+          <a:noFill/>
+        </p:spPr>
+        <p:txBody>
+          <a:bodyPr wrap="square">
+            <a:spAutoFit/>
+          </a:bodyPr>
+          <a:lstStyle/>
+          <a:p>
+            <a:r>
+              <a:rPr b="1" sz="1400">
+                <a:solidFill>
+                  <a:srgbClr val="0F172A"/>
+                </a:solidFill>
+              </a:rPr>
+              <a:t>⚙️ Administrator Module: </a:t>
+            </a:r>
+            <a:r>
+              <a:rPr sz="1200">
+                <a:solidFill>
+                  <a:srgbClr val="1E293B"/>
+                </a:solidFill>
+              </a:rPr>
+              <a:t>Flask-Login protected authentication. | Ticket reply threading &amp; status controls. | Chart.js analytics &amp; CSV report exporter.</a:t>
             </a:r>
           </a:p>
         </p:txBody>
@@ -12423,7 +12536,7 @@
 </file>
 
 <file path=ppt/slides/slide9.xml><?xml version="1.0" encoding="utf-8"?>
-<p:sld xmlns:a="http://schemas.openxmlformats.org/drawingml/2006/main" xmlns:r="http://schemas.openxmlformats.org/officeDocument/2006/relationships" xmlns:p="http://schemas.openxmlformats.org/presentationml/2006/main">
+<p:sld xmlns:a="http://schemas.openxmlformats.org/drawingml/2006/main" xmlns:p="http://schemas.openxmlformats.org/presentationml/2006/main" xmlns:r="http://schemas.openxmlformats.org/officeDocument/2006/relationships">
   <p:cSld>
     <p:bg>
       <p:bgPr>
@@ -12439,14 +12552,7 @@
         <p:cNvGrpSpPr/>
         <p:nvPr/>
       </p:nvGrpSpPr>
-      <p:grpSpPr>
-        <a:xfrm>
-          <a:off x="0" y="0"/>
-          <a:ext cx="0" cy="0"/>
-          <a:chOff x="0" y="0"/>
-          <a:chExt cx="0" cy="0"/>
-        </a:xfrm>
-      </p:grpSpPr>
+      <p:grpSpPr/>
       <p:sp>
         <p:nvSpPr>
           <p:cNvPr id="2" name="TextBox 1"/>
@@ -12478,7 +12584,7 @@
               </a:defRPr>
             </a:pPr>
             <a:r>
-              <a:t>AI-POWERED CUSTOMER SUPPORT PLATFORM</a:t>
+              <a:t>AI CUSTOMER SUPPORT &amp; TICKET MANAGEMENT SYSTEM</a:t>
             </a:r>
           </a:p>
         </p:txBody>
@@ -12514,7 +12620,7 @@
               </a:defRPr>
             </a:pPr>
             <a:r>
-              <a:t>Database Schema &amp; Entity Model</a:t>
+              <a:t>Database Design &amp; Relational Tables</a:t>
             </a:r>
           </a:p>
         </p:txBody>
@@ -12561,7 +12667,6 @@
           <a:lstStyle/>
           <a:p>
             <a:pPr algn="ctr"/>
-            <a:endParaRPr/>
           </a:p>
         </p:txBody>
       </p:sp>
@@ -12599,7 +12704,7 @@
               </a:defRPr>
             </a:pPr>
             <a:r>
-              <a:t>🗄️ Table: Admin</a:t>
+              <a:t>🗄️ Admin Table</a:t>
             </a:r>
           </a:p>
           <a:p>
@@ -12742,7 +12847,6 @@
           <a:lstStyle/>
           <a:p>
             <a:pPr algn="ctr"/>
-            <a:endParaRPr/>
           </a:p>
         </p:txBody>
       </p:sp>
@@ -12780,7 +12884,7 @@
               </a:defRPr>
             </a:pPr>
             <a:r>
-              <a:t>🗄️ Table: ChatSession</a:t>
+              <a:t>🗄️ ChatSessions Table</a:t>
             </a:r>
           </a:p>
           <a:p>
@@ -12861,22 +12965,6 @@
             </a:pPr>
             <a:r>
               <a:t>•  created_at</a:t>
-            </a:r>
-          </a:p>
-          <a:p>
-            <a:pPr>
-              <a:spcAft>
-                <a:spcPts val="600"/>
-              </a:spcAft>
-              <a:defRPr sz="1300">
-                <a:solidFill>
-                  <a:srgbClr val="1E293B"/>
-                </a:solidFill>
-                <a:latin typeface="Arial"/>
-              </a:defRPr>
-            </a:pPr>
-            <a:r>
-              <a:t>•  updated_at</a:t>
             </a:r>
           </a:p>
         </p:txBody>
@@ -12923,7 +13011,6 @@
           <a:lstStyle/>
           <a:p>
             <a:pPr algn="ctr"/>
-            <a:endParaRPr/>
           </a:p>
         </p:txBody>
       </p:sp>
@@ -12961,7 +13048,7 @@
               </a:defRPr>
             </a:pPr>
             <a:r>
-              <a:t>🗄️ Table: Message</a:t>
+              <a:t>🗄️ Messages Table</a:t>
             </a:r>
           </a:p>
           <a:p>
@@ -13009,7 +13096,7 @@
               </a:defRPr>
             </a:pPr>
             <a:r>
-              <a:t>•  sender (USER/AI)</a:t>
+              <a:t>•  sender</a:t>
             </a:r>
           </a:p>
           <a:p>
@@ -13104,7 +13191,6 @@
           <a:lstStyle/>
           <a:p>
             <a:pPr algn="ctr"/>
-            <a:endParaRPr/>
           </a:p>
         </p:txBody>
       </p:sp>
@@ -13142,7 +13228,7 @@
               </a:defRPr>
             </a:pPr>
             <a:r>
-              <a:t>🗄️ Table: Ticket</a:t>
+              <a:t>🗄️ Tickets Table</a:t>
             </a:r>
           </a:p>
           <a:p>
@@ -13223,22 +13309,6 @@
             </a:pPr>
             <a:r>
               <a:t>•  phone</a:t>
-            </a:r>
-          </a:p>
-          <a:p>
-            <a:pPr>
-              <a:spcAft>
-                <a:spcPts val="600"/>
-              </a:spcAft>
-              <a:defRPr sz="1300">
-                <a:solidFill>
-                  <a:srgbClr val="1E293B"/>
-                </a:solidFill>
-                <a:latin typeface="Arial"/>
-              </a:defRPr>
-            </a:pPr>
-            <a:r>
-              <a:t>•  subject</a:t>
             </a:r>
           </a:p>
           <a:p>
@@ -13301,7 +13371,6 @@
           <a:lstStyle/>
           <a:p>
             <a:pPr algn="ctr"/>
-            <a:endParaRPr/>
           </a:p>
         </p:txBody>
       </p:sp>
@@ -13339,7 +13408,7 @@
               </a:defRPr>
             </a:pPr>
             <a:r>
-              <a:t>🗄️ Table: KnowledgeBase</a:t>
+              <a:t>🗄️ KnowledgeBase Table</a:t>
             </a:r>
           </a:p>
           <a:p>
@@ -13420,22 +13489,6 @@
             </a:pPr>
             <a:r>
               <a:t>•  is_published</a:t>
-            </a:r>
-          </a:p>
-          <a:p>
-            <a:pPr>
-              <a:spcAft>
-                <a:spcPts val="600"/>
-              </a:spcAft>
-              <a:defRPr sz="1300">
-                <a:solidFill>
-                  <a:srgbClr val="1E293B"/>
-                </a:solidFill>
-                <a:latin typeface="Arial"/>
-              </a:defRPr>
-            </a:pPr>
-            <a:r>
-              <a:t>•  created_at</a:t>
             </a:r>
           </a:p>
         </p:txBody>
@@ -13482,7 +13535,6 @@
           <a:lstStyle/>
           <a:p>
             <a:pPr algn="ctr"/>
-            <a:endParaRPr/>
           </a:p>
         </p:txBody>
       </p:sp>
@@ -13520,7 +13572,7 @@
               </a:defRPr>
             </a:pPr>
             <a:r>
-              <a:t>🗄️ Table: ActivityLog</a:t>
+              <a:t>🗄️ ActivityLogs Table</a:t>
             </a:r>
           </a:p>
           <a:p>
@@ -13585,22 +13637,6 @@
             </a:pPr>
             <a:r>
               <a:t>•  details</a:t>
-            </a:r>
-          </a:p>
-          <a:p>
-            <a:pPr>
-              <a:spcAft>
-                <a:spcPts val="600"/>
-              </a:spcAft>
-              <a:defRPr sz="1300">
-                <a:solidFill>
-                  <a:srgbClr val="1E293B"/>
-                </a:solidFill>
-                <a:latin typeface="Arial"/>
-              </a:defRPr>
-            </a:pPr>
-            <a:r>
-              <a:t>•  ip_address</a:t>
             </a:r>
           </a:p>
           <a:p>
@@ -13960,44 +13996,44 @@
         <a:sysClr val="window" lastClr="FFFFFF"/>
       </a:lt1>
       <a:dk2>
-        <a:srgbClr val="0E2841"/>
+        <a:srgbClr val="1F497D"/>
       </a:dk2>
       <a:lt2>
-        <a:srgbClr val="E8E8E8"/>
+        <a:srgbClr val="EEECE1"/>
       </a:lt2>
       <a:accent1>
-        <a:srgbClr val="156082"/>
+        <a:srgbClr val="4F81BD"/>
       </a:accent1>
       <a:accent2>
-        <a:srgbClr val="E97132"/>
+        <a:srgbClr val="C0504D"/>
       </a:accent2>
       <a:accent3>
-        <a:srgbClr val="196B24"/>
+        <a:srgbClr val="9BBB59"/>
       </a:accent3>
       <a:accent4>
-        <a:srgbClr val="0F9ED5"/>
+        <a:srgbClr val="8064A2"/>
       </a:accent4>
       <a:accent5>
-        <a:srgbClr val="A02B93"/>
+        <a:srgbClr val="4BACC6"/>
       </a:accent5>
       <a:accent6>
-        <a:srgbClr val="4EA72E"/>
+        <a:srgbClr val="F79646"/>
       </a:accent6>
       <a:hlink>
-        <a:srgbClr val="467886"/>
+        <a:srgbClr val="0000FF"/>
       </a:hlink>
       <a:folHlink>
-        <a:srgbClr val="96607D"/>
+        <a:srgbClr val="800080"/>
       </a:folHlink>
     </a:clrScheme>
     <a:fontScheme name="Office">
       <a:majorFont>
-        <a:latin typeface="Aptos Display" panose="02110004020202020204"/>
+        <a:latin typeface="Calibri"/>
         <a:ea typeface=""/>
         <a:cs typeface=""/>
-        <a:font script="Jpan" typeface="游ゴシック Light"/>
+        <a:font script="Jpan" typeface="ＭＳ Ｐゴシック"/>
         <a:font script="Hang" typeface="맑은 고딕"/>
-        <a:font script="Hans" typeface="等线 Light"/>
+        <a:font script="Hans" typeface="宋体"/>
         <a:font script="Hant" typeface="新細明體"/>
         <a:font script="Arab" typeface="Times New Roman"/>
         <a:font script="Hebr" typeface="Times New Roman"/>
@@ -14025,31 +14061,14 @@
         <a:font script="Viet" typeface="Times New Roman"/>
         <a:font script="Uigh" typeface="Microsoft Uighur"/>
         <a:font script="Geor" typeface="Sylfaen"/>
-        <a:font script="Armn" typeface="Arial"/>
-        <a:font script="Bugi" typeface="Leelawadee UI"/>
-        <a:font script="Bopo" typeface="Microsoft JhengHei"/>
-        <a:font script="Java" typeface="Javanese Text"/>
-        <a:font script="Lisu" typeface="Segoe UI"/>
-        <a:font script="Mymr" typeface="Myanmar Text"/>
-        <a:font script="Nkoo" typeface="Ebrima"/>
-        <a:font script="Olck" typeface="Nirmala UI"/>
-        <a:font script="Osma" typeface="Ebrima"/>
-        <a:font script="Phag" typeface="Phagspa"/>
-        <a:font script="Syrn" typeface="Estrangelo Edessa"/>
-        <a:font script="Syrj" typeface="Estrangelo Edessa"/>
-        <a:font script="Syre" typeface="Estrangelo Edessa"/>
-        <a:font script="Sora" typeface="Nirmala UI"/>
-        <a:font script="Tale" typeface="Microsoft Tai Le"/>
-        <a:font script="Talu" typeface="Microsoft New Tai Lue"/>
-        <a:font script="Tfng" typeface="Ebrima"/>
       </a:majorFont>
       <a:minorFont>
-        <a:latin typeface="Aptos" panose="02110004020202020204"/>
+        <a:latin typeface="Calibri"/>
         <a:ea typeface=""/>
         <a:cs typeface=""/>
-        <a:font script="Jpan" typeface="游ゴシック"/>
+        <a:font script="Jpan" typeface="ＭＳ Ｐゴシック"/>
         <a:font script="Hang" typeface="맑은 고딕"/>
-        <a:font script="Hans" typeface="等线"/>
+        <a:font script="Hans" typeface="宋体"/>
         <a:font script="Hant" typeface="新細明體"/>
         <a:font script="Arab" typeface="Arial"/>
         <a:font script="Hebr" typeface="Arial"/>
@@ -14077,23 +14096,6 @@
         <a:font script="Viet" typeface="Arial"/>
         <a:font script="Uigh" typeface="Microsoft Uighur"/>
         <a:font script="Geor" typeface="Sylfaen"/>
-        <a:font script="Armn" typeface="Arial"/>
-        <a:font script="Bugi" typeface="Leelawadee UI"/>
-        <a:font script="Bopo" typeface="Microsoft JhengHei"/>
-        <a:font script="Java" typeface="Javanese Text"/>
-        <a:font script="Lisu" typeface="Segoe UI"/>
-        <a:font script="Mymr" typeface="Myanmar Text"/>
-        <a:font script="Nkoo" typeface="Ebrima"/>
-        <a:font script="Olck" typeface="Nirmala UI"/>
-        <a:font script="Osma" typeface="Ebrima"/>
-        <a:font script="Phag" typeface="Phagspa"/>
-        <a:font script="Syrn" typeface="Estrangelo Edessa"/>
-        <a:font script="Syrj" typeface="Estrangelo Edessa"/>
-        <a:font script="Syre" typeface="Estrangelo Edessa"/>
-        <a:font script="Sora" typeface="Nirmala UI"/>
-        <a:font script="Tale" typeface="Microsoft Tai Le"/>
-        <a:font script="Talu" typeface="Microsoft New Tai Lue"/>
-        <a:font script="Tfng" typeface="Ebrima"/>
       </a:minorFont>
     </a:fontScheme>
     <a:fmtScheme name="Office">
@@ -14105,136 +14107,180 @@
           <a:gsLst>
             <a:gs pos="0">
               <a:schemeClr val="phClr">
-                <a:lumMod val="110000"/>
-                <a:satMod val="105000"/>
-                <a:tint val="67000"/>
+                <a:tint val="50000"/>
+                <a:satMod val="300000"/>
               </a:schemeClr>
             </a:gs>
-            <a:gs pos="50000">
+            <a:gs pos="35000">
               <a:schemeClr val="phClr">
-                <a:lumMod val="105000"/>
-                <a:satMod val="103000"/>
-                <a:tint val="73000"/>
+                <a:tint val="37000"/>
+                <a:satMod val="300000"/>
               </a:schemeClr>
             </a:gs>
             <a:gs pos="100000">
               <a:schemeClr val="phClr">
-                <a:lumMod val="105000"/>
-                <a:satMod val="109000"/>
-                <a:tint val="81000"/>
+                <a:tint val="15000"/>
+                <a:satMod val="350000"/>
               </a:schemeClr>
             </a:gs>
           </a:gsLst>
-          <a:lin ang="5400000" scaled="0"/>
+          <a:lin ang="16200000" scaled="1"/>
         </a:gradFill>
         <a:gradFill rotWithShape="1">
           <a:gsLst>
             <a:gs pos="0">
               <a:schemeClr val="phClr">
-                <a:satMod val="103000"/>
-                <a:lumMod val="102000"/>
-                <a:tint val="94000"/>
-              </a:schemeClr>
-            </a:gs>
-            <a:gs pos="50000">
-              <a:schemeClr val="phClr">
-                <a:satMod val="110000"/>
-                <a:lumMod val="100000"/>
+                <a:tint val="100000"/>
                 <a:shade val="100000"/>
+                <a:satMod val="130000"/>
               </a:schemeClr>
             </a:gs>
             <a:gs pos="100000">
               <a:schemeClr val="phClr">
-                <a:lumMod val="99000"/>
-                <a:satMod val="120000"/>
-                <a:shade val="78000"/>
+                <a:tint val="50000"/>
+                <a:shade val="100000"/>
+                <a:satMod val="350000"/>
               </a:schemeClr>
             </a:gs>
           </a:gsLst>
-          <a:lin ang="5400000" scaled="0"/>
+          <a:lin ang="16200000" scaled="0"/>
         </a:gradFill>
       </a:fillStyleLst>
       <a:lnStyleLst>
-        <a:ln w="12700" cap="flat" cmpd="sng" algn="ctr">
+        <a:ln w="9525" cap="flat" cmpd="sng" algn="ctr">
           <a:solidFill>
-            <a:schemeClr val="phClr"/>
+            <a:schemeClr val="phClr">
+              <a:shade val="95000"/>
+              <a:satMod val="105000"/>
+            </a:schemeClr>
           </a:solidFill>
           <a:prstDash val="solid"/>
-          <a:miter lim="800000"/>
-        </a:ln>
-        <a:ln w="19050" cap="flat" cmpd="sng" algn="ctr">
-          <a:solidFill>
-            <a:schemeClr val="phClr"/>
-          </a:solidFill>
-          <a:prstDash val="solid"/>
-          <a:miter lim="800000"/>
         </a:ln>
         <a:ln w="25400" cap="flat" cmpd="sng" algn="ctr">
           <a:solidFill>
             <a:schemeClr val="phClr"/>
           </a:solidFill>
           <a:prstDash val="solid"/>
-          <a:miter lim="800000"/>
+        </a:ln>
+        <a:ln w="38100" cap="flat" cmpd="sng" algn="ctr">
+          <a:solidFill>
+            <a:schemeClr val="phClr"/>
+          </a:solidFill>
+          <a:prstDash val="solid"/>
         </a:ln>
       </a:lnStyleLst>
       <a:effectStyleLst>
         <a:effectStyle>
-          <a:effectLst/>
-        </a:effectStyle>
-        <a:effectStyle>
-          <a:effectLst/>
+          <a:effectLst>
+            <a:outerShdw blurRad="40000" dist="20000" dir="5400000" rotWithShape="0">
+              <a:srgbClr val="000000">
+                <a:alpha val="38000"/>
+              </a:srgbClr>
+            </a:outerShdw>
+          </a:effectLst>
         </a:effectStyle>
         <a:effectStyle>
           <a:effectLst>
-            <a:outerShdw blurRad="57150" dist="19050" dir="5400000" algn="ctr" rotWithShape="0">
+            <a:outerShdw blurRad="40000" dist="23000" dir="5400000" rotWithShape="0">
               <a:srgbClr val="000000">
-                <a:alpha val="63000"/>
+                <a:alpha val="35000"/>
               </a:srgbClr>
             </a:outerShdw>
           </a:effectLst>
+        </a:effectStyle>
+        <a:effectStyle>
+          <a:effectLst>
+            <a:outerShdw blurRad="40000" dist="23000" dir="5400000" rotWithShape="0">
+              <a:srgbClr val="000000">
+                <a:alpha val="35000"/>
+              </a:srgbClr>
+            </a:outerShdw>
+          </a:effectLst>
+          <a:scene3d>
+            <a:camera prst="orthographicFront">
+              <a:rot lat="0" lon="0" rev="0"/>
+            </a:camera>
+            <a:lightRig rig="threePt" dir="t">
+              <a:rot lat="0" lon="0" rev="1200000"/>
+            </a:lightRig>
+          </a:scene3d>
+          <a:sp3d>
+            <a:bevelT w="63500" h="25400"/>
+          </a:sp3d>
         </a:effectStyle>
       </a:effectStyleLst>
       <a:bgFillStyleLst>
         <a:solidFill>
           <a:schemeClr val="phClr"/>
         </a:solidFill>
-        <a:solidFill>
-          <a:schemeClr val="phClr">
-            <a:tint val="95000"/>
-            <a:satMod val="170000"/>
-          </a:schemeClr>
-        </a:solidFill>
         <a:gradFill rotWithShape="1">
           <a:gsLst>
             <a:gs pos="0">
               <a:schemeClr val="phClr">
-                <a:tint val="93000"/>
-                <a:satMod val="150000"/>
-                <a:shade val="98000"/>
-                <a:lumMod val="102000"/>
+                <a:tint val="40000"/>
+                <a:satMod val="350000"/>
               </a:schemeClr>
             </a:gs>
-            <a:gs pos="50000">
+            <a:gs pos="40000">
               <a:schemeClr val="phClr">
-                <a:tint val="98000"/>
-                <a:satMod val="130000"/>
-                <a:shade val="90000"/>
-                <a:lumMod val="103000"/>
+                <a:tint val="45000"/>
+                <a:shade val="99000"/>
+                <a:satMod val="350000"/>
               </a:schemeClr>
             </a:gs>
             <a:gs pos="100000">
               <a:schemeClr val="phClr">
-                <a:shade val="63000"/>
-                <a:satMod val="120000"/>
+                <a:shade val="20000"/>
+                <a:satMod val="255000"/>
               </a:schemeClr>
             </a:gs>
           </a:gsLst>
-          <a:lin ang="5400000" scaled="0"/>
+          <a:path path="circle">
+            <a:fillToRect l="50000" t="-80000" r="50000" b="180000"/>
+          </a:path>
+        </a:gradFill>
+        <a:gradFill rotWithShape="1">
+          <a:gsLst>
+            <a:gs pos="0">
+              <a:schemeClr val="phClr">
+                <a:tint val="80000"/>
+                <a:satMod val="300000"/>
+              </a:schemeClr>
+            </a:gs>
+            <a:gs pos="100000">
+              <a:schemeClr val="phClr">
+                <a:shade val="30000"/>
+                <a:satMod val="200000"/>
+              </a:schemeClr>
+            </a:gs>
+          </a:gsLst>
+          <a:path path="circle">
+            <a:fillToRect l="50000" t="50000" r="50000" b="50000"/>
+          </a:path>
         </a:gradFill>
       </a:bgFillStyleLst>
     </a:fmtScheme>
   </a:themeElements>
   <a:objectDefaults>
+    <a:spDef>
+      <a:spPr/>
+      <a:bodyPr/>
+      <a:lstStyle/>
+      <a:style>
+        <a:lnRef idx="1">
+          <a:schemeClr val="accent1"/>
+        </a:lnRef>
+        <a:fillRef idx="3">
+          <a:schemeClr val="accent1"/>
+        </a:fillRef>
+        <a:effectRef idx="2">
+          <a:schemeClr val="accent1"/>
+        </a:effectRef>
+        <a:fontRef idx="minor">
+          <a:schemeClr val="lt1"/>
+        </a:fontRef>
+      </a:style>
+    </a:spDef>
     <a:lnDef>
       <a:spPr/>
       <a:bodyPr/>
@@ -14256,10 +14302,5 @@
     </a:lnDef>
   </a:objectDefaults>
   <a:extraClrSchemeLst/>
-  <a:extLst>
-    <a:ext uri="{05A4C25C-085E-4340-85A3-A5531E510DB2}">
-      <thm15:themeFamily xmlns:thm15="http://schemas.microsoft.com/office/thememl/2012/main" name="Office Theme" id="{2E142A2C-CD16-42D6-873A-C26D2A0506FA}" vid="{1BDDFF52-6CD6-40A5-AB3C-68EB2F1E4D0A}"/>
-    </a:ext>
-  </a:extLst>
 </a:theme>
 </file>